--- a/2025/ISIS_November_2025/graphics/presentation-examples/template.pptx
+++ b/2025/ISIS_November_2025/graphics/presentation-examples/template.pptx
@@ -9,15 +9,6 @@
   </p:notesMasterIdLst>
   <p:sldIdLst>
     <p:sldId id="256" r:id="rId8"/>
-    <p:sldId id="257" r:id="rId9"/>
-    <p:sldId id="258" r:id="rId10"/>
-    <p:sldId id="259" r:id="rId11"/>
-    <p:sldId id="260" r:id="rId12"/>
-    <p:sldId id="261" r:id="rId13"/>
-    <p:sldId id="262" r:id="rId14"/>
-    <p:sldId id="263" r:id="rId15"/>
-    <p:sldId id="264" r:id="rId16"/>
-    <p:sldId id="265" r:id="rId17"/>
   </p:sldIdLst>
   <p:sldSz cx="12179300" cy="6858000"/>
   <p:notesSz cx="6858000" cy="9144000"/>
@@ -345,7 +336,7 @@
       </p:grpSpPr>
       <p:sp>
         <p:nvSpPr>
-          <p:cNvPr id="297" name="Shape 297"/>
+          <p:cNvPr id="315" name="Shape 315"/>
           <p:cNvSpPr/>
           <p:nvPr>
             <p:ph type="sldImg"/>
@@ -370,7 +361,7 @@
       </p:sp>
       <p:sp>
         <p:nvSpPr>
-          <p:cNvPr id="298" name="Shape 298"/>
+          <p:cNvPr id="316" name="Shape 316"/>
           <p:cNvSpPr/>
           <p:nvPr>
             <p:ph type="body" sz="quarter" idx="1"/>
@@ -1308,7 +1299,7 @@
           <a:p>
             <a:pPr/>
             <a:r>
-              <a:t>2021 ISIS McStas school</a:t>
+              <a:t>2025 ISIS McStas school</a:t>
             </a:r>
           </a:p>
         </p:txBody>
@@ -2665,6 +2656,875 @@
 </p:sldLayout>
 </file>
 
+<file path=ppt/slideLayouts/slideLayout12.xml><?xml version="1.0" encoding="utf-8"?>
+<p:sldLayout xmlns:a="http://schemas.openxmlformats.org/drawingml/2006/main" xmlns:r="http://schemas.openxmlformats.org/officeDocument/2006/relationships" xmlns:p="http://schemas.openxmlformats.org/presentationml/2006/main" xmlns:m="http://schemas.openxmlformats.org/officeDocument/2006/math" xmlns:a14="http://schemas.microsoft.com/office/drawing/2010/main" type="tx" showMasterSp="0" showMasterPhAnim="1">
+  <p:cSld name="One content">
+    <p:spTree>
+      <p:nvGrpSpPr>
+        <p:cNvPr id="1" name=""/>
+        <p:cNvGrpSpPr/>
+        <p:nvPr/>
+      </p:nvGrpSpPr>
+      <p:grpSpPr>
+        <a:xfrm>
+          <a:off x="0" y="0"/>
+          <a:ext cx="0" cy="0"/>
+          <a:chOff x="0" y="0"/>
+          <a:chExt cx="0" cy="0"/>
+        </a:xfrm>
+      </p:grpSpPr>
+      <p:grpSp>
+        <p:nvGrpSpPr>
+          <p:cNvPr id="303" name="Group"/>
+          <p:cNvGrpSpPr/>
+          <p:nvPr/>
+        </p:nvGrpSpPr>
+        <p:grpSpPr>
+          <a:xfrm>
+            <a:off x="6350" y="-1"/>
+            <a:ext cx="12193200" cy="6876383"/>
+            <a:chOff x="0" y="0"/>
+            <a:chExt cx="12193199" cy="6876381"/>
+          </a:xfrm>
+        </p:grpSpPr>
+        <p:grpSp>
+          <p:nvGrpSpPr>
+            <p:cNvPr id="301" name="Group"/>
+            <p:cNvGrpSpPr/>
+            <p:nvPr/>
+          </p:nvGrpSpPr>
+          <p:grpSpPr>
+            <a:xfrm>
+              <a:off x="0" y="-1"/>
+              <a:ext cx="12193200" cy="6876383"/>
+              <a:chOff x="0" y="0"/>
+              <a:chExt cx="12193199" cy="6876381"/>
+            </a:xfrm>
+          </p:grpSpPr>
+          <p:sp>
+            <p:nvSpPr>
+              <p:cNvPr id="298" name="Bottom bar"/>
+              <p:cNvSpPr/>
+              <p:nvPr/>
+            </p:nvSpPr>
+            <p:spPr>
+              <a:xfrm>
+                <a:off x="0" y="6559534"/>
+                <a:ext cx="12193200" cy="316801"/>
+              </a:xfrm>
+              <a:prstGeom prst="rect">
+                <a:avLst/>
+              </a:prstGeom>
+              <a:solidFill>
+                <a:srgbClr val="44A9E3"/>
+              </a:solidFill>
+              <a:ln w="12700" cap="flat">
+                <a:noFill/>
+                <a:miter lim="400000"/>
+              </a:ln>
+              <a:effectLst/>
+            </p:spPr>
+            <p:txBody>
+              <a:bodyPr wrap="square" lIns="46799" tIns="46799" rIns="46799" bIns="46799" numCol="1" anchor="ctr">
+                <a:noAutofit/>
+              </a:bodyPr>
+              <a:lstStyle/>
+              <a:p>
+                <a:pPr algn="ctr">
+                  <a:spcBef>
+                    <a:spcPts val="400"/>
+                  </a:spcBef>
+                  <a:defRPr>
+                    <a:solidFill>
+                      <a:srgbClr val="FFFFFF"/>
+                    </a:solidFill>
+                  </a:defRPr>
+                </a:pPr>
+              </a:p>
+            </p:txBody>
+          </p:sp>
+          <p:sp>
+            <p:nvSpPr>
+              <p:cNvPr id="299" name="Top bar"/>
+              <p:cNvSpPr/>
+              <p:nvPr/>
+            </p:nvSpPr>
+            <p:spPr>
+              <a:xfrm>
+                <a:off x="0" y="0"/>
+                <a:ext cx="12193200" cy="50401"/>
+              </a:xfrm>
+              <a:prstGeom prst="rect">
+                <a:avLst/>
+              </a:prstGeom>
+              <a:solidFill>
+                <a:srgbClr val="44A9E3"/>
+              </a:solidFill>
+              <a:ln w="12700" cap="flat">
+                <a:noFill/>
+                <a:miter lim="400000"/>
+              </a:ln>
+              <a:effectLst/>
+            </p:spPr>
+            <p:txBody>
+              <a:bodyPr wrap="square" lIns="46799" tIns="46799" rIns="46799" bIns="46799" numCol="1" anchor="ctr">
+                <a:noAutofit/>
+              </a:bodyPr>
+              <a:lstStyle/>
+              <a:p>
+                <a:pPr algn="ctr">
+                  <a:spcBef>
+                    <a:spcPts val="400"/>
+                  </a:spcBef>
+                  <a:defRPr>
+                    <a:solidFill>
+                      <a:srgbClr val="FFFFFF"/>
+                    </a:solidFill>
+                  </a:defRPr>
+                </a:pPr>
+              </a:p>
+            </p:txBody>
+          </p:sp>
+          <p:pic>
+            <p:nvPicPr>
+              <p:cNvPr id="300" name="pasted-movie.png" descr="pasted-movie.png"/>
+              <p:cNvPicPr>
+                <a:picLocks noChangeAspect="1"/>
+              </p:cNvPicPr>
+              <p:nvPr/>
+            </p:nvPicPr>
+            <p:blipFill>
+              <a:blip r:embed="rId2">
+                <a:extLst/>
+              </a:blip>
+              <a:srcRect l="0" t="0" r="0" b="0"/>
+              <a:stretch>
+                <a:fillRect/>
+              </a:stretch>
+            </p:blipFill>
+            <p:spPr>
+              <a:xfrm>
+                <a:off x="4913605" y="6559581"/>
+                <a:ext cx="6349482" cy="316801"/>
+              </a:xfrm>
+              <a:prstGeom prst="rect">
+                <a:avLst/>
+              </a:prstGeom>
+              <a:ln w="12700" cap="flat">
+                <a:noFill/>
+                <a:miter lim="400000"/>
+              </a:ln>
+              <a:effectLst/>
+            </p:spPr>
+          </p:pic>
+        </p:grpSp>
+        <p:sp>
+          <p:nvSpPr>
+            <p:cNvPr id="302" name="UserProfile.Offices.Workarea_{{DocumentLanguage}}text"/>
+            <p:cNvSpPr txBox="1"/>
+            <p:nvPr/>
+          </p:nvSpPr>
+          <p:spPr>
+            <a:xfrm>
+              <a:off x="1348199" y="6636099"/>
+              <a:ext cx="3397072" cy="127001"/>
+            </a:xfrm>
+            <a:prstGeom prst="rect">
+              <a:avLst/>
+            </a:prstGeom>
+            <a:noFill/>
+            <a:ln w="12700" cap="flat">
+              <a:noFill/>
+              <a:miter lim="400000"/>
+            </a:ln>
+            <a:effectLst/>
+            <a:extLst>
+              <a:ext uri="{C572A759-6A51-4108-AA02-DFA0A04FC94B}">
+                <ma14:wrappingTextBoxFlag xmlns:ma14="http://schemas.microsoft.com/office/mac/drawingml/2011/main" val="1"/>
+              </a:ext>
+            </a:extLst>
+          </p:spPr>
+          <p:txBody>
+            <a:bodyPr wrap="square" lIns="0" tIns="0" rIns="0" bIns="0" numCol="1" anchor="ctr">
+              <a:spAutoFit/>
+            </a:bodyPr>
+            <a:lstStyle>
+              <a:lvl1pPr>
+                <a:spcBef>
+                  <a:spcPts val="0"/>
+                </a:spcBef>
+                <a:defRPr b="1" sz="700">
+                  <a:solidFill>
+                    <a:srgbClr val="FFFFFF"/>
+                  </a:solidFill>
+                </a:defRPr>
+              </a:lvl1pPr>
+            </a:lstStyle>
+            <a:p>
+              <a:pPr/>
+              <a:r>
+                <a:t>Peter Willendrup, DTU Physics and ESS DMSC</a:t>
+              </a:r>
+            </a:p>
+          </p:txBody>
+        </p:sp>
+      </p:grpSp>
+      <p:sp>
+        <p:nvSpPr>
+          <p:cNvPr id="304" name="Logo color"/>
+          <p:cNvSpPr/>
+          <p:nvPr/>
+        </p:nvSpPr>
+        <p:spPr>
+          <a:xfrm>
+            <a:off x="252000" y="252000"/>
+            <a:ext cx="419612" cy="612001"/>
+          </a:xfrm>
+          <a:custGeom>
+            <a:avLst/>
+            <a:gdLst/>
+            <a:ahLst/>
+            <a:cxnLst>
+              <a:cxn ang="0">
+                <a:pos x="wd2" y="hd2"/>
+              </a:cxn>
+              <a:cxn ang="5400000">
+                <a:pos x="wd2" y="hd2"/>
+              </a:cxn>
+              <a:cxn ang="10800000">
+                <a:pos x="wd2" y="hd2"/>
+              </a:cxn>
+              <a:cxn ang="16200000">
+                <a:pos x="wd2" y="hd2"/>
+              </a:cxn>
+            </a:cxnLst>
+            <a:rect l="0" t="0" r="r" b="b"/>
+            <a:pathLst>
+              <a:path w="21600" h="21600" fill="norm" stroke="1" extrusionOk="0">
+                <a:moveTo>
+                  <a:pt x="4597" y="18293"/>
+                </a:moveTo>
+                <a:cubicBezTo>
+                  <a:pt x="10549" y="19881"/>
+                  <a:pt x="11051" y="19881"/>
+                  <a:pt x="17003" y="18293"/>
+                </a:cubicBezTo>
+                <a:cubicBezTo>
+                  <a:pt x="17003" y="18293"/>
+                  <a:pt x="17003" y="18293"/>
+                  <a:pt x="21600" y="19949"/>
+                </a:cubicBezTo>
+                <a:cubicBezTo>
+                  <a:pt x="21600" y="19949"/>
+                  <a:pt x="21600" y="19949"/>
+                  <a:pt x="17003" y="21600"/>
+                </a:cubicBezTo>
+                <a:cubicBezTo>
+                  <a:pt x="11051" y="20016"/>
+                  <a:pt x="10549" y="20016"/>
+                  <a:pt x="4597" y="21600"/>
+                </a:cubicBezTo>
+                <a:cubicBezTo>
+                  <a:pt x="4597" y="21600"/>
+                  <a:pt x="4597" y="21600"/>
+                  <a:pt x="0" y="19949"/>
+                </a:cubicBezTo>
+                <a:cubicBezTo>
+                  <a:pt x="0" y="19949"/>
+                  <a:pt x="0" y="19949"/>
+                  <a:pt x="4597" y="18293"/>
+                </a:cubicBezTo>
+                <a:close/>
+                <a:moveTo>
+                  <a:pt x="4597" y="14200"/>
+                </a:moveTo>
+                <a:cubicBezTo>
+                  <a:pt x="10549" y="15790"/>
+                  <a:pt x="11051" y="15790"/>
+                  <a:pt x="17003" y="14200"/>
+                </a:cubicBezTo>
+                <a:cubicBezTo>
+                  <a:pt x="17003" y="14200"/>
+                  <a:pt x="17003" y="14200"/>
+                  <a:pt x="21600" y="15858"/>
+                </a:cubicBezTo>
+                <a:cubicBezTo>
+                  <a:pt x="21600" y="15858"/>
+                  <a:pt x="21600" y="15858"/>
+                  <a:pt x="17003" y="17512"/>
+                </a:cubicBezTo>
+                <a:cubicBezTo>
+                  <a:pt x="11051" y="15925"/>
+                  <a:pt x="10549" y="15925"/>
+                  <a:pt x="4597" y="17512"/>
+                </a:cubicBezTo>
+                <a:cubicBezTo>
+                  <a:pt x="4597" y="17512"/>
+                  <a:pt x="4597" y="17512"/>
+                  <a:pt x="0" y="15858"/>
+                </a:cubicBezTo>
+                <a:cubicBezTo>
+                  <a:pt x="0" y="15858"/>
+                  <a:pt x="0" y="15858"/>
+                  <a:pt x="4597" y="14200"/>
+                </a:cubicBezTo>
+                <a:close/>
+                <a:moveTo>
+                  <a:pt x="4597" y="10111"/>
+                </a:moveTo>
+                <a:cubicBezTo>
+                  <a:pt x="10549" y="11702"/>
+                  <a:pt x="11051" y="11702"/>
+                  <a:pt x="17003" y="10111"/>
+                </a:cubicBezTo>
+                <a:cubicBezTo>
+                  <a:pt x="17003" y="10111"/>
+                  <a:pt x="17003" y="10111"/>
+                  <a:pt x="21600" y="11769"/>
+                </a:cubicBezTo>
+                <a:cubicBezTo>
+                  <a:pt x="21600" y="11769"/>
+                  <a:pt x="21600" y="11769"/>
+                  <a:pt x="17003" y="13423"/>
+                </a:cubicBezTo>
+                <a:cubicBezTo>
+                  <a:pt x="11051" y="11837"/>
+                  <a:pt x="10549" y="11837"/>
+                  <a:pt x="4597" y="13423"/>
+                </a:cubicBezTo>
+                <a:cubicBezTo>
+                  <a:pt x="4597" y="13423"/>
+                  <a:pt x="4597" y="13423"/>
+                  <a:pt x="0" y="11769"/>
+                </a:cubicBezTo>
+                <a:cubicBezTo>
+                  <a:pt x="0" y="11769"/>
+                  <a:pt x="0" y="11769"/>
+                  <a:pt x="4597" y="10111"/>
+                </a:cubicBezTo>
+                <a:close/>
+                <a:moveTo>
+                  <a:pt x="2971" y="918"/>
+                </a:moveTo>
+                <a:lnTo>
+                  <a:pt x="2971" y="6926"/>
+                </a:lnTo>
+                <a:cubicBezTo>
+                  <a:pt x="2971" y="6926"/>
+                  <a:pt x="2971" y="6926"/>
+                  <a:pt x="3980" y="6926"/>
+                </a:cubicBezTo>
+                <a:cubicBezTo>
+                  <a:pt x="4430" y="6926"/>
+                  <a:pt x="4695" y="6878"/>
+                  <a:pt x="4903" y="6708"/>
+                </a:cubicBezTo>
+                <a:cubicBezTo>
+                  <a:pt x="5220" y="6447"/>
+                  <a:pt x="5249" y="5917"/>
+                  <a:pt x="5249" y="4849"/>
+                </a:cubicBezTo>
+                <a:cubicBezTo>
+                  <a:pt x="5249" y="4849"/>
+                  <a:pt x="5249" y="4849"/>
+                  <a:pt x="5249" y="2990"/>
+                </a:cubicBezTo>
+                <a:cubicBezTo>
+                  <a:pt x="5249" y="1926"/>
+                  <a:pt x="5220" y="1396"/>
+                  <a:pt x="4903" y="1135"/>
+                </a:cubicBezTo>
+                <a:cubicBezTo>
+                  <a:pt x="4695" y="965"/>
+                  <a:pt x="4430" y="918"/>
+                  <a:pt x="3980" y="918"/>
+                </a:cubicBezTo>
+                <a:cubicBezTo>
+                  <a:pt x="3980" y="918"/>
+                  <a:pt x="3980" y="918"/>
+                  <a:pt x="2971" y="918"/>
+                </a:cubicBezTo>
+                <a:close/>
+                <a:moveTo>
+                  <a:pt x="8068" y="0"/>
+                </a:moveTo>
+                <a:cubicBezTo>
+                  <a:pt x="8068" y="0"/>
+                  <a:pt x="8068" y="0"/>
+                  <a:pt x="13456" y="0"/>
+                </a:cubicBezTo>
+                <a:cubicBezTo>
+                  <a:pt x="13542" y="0"/>
+                  <a:pt x="13594" y="16"/>
+                  <a:pt x="13635" y="44"/>
+                </a:cubicBezTo>
+                <a:cubicBezTo>
+                  <a:pt x="13669" y="67"/>
+                  <a:pt x="13698" y="103"/>
+                  <a:pt x="13698" y="162"/>
+                </a:cubicBezTo>
+                <a:cubicBezTo>
+                  <a:pt x="13698" y="162"/>
+                  <a:pt x="13698" y="162"/>
+                  <a:pt x="13698" y="827"/>
+                </a:cubicBezTo>
+                <a:cubicBezTo>
+                  <a:pt x="13698" y="886"/>
+                  <a:pt x="13669" y="922"/>
+                  <a:pt x="13635" y="945"/>
+                </a:cubicBezTo>
+                <a:cubicBezTo>
+                  <a:pt x="13594" y="973"/>
+                  <a:pt x="13542" y="989"/>
+                  <a:pt x="13456" y="989"/>
+                </a:cubicBezTo>
+                <a:cubicBezTo>
+                  <a:pt x="13456" y="989"/>
+                  <a:pt x="13456" y="989"/>
+                  <a:pt x="11731" y="989"/>
+                </a:cubicBezTo>
+                <a:cubicBezTo>
+                  <a:pt x="11731" y="989"/>
+                  <a:pt x="11731" y="989"/>
+                  <a:pt x="11731" y="7681"/>
+                </a:cubicBezTo>
+                <a:cubicBezTo>
+                  <a:pt x="11731" y="7740"/>
+                  <a:pt x="11708" y="7776"/>
+                  <a:pt x="11667" y="7800"/>
+                </a:cubicBezTo>
+                <a:cubicBezTo>
+                  <a:pt x="11633" y="7827"/>
+                  <a:pt x="11581" y="7843"/>
+                  <a:pt x="11494" y="7843"/>
+                </a:cubicBezTo>
+                <a:cubicBezTo>
+                  <a:pt x="11494" y="7843"/>
+                  <a:pt x="11494" y="7843"/>
+                  <a:pt x="10029" y="7843"/>
+                </a:cubicBezTo>
+                <a:cubicBezTo>
+                  <a:pt x="9943" y="7843"/>
+                  <a:pt x="9891" y="7827"/>
+                  <a:pt x="9850" y="7800"/>
+                </a:cubicBezTo>
+                <a:cubicBezTo>
+                  <a:pt x="9810" y="7776"/>
+                  <a:pt x="9787" y="7740"/>
+                  <a:pt x="9787" y="7681"/>
+                </a:cubicBezTo>
+                <a:cubicBezTo>
+                  <a:pt x="9787" y="7681"/>
+                  <a:pt x="9787" y="7681"/>
+                  <a:pt x="9787" y="989"/>
+                </a:cubicBezTo>
+                <a:cubicBezTo>
+                  <a:pt x="9787" y="989"/>
+                  <a:pt x="9787" y="989"/>
+                  <a:pt x="8068" y="989"/>
+                </a:cubicBezTo>
+                <a:cubicBezTo>
+                  <a:pt x="7981" y="989"/>
+                  <a:pt x="7929" y="973"/>
+                  <a:pt x="7889" y="945"/>
+                </a:cubicBezTo>
+                <a:cubicBezTo>
+                  <a:pt x="7849" y="922"/>
+                  <a:pt x="7825" y="886"/>
+                  <a:pt x="7825" y="827"/>
+                </a:cubicBezTo>
+                <a:cubicBezTo>
+                  <a:pt x="7825" y="827"/>
+                  <a:pt x="7825" y="827"/>
+                  <a:pt x="7825" y="162"/>
+                </a:cubicBezTo>
+                <a:cubicBezTo>
+                  <a:pt x="7825" y="103"/>
+                  <a:pt x="7849" y="67"/>
+                  <a:pt x="7889" y="44"/>
+                </a:cubicBezTo>
+                <a:cubicBezTo>
+                  <a:pt x="7929" y="16"/>
+                  <a:pt x="7981" y="0"/>
+                  <a:pt x="8068" y="0"/>
+                </a:cubicBezTo>
+                <a:close/>
+                <a:moveTo>
+                  <a:pt x="1390" y="0"/>
+                </a:moveTo>
+                <a:cubicBezTo>
+                  <a:pt x="1390" y="0"/>
+                  <a:pt x="1390" y="0"/>
+                  <a:pt x="4257" y="0"/>
+                </a:cubicBezTo>
+                <a:cubicBezTo>
+                  <a:pt x="5370" y="0"/>
+                  <a:pt x="6051" y="174"/>
+                  <a:pt x="6466" y="538"/>
+                </a:cubicBezTo>
+                <a:cubicBezTo>
+                  <a:pt x="7072" y="1036"/>
+                  <a:pt x="7089" y="1843"/>
+                  <a:pt x="7089" y="3077"/>
+                </a:cubicBezTo>
+                <a:cubicBezTo>
+                  <a:pt x="7089" y="3077"/>
+                  <a:pt x="7089" y="3077"/>
+                  <a:pt x="7089" y="4766"/>
+                </a:cubicBezTo>
+                <a:cubicBezTo>
+                  <a:pt x="7089" y="6000"/>
+                  <a:pt x="7072" y="6807"/>
+                  <a:pt x="6466" y="7305"/>
+                </a:cubicBezTo>
+                <a:cubicBezTo>
+                  <a:pt x="6051" y="7669"/>
+                  <a:pt x="5370" y="7843"/>
+                  <a:pt x="4257" y="7843"/>
+                </a:cubicBezTo>
+                <a:cubicBezTo>
+                  <a:pt x="4257" y="7843"/>
+                  <a:pt x="4257" y="7843"/>
+                  <a:pt x="1390" y="7843"/>
+                </a:cubicBezTo>
+                <a:cubicBezTo>
+                  <a:pt x="1304" y="7843"/>
+                  <a:pt x="1252" y="7827"/>
+                  <a:pt x="1217" y="7800"/>
+                </a:cubicBezTo>
+                <a:cubicBezTo>
+                  <a:pt x="1177" y="7776"/>
+                  <a:pt x="1154" y="7740"/>
+                  <a:pt x="1154" y="7681"/>
+                </a:cubicBezTo>
+                <a:cubicBezTo>
+                  <a:pt x="1154" y="7681"/>
+                  <a:pt x="1154" y="7681"/>
+                  <a:pt x="1154" y="162"/>
+                </a:cubicBezTo>
+                <a:cubicBezTo>
+                  <a:pt x="1154" y="103"/>
+                  <a:pt x="1177" y="67"/>
+                  <a:pt x="1217" y="44"/>
+                </a:cubicBezTo>
+                <a:cubicBezTo>
+                  <a:pt x="1252" y="16"/>
+                  <a:pt x="1304" y="0"/>
+                  <a:pt x="1390" y="0"/>
+                </a:cubicBezTo>
+                <a:close/>
+                <a:moveTo>
+                  <a:pt x="14706" y="0"/>
+                </a:moveTo>
+                <a:cubicBezTo>
+                  <a:pt x="14706" y="0"/>
+                  <a:pt x="14706" y="0"/>
+                  <a:pt x="16045" y="0"/>
+                </a:cubicBezTo>
+                <a:cubicBezTo>
+                  <a:pt x="16131" y="0"/>
+                  <a:pt x="16183" y="16"/>
+                  <a:pt x="16224" y="44"/>
+                </a:cubicBezTo>
+                <a:cubicBezTo>
+                  <a:pt x="16264" y="67"/>
+                  <a:pt x="16287" y="103"/>
+                  <a:pt x="16287" y="162"/>
+                </a:cubicBezTo>
+                <a:cubicBezTo>
+                  <a:pt x="16287" y="162"/>
+                  <a:pt x="16287" y="162"/>
+                  <a:pt x="16287" y="5712"/>
+                </a:cubicBezTo>
+                <a:cubicBezTo>
+                  <a:pt x="16287" y="6314"/>
+                  <a:pt x="16368" y="6646"/>
+                  <a:pt x="16627" y="6844"/>
+                </a:cubicBezTo>
+                <a:cubicBezTo>
+                  <a:pt x="16818" y="6990"/>
+                  <a:pt x="17072" y="7053"/>
+                  <a:pt x="17406" y="7053"/>
+                </a:cubicBezTo>
+                <a:cubicBezTo>
+                  <a:pt x="17776" y="7053"/>
+                  <a:pt x="18041" y="6982"/>
+                  <a:pt x="18226" y="6844"/>
+                </a:cubicBezTo>
+                <a:cubicBezTo>
+                  <a:pt x="18503" y="6638"/>
+                  <a:pt x="18566" y="6294"/>
+                  <a:pt x="18566" y="5712"/>
+                </a:cubicBezTo>
+                <a:cubicBezTo>
+                  <a:pt x="18566" y="5712"/>
+                  <a:pt x="18566" y="5712"/>
+                  <a:pt x="18566" y="162"/>
+                </a:cubicBezTo>
+                <a:cubicBezTo>
+                  <a:pt x="18566" y="103"/>
+                  <a:pt x="18589" y="67"/>
+                  <a:pt x="18630" y="44"/>
+                </a:cubicBezTo>
+                <a:cubicBezTo>
+                  <a:pt x="18664" y="16"/>
+                  <a:pt x="18722" y="0"/>
+                  <a:pt x="18803" y="0"/>
+                </a:cubicBezTo>
+                <a:cubicBezTo>
+                  <a:pt x="18803" y="0"/>
+                  <a:pt x="18803" y="0"/>
+                  <a:pt x="20147" y="0"/>
+                </a:cubicBezTo>
+                <a:cubicBezTo>
+                  <a:pt x="20234" y="0"/>
+                  <a:pt x="20286" y="16"/>
+                  <a:pt x="20320" y="44"/>
+                </a:cubicBezTo>
+                <a:cubicBezTo>
+                  <a:pt x="20361" y="67"/>
+                  <a:pt x="20384" y="103"/>
+                  <a:pt x="20384" y="162"/>
+                </a:cubicBezTo>
+                <a:cubicBezTo>
+                  <a:pt x="20384" y="162"/>
+                  <a:pt x="20384" y="162"/>
+                  <a:pt x="20384" y="5716"/>
+                </a:cubicBezTo>
+                <a:cubicBezTo>
+                  <a:pt x="20384" y="6464"/>
+                  <a:pt x="20257" y="6962"/>
+                  <a:pt x="19732" y="7382"/>
+                </a:cubicBezTo>
+                <a:cubicBezTo>
+                  <a:pt x="19287" y="7738"/>
+                  <a:pt x="18560" y="7943"/>
+                  <a:pt x="17430" y="7943"/>
+                </a:cubicBezTo>
+                <a:cubicBezTo>
+                  <a:pt x="16316" y="7943"/>
+                  <a:pt x="15583" y="7750"/>
+                  <a:pt x="15093" y="7382"/>
+                </a:cubicBezTo>
+                <a:cubicBezTo>
+                  <a:pt x="14625" y="7030"/>
+                  <a:pt x="14469" y="6523"/>
+                  <a:pt x="14469" y="5716"/>
+                </a:cubicBezTo>
+                <a:cubicBezTo>
+                  <a:pt x="14469" y="5716"/>
+                  <a:pt x="14469" y="5716"/>
+                  <a:pt x="14469" y="162"/>
+                </a:cubicBezTo>
+                <a:cubicBezTo>
+                  <a:pt x="14469" y="103"/>
+                  <a:pt x="14493" y="67"/>
+                  <a:pt x="14527" y="44"/>
+                </a:cubicBezTo>
+                <a:cubicBezTo>
+                  <a:pt x="14568" y="16"/>
+                  <a:pt x="14620" y="0"/>
+                  <a:pt x="14706" y="0"/>
+                </a:cubicBezTo>
+                <a:close/>
+              </a:path>
+            </a:pathLst>
+          </a:custGeom>
+          <a:solidFill>
+            <a:schemeClr val="accent1"/>
+          </a:solidFill>
+          <a:ln w="12700">
+            <a:miter lim="400000"/>
+          </a:ln>
+        </p:spPr>
+        <p:txBody>
+          <a:bodyPr lIns="46799" tIns="46799" rIns="46799" bIns="46799"/>
+          <a:lstStyle/>
+          <a:p>
+            <a:pPr>
+              <a:defRPr>
+                <a:latin typeface="Verdana"/>
+                <a:ea typeface="Verdana"/>
+                <a:cs typeface="Verdana"/>
+                <a:sym typeface="Verdana"/>
+              </a:defRPr>
+            </a:pPr>
+          </a:p>
+        </p:txBody>
+      </p:sp>
+      <p:sp>
+        <p:nvSpPr>
+          <p:cNvPr id="305" name="Title Text"/>
+          <p:cNvSpPr txBox="1"/>
+          <p:nvPr>
+            <p:ph type="title"/>
+          </p:nvPr>
+        </p:nvSpPr>
+        <p:spPr>
+          <a:xfrm>
+            <a:off x="1774725" y="426126"/>
+            <a:ext cx="9312376" cy="972718"/>
+          </a:xfrm>
+          <a:prstGeom prst="rect">
+            <a:avLst/>
+          </a:prstGeom>
+        </p:spPr>
+        <p:txBody>
+          <a:bodyPr>
+            <a:normAutofit fontScale="100000" lnSpcReduction="0"/>
+          </a:bodyPr>
+          <a:lstStyle/>
+          <a:p>
+            <a:pPr/>
+            <a:r>
+              <a:t>Title Text</a:t>
+            </a:r>
+          </a:p>
+        </p:txBody>
+      </p:sp>
+      <p:sp>
+        <p:nvSpPr>
+          <p:cNvPr id="306" name="Body Level One…"/>
+          <p:cNvSpPr txBox="1"/>
+          <p:nvPr>
+            <p:ph type="body" idx="1"/>
+          </p:nvPr>
+        </p:nvSpPr>
+        <p:spPr>
+          <a:xfrm>
+            <a:off x="1774800" y="1706399"/>
+            <a:ext cx="9312375" cy="4545579"/>
+          </a:xfrm>
+          <a:prstGeom prst="rect">
+            <a:avLst/>
+          </a:prstGeom>
+        </p:spPr>
+        <p:txBody>
+          <a:bodyPr>
+            <a:normAutofit fontScale="100000" lnSpcReduction="0"/>
+          </a:bodyPr>
+          <a:lstStyle/>
+          <a:p>
+            <a:pPr/>
+            <a:r>
+              <a:t>Body Level One</a:t>
+            </a:r>
+          </a:p>
+          <a:p>
+            <a:pPr lvl="1"/>
+            <a:r>
+              <a:t>Body Level Two</a:t>
+            </a:r>
+          </a:p>
+          <a:p>
+            <a:pPr lvl="2"/>
+            <a:r>
+              <a:t>Body Level Three</a:t>
+            </a:r>
+          </a:p>
+          <a:p>
+            <a:pPr lvl="3"/>
+            <a:r>
+              <a:t>Body Level Four</a:t>
+            </a:r>
+          </a:p>
+          <a:p>
+            <a:pPr lvl="4"/>
+            <a:r>
+              <a:t>Body Level Five</a:t>
+            </a:r>
+          </a:p>
+        </p:txBody>
+      </p:sp>
+      <p:sp>
+        <p:nvSpPr>
+          <p:cNvPr id="307" name="Slide Number"/>
+          <p:cNvSpPr txBox="1"/>
+          <p:nvPr>
+            <p:ph type="sldNum" sz="quarter" idx="2"/>
+          </p:nvPr>
+        </p:nvSpPr>
+        <p:spPr>
+          <a:prstGeom prst="rect">
+            <a:avLst/>
+          </a:prstGeom>
+        </p:spPr>
+        <p:txBody>
+          <a:bodyPr/>
+          <a:lstStyle/>
+          <a:p>
+            <a:pPr/>
+            <a:fld id="{86CB4B4D-7CA3-9044-876B-883B54F8677D}" type="slidenum"/>
+          </a:p>
+        </p:txBody>
+      </p:sp>
+      <p:pic>
+        <p:nvPicPr>
+          <p:cNvPr id="308" name="Image" descr="Image"/>
+          <p:cNvPicPr>
+            <a:picLocks noChangeAspect="1"/>
+          </p:cNvPicPr>
+          <p:nvPr/>
+        </p:nvPicPr>
+        <p:blipFill>
+          <a:blip r:embed="rId3">
+            <a:extLst/>
+          </a:blip>
+          <a:stretch>
+            <a:fillRect/>
+          </a:stretch>
+        </p:blipFill>
+        <p:spPr>
+          <a:xfrm>
+            <a:off x="676580" y="251999"/>
+            <a:ext cx="1142204" cy="611281"/>
+          </a:xfrm>
+          <a:prstGeom prst="rect">
+            <a:avLst/>
+          </a:prstGeom>
+          <a:ln w="12700">
+            <a:miter lim="400000"/>
+          </a:ln>
+        </p:spPr>
+      </p:pic>
+      <p:pic>
+        <p:nvPicPr>
+          <p:cNvPr id="309" name="Image" descr="Image"/>
+          <p:cNvPicPr>
+            <a:picLocks noChangeAspect="1"/>
+          </p:cNvPicPr>
+          <p:nvPr/>
+        </p:nvPicPr>
+        <p:blipFill>
+          <a:blip r:embed="rId4">
+            <a:extLst/>
+          </a:blip>
+          <a:stretch>
+            <a:fillRect/>
+          </a:stretch>
+        </p:blipFill>
+        <p:spPr>
+          <a:xfrm>
+            <a:off x="11352365" y="141061"/>
+            <a:ext cx="749128" cy="734440"/>
+          </a:xfrm>
+          <a:prstGeom prst="rect">
+            <a:avLst/>
+          </a:prstGeom>
+          <a:ln w="12700">
+            <a:miter lim="400000"/>
+          </a:ln>
+        </p:spPr>
+      </p:pic>
+    </p:spTree>
+  </p:cSld>
+  <p:clrMapOvr>
+    <a:masterClrMapping/>
+  </p:clrMapOvr>
+  <p:transition xmlns:p14="http://schemas.microsoft.com/office/powerpoint/2010/main" spd="med" advClick="1"/>
+</p:sldLayout>
+</file>
+
 <file path=ppt/slideLayouts/slideLayout2.xml><?xml version="1.0" encoding="utf-8"?>
 <p:sldLayout xmlns:a="http://schemas.openxmlformats.org/drawingml/2006/main" xmlns:r="http://schemas.openxmlformats.org/officeDocument/2006/relationships" xmlns:p="http://schemas.openxmlformats.org/presentationml/2006/main" xmlns:m="http://schemas.openxmlformats.org/officeDocument/2006/math" xmlns:a14="http://schemas.microsoft.com/office/drawing/2010/main" type="tx" showMasterSp="0" showMasterPhAnim="1">
   <p:cSld name="One content">
@@ -3376,9 +4236,849 @@
           </a:ln>
         </p:spPr>
       </p:pic>
+      <p:grpSp>
+        <p:nvGrpSpPr>
+          <p:cNvPr id="62" name="Group"/>
+          <p:cNvGrpSpPr/>
+          <p:nvPr/>
+        </p:nvGrpSpPr>
+        <p:grpSpPr>
+          <a:xfrm>
+            <a:off x="17068" y="935881"/>
+            <a:ext cx="1506786" cy="5584238"/>
+            <a:chOff x="0" y="0"/>
+            <a:chExt cx="1506784" cy="5584236"/>
+          </a:xfrm>
+        </p:grpSpPr>
+        <p:pic>
+          <p:nvPicPr>
+            <p:cNvPr id="50" name="Image" descr="Image"/>
+            <p:cNvPicPr>
+              <a:picLocks noChangeAspect="1"/>
+            </p:cNvPicPr>
+            <p:nvPr/>
+          </p:nvPicPr>
+          <p:blipFill>
+            <a:blip r:embed="rId3">
+              <a:extLst/>
+            </a:blip>
+            <a:srcRect l="0" t="0" r="0" b="0"/>
+            <a:stretch>
+              <a:fillRect/>
+            </a:stretch>
+          </p:blipFill>
+          <p:spPr>
+            <a:xfrm>
+              <a:off x="0" y="0"/>
+              <a:ext cx="1506785" cy="5584237"/>
+            </a:xfrm>
+            <a:prstGeom prst="rect">
+              <a:avLst/>
+            </a:prstGeom>
+            <a:ln w="12700" cap="flat">
+              <a:noFill/>
+              <a:miter lim="400000"/>
+            </a:ln>
+            <a:effectLst/>
+          </p:spPr>
+        </p:pic>
+        <p:sp>
+          <p:nvSpPr>
+            <p:cNvPr id="51" name="Rectangle"/>
+            <p:cNvSpPr/>
+            <p:nvPr/>
+          </p:nvSpPr>
+          <p:spPr>
+            <a:xfrm>
+              <a:off x="26491" y="29555"/>
+              <a:ext cx="1453952" cy="791704"/>
+            </a:xfrm>
+            <a:prstGeom prst="rect">
+              <a:avLst/>
+            </a:prstGeom>
+            <a:solidFill>
+              <a:srgbClr val="FFFFFF"/>
+            </a:solidFill>
+            <a:ln w="12700" cap="flat">
+              <a:noFill/>
+              <a:miter lim="400000"/>
+            </a:ln>
+            <a:effectLst/>
+          </p:spPr>
+          <p:txBody>
+            <a:bodyPr wrap="square" lIns="46799" tIns="46799" rIns="46799" bIns="46799" numCol="1" anchor="ctr">
+              <a:noAutofit/>
+            </a:bodyPr>
+            <a:lstStyle/>
+            <a:p>
+              <a:pPr/>
+            </a:p>
+          </p:txBody>
+        </p:sp>
+        <p:grpSp>
+          <p:nvGrpSpPr>
+            <p:cNvPr id="60" name="Group"/>
+            <p:cNvGrpSpPr/>
+            <p:nvPr/>
+          </p:nvGrpSpPr>
+          <p:grpSpPr>
+            <a:xfrm>
+              <a:off x="161144" y="50051"/>
+              <a:ext cx="1271028" cy="5510910"/>
+              <a:chOff x="0" y="0"/>
+              <a:chExt cx="1271027" cy="5510908"/>
+            </a:xfrm>
+          </p:grpSpPr>
+          <p:sp>
+            <p:nvSpPr>
+              <p:cNvPr id="52" name="2025 ISIS McStas School"/>
+              <p:cNvSpPr txBox="1"/>
+              <p:nvPr/>
+            </p:nvSpPr>
+            <p:spPr>
+              <a:xfrm>
+                <a:off x="0" y="4478221"/>
+                <a:ext cx="1184497" cy="1032688"/>
+              </a:xfrm>
+              <a:prstGeom prst="rect">
+                <a:avLst/>
+              </a:prstGeom>
+              <a:noFill/>
+              <a:ln w="12700" cap="flat">
+                <a:noFill/>
+                <a:miter lim="400000"/>
+              </a:ln>
+              <a:effectLst/>
+              <a:extLst>
+                <a:ext uri="{C572A759-6A51-4108-AA02-DFA0A04FC94B}">
+                  <ma14:wrappingTextBoxFlag xmlns:ma14="http://schemas.microsoft.com/office/mac/drawingml/2011/main" val="1"/>
+                </a:ext>
+              </a:extLst>
+            </p:spPr>
+            <p:txBody>
+              <a:bodyPr wrap="square" lIns="0" tIns="0" rIns="0" bIns="0" numCol="1" anchor="b">
+                <a:normAutofit fontScale="100000" lnSpcReduction="0"/>
+              </a:bodyPr>
+              <a:lstStyle/>
+              <a:p>
+                <a:pPr algn="ctr" defTabSz="521208">
+                  <a:lnSpc>
+                    <a:spcPct val="110000"/>
+                  </a:lnSpc>
+                  <a:spcBef>
+                    <a:spcPts val="0"/>
+                  </a:spcBef>
+                  <a:defRPr b="1" i="1" sz="2109">
+                    <a:solidFill>
+                      <a:srgbClr val="FFFFFF"/>
+                    </a:solidFill>
+                  </a:defRPr>
+                </a:pPr>
+                <a:r>
+                  <a:t>2025 ISIS</a:t>
+                </a:r>
+                <a:br/>
+                <a:r>
+                  <a:t>McStas School</a:t>
+                </a:r>
+              </a:p>
+            </p:txBody>
+          </p:sp>
+          <p:grpSp>
+            <p:nvGrpSpPr>
+              <p:cNvPr id="59" name="Group"/>
+              <p:cNvGrpSpPr/>
+              <p:nvPr/>
+            </p:nvGrpSpPr>
+            <p:grpSpPr>
+              <a:xfrm>
+                <a:off x="545266" y="-1"/>
+                <a:ext cx="725762" cy="757651"/>
+                <a:chOff x="0" y="0"/>
+                <a:chExt cx="725761" cy="757649"/>
+              </a:xfrm>
+            </p:grpSpPr>
+            <p:sp>
+              <p:nvSpPr>
+                <p:cNvPr id="53" name="Logo color"/>
+                <p:cNvSpPr/>
+                <p:nvPr/>
+              </p:nvSpPr>
+              <p:spPr>
+                <a:xfrm>
+                  <a:off x="2507" y="452770"/>
+                  <a:ext cx="117009" cy="170656"/>
+                </a:xfrm>
+                <a:custGeom>
+                  <a:avLst/>
+                  <a:gdLst/>
+                  <a:ahLst/>
+                  <a:cxnLst>
+                    <a:cxn ang="0">
+                      <a:pos x="wd2" y="hd2"/>
+                    </a:cxn>
+                    <a:cxn ang="5400000">
+                      <a:pos x="wd2" y="hd2"/>
+                    </a:cxn>
+                    <a:cxn ang="10800000">
+                      <a:pos x="wd2" y="hd2"/>
+                    </a:cxn>
+                    <a:cxn ang="16200000">
+                      <a:pos x="wd2" y="hd2"/>
+                    </a:cxn>
+                  </a:cxnLst>
+                  <a:rect l="0" t="0" r="r" b="b"/>
+                  <a:pathLst>
+                    <a:path w="21600" h="21600" fill="norm" stroke="1" extrusionOk="0">
+                      <a:moveTo>
+                        <a:pt x="4597" y="18293"/>
+                      </a:moveTo>
+                      <a:cubicBezTo>
+                        <a:pt x="10549" y="19881"/>
+                        <a:pt x="11051" y="19881"/>
+                        <a:pt x="17003" y="18293"/>
+                      </a:cubicBezTo>
+                      <a:cubicBezTo>
+                        <a:pt x="17003" y="18293"/>
+                        <a:pt x="17003" y="18293"/>
+                        <a:pt x="21600" y="19949"/>
+                      </a:cubicBezTo>
+                      <a:cubicBezTo>
+                        <a:pt x="21600" y="19949"/>
+                        <a:pt x="21600" y="19949"/>
+                        <a:pt x="17003" y="21600"/>
+                      </a:cubicBezTo>
+                      <a:cubicBezTo>
+                        <a:pt x="11051" y="20016"/>
+                        <a:pt x="10549" y="20016"/>
+                        <a:pt x="4597" y="21600"/>
+                      </a:cubicBezTo>
+                      <a:cubicBezTo>
+                        <a:pt x="4597" y="21600"/>
+                        <a:pt x="4597" y="21600"/>
+                        <a:pt x="0" y="19949"/>
+                      </a:cubicBezTo>
+                      <a:cubicBezTo>
+                        <a:pt x="0" y="19949"/>
+                        <a:pt x="0" y="19949"/>
+                        <a:pt x="4597" y="18293"/>
+                      </a:cubicBezTo>
+                      <a:close/>
+                      <a:moveTo>
+                        <a:pt x="4597" y="14200"/>
+                      </a:moveTo>
+                      <a:cubicBezTo>
+                        <a:pt x="10549" y="15790"/>
+                        <a:pt x="11051" y="15790"/>
+                        <a:pt x="17003" y="14200"/>
+                      </a:cubicBezTo>
+                      <a:cubicBezTo>
+                        <a:pt x="17003" y="14200"/>
+                        <a:pt x="17003" y="14200"/>
+                        <a:pt x="21600" y="15858"/>
+                      </a:cubicBezTo>
+                      <a:cubicBezTo>
+                        <a:pt x="21600" y="15858"/>
+                        <a:pt x="21600" y="15858"/>
+                        <a:pt x="17003" y="17512"/>
+                      </a:cubicBezTo>
+                      <a:cubicBezTo>
+                        <a:pt x="11051" y="15925"/>
+                        <a:pt x="10549" y="15925"/>
+                        <a:pt x="4597" y="17512"/>
+                      </a:cubicBezTo>
+                      <a:cubicBezTo>
+                        <a:pt x="4597" y="17512"/>
+                        <a:pt x="4597" y="17512"/>
+                        <a:pt x="0" y="15858"/>
+                      </a:cubicBezTo>
+                      <a:cubicBezTo>
+                        <a:pt x="0" y="15858"/>
+                        <a:pt x="0" y="15858"/>
+                        <a:pt x="4597" y="14200"/>
+                      </a:cubicBezTo>
+                      <a:close/>
+                      <a:moveTo>
+                        <a:pt x="4597" y="10111"/>
+                      </a:moveTo>
+                      <a:cubicBezTo>
+                        <a:pt x="10549" y="11702"/>
+                        <a:pt x="11051" y="11702"/>
+                        <a:pt x="17003" y="10111"/>
+                      </a:cubicBezTo>
+                      <a:cubicBezTo>
+                        <a:pt x="17003" y="10111"/>
+                        <a:pt x="17003" y="10111"/>
+                        <a:pt x="21600" y="11769"/>
+                      </a:cubicBezTo>
+                      <a:cubicBezTo>
+                        <a:pt x="21600" y="11769"/>
+                        <a:pt x="21600" y="11769"/>
+                        <a:pt x="17003" y="13423"/>
+                      </a:cubicBezTo>
+                      <a:cubicBezTo>
+                        <a:pt x="11051" y="11837"/>
+                        <a:pt x="10549" y="11837"/>
+                        <a:pt x="4597" y="13423"/>
+                      </a:cubicBezTo>
+                      <a:cubicBezTo>
+                        <a:pt x="4597" y="13423"/>
+                        <a:pt x="4597" y="13423"/>
+                        <a:pt x="0" y="11769"/>
+                      </a:cubicBezTo>
+                      <a:cubicBezTo>
+                        <a:pt x="0" y="11769"/>
+                        <a:pt x="0" y="11769"/>
+                        <a:pt x="4597" y="10111"/>
+                      </a:cubicBezTo>
+                      <a:close/>
+                      <a:moveTo>
+                        <a:pt x="2971" y="918"/>
+                      </a:moveTo>
+                      <a:lnTo>
+                        <a:pt x="2971" y="6926"/>
+                      </a:lnTo>
+                      <a:cubicBezTo>
+                        <a:pt x="2971" y="6926"/>
+                        <a:pt x="2971" y="6926"/>
+                        <a:pt x="3980" y="6926"/>
+                      </a:cubicBezTo>
+                      <a:cubicBezTo>
+                        <a:pt x="4430" y="6926"/>
+                        <a:pt x="4695" y="6878"/>
+                        <a:pt x="4903" y="6708"/>
+                      </a:cubicBezTo>
+                      <a:cubicBezTo>
+                        <a:pt x="5220" y="6447"/>
+                        <a:pt x="5249" y="5917"/>
+                        <a:pt x="5249" y="4849"/>
+                      </a:cubicBezTo>
+                      <a:cubicBezTo>
+                        <a:pt x="5249" y="4849"/>
+                        <a:pt x="5249" y="4849"/>
+                        <a:pt x="5249" y="2990"/>
+                      </a:cubicBezTo>
+                      <a:cubicBezTo>
+                        <a:pt x="5249" y="1926"/>
+                        <a:pt x="5220" y="1396"/>
+                        <a:pt x="4903" y="1135"/>
+                      </a:cubicBezTo>
+                      <a:cubicBezTo>
+                        <a:pt x="4695" y="965"/>
+                        <a:pt x="4430" y="918"/>
+                        <a:pt x="3980" y="918"/>
+                      </a:cubicBezTo>
+                      <a:cubicBezTo>
+                        <a:pt x="3980" y="918"/>
+                        <a:pt x="3980" y="918"/>
+                        <a:pt x="2971" y="918"/>
+                      </a:cubicBezTo>
+                      <a:close/>
+                      <a:moveTo>
+                        <a:pt x="8068" y="0"/>
+                      </a:moveTo>
+                      <a:cubicBezTo>
+                        <a:pt x="8068" y="0"/>
+                        <a:pt x="8068" y="0"/>
+                        <a:pt x="13456" y="0"/>
+                      </a:cubicBezTo>
+                      <a:cubicBezTo>
+                        <a:pt x="13542" y="0"/>
+                        <a:pt x="13594" y="16"/>
+                        <a:pt x="13635" y="44"/>
+                      </a:cubicBezTo>
+                      <a:cubicBezTo>
+                        <a:pt x="13669" y="67"/>
+                        <a:pt x="13698" y="103"/>
+                        <a:pt x="13698" y="162"/>
+                      </a:cubicBezTo>
+                      <a:cubicBezTo>
+                        <a:pt x="13698" y="162"/>
+                        <a:pt x="13698" y="162"/>
+                        <a:pt x="13698" y="827"/>
+                      </a:cubicBezTo>
+                      <a:cubicBezTo>
+                        <a:pt x="13698" y="886"/>
+                        <a:pt x="13669" y="922"/>
+                        <a:pt x="13635" y="945"/>
+                      </a:cubicBezTo>
+                      <a:cubicBezTo>
+                        <a:pt x="13594" y="973"/>
+                        <a:pt x="13542" y="989"/>
+                        <a:pt x="13456" y="989"/>
+                      </a:cubicBezTo>
+                      <a:cubicBezTo>
+                        <a:pt x="13456" y="989"/>
+                        <a:pt x="13456" y="989"/>
+                        <a:pt x="11731" y="989"/>
+                      </a:cubicBezTo>
+                      <a:cubicBezTo>
+                        <a:pt x="11731" y="989"/>
+                        <a:pt x="11731" y="989"/>
+                        <a:pt x="11731" y="7681"/>
+                      </a:cubicBezTo>
+                      <a:cubicBezTo>
+                        <a:pt x="11731" y="7740"/>
+                        <a:pt x="11708" y="7776"/>
+                        <a:pt x="11667" y="7800"/>
+                      </a:cubicBezTo>
+                      <a:cubicBezTo>
+                        <a:pt x="11633" y="7827"/>
+                        <a:pt x="11581" y="7843"/>
+                        <a:pt x="11494" y="7843"/>
+                      </a:cubicBezTo>
+                      <a:cubicBezTo>
+                        <a:pt x="11494" y="7843"/>
+                        <a:pt x="11494" y="7843"/>
+                        <a:pt x="10029" y="7843"/>
+                      </a:cubicBezTo>
+                      <a:cubicBezTo>
+                        <a:pt x="9943" y="7843"/>
+                        <a:pt x="9891" y="7827"/>
+                        <a:pt x="9850" y="7800"/>
+                      </a:cubicBezTo>
+                      <a:cubicBezTo>
+                        <a:pt x="9810" y="7776"/>
+                        <a:pt x="9787" y="7740"/>
+                        <a:pt x="9787" y="7681"/>
+                      </a:cubicBezTo>
+                      <a:cubicBezTo>
+                        <a:pt x="9787" y="7681"/>
+                        <a:pt x="9787" y="7681"/>
+                        <a:pt x="9787" y="989"/>
+                      </a:cubicBezTo>
+                      <a:cubicBezTo>
+                        <a:pt x="9787" y="989"/>
+                        <a:pt x="9787" y="989"/>
+                        <a:pt x="8068" y="989"/>
+                      </a:cubicBezTo>
+                      <a:cubicBezTo>
+                        <a:pt x="7981" y="989"/>
+                        <a:pt x="7929" y="973"/>
+                        <a:pt x="7889" y="945"/>
+                      </a:cubicBezTo>
+                      <a:cubicBezTo>
+                        <a:pt x="7849" y="922"/>
+                        <a:pt x="7825" y="886"/>
+                        <a:pt x="7825" y="827"/>
+                      </a:cubicBezTo>
+                      <a:cubicBezTo>
+                        <a:pt x="7825" y="827"/>
+                        <a:pt x="7825" y="827"/>
+                        <a:pt x="7825" y="162"/>
+                      </a:cubicBezTo>
+                      <a:cubicBezTo>
+                        <a:pt x="7825" y="103"/>
+                        <a:pt x="7849" y="67"/>
+                        <a:pt x="7889" y="44"/>
+                      </a:cubicBezTo>
+                      <a:cubicBezTo>
+                        <a:pt x="7929" y="16"/>
+                        <a:pt x="7981" y="0"/>
+                        <a:pt x="8068" y="0"/>
+                      </a:cubicBezTo>
+                      <a:close/>
+                      <a:moveTo>
+                        <a:pt x="1390" y="0"/>
+                      </a:moveTo>
+                      <a:cubicBezTo>
+                        <a:pt x="1390" y="0"/>
+                        <a:pt x="1390" y="0"/>
+                        <a:pt x="4257" y="0"/>
+                      </a:cubicBezTo>
+                      <a:cubicBezTo>
+                        <a:pt x="5370" y="0"/>
+                        <a:pt x="6051" y="174"/>
+                        <a:pt x="6466" y="538"/>
+                      </a:cubicBezTo>
+                      <a:cubicBezTo>
+                        <a:pt x="7072" y="1036"/>
+                        <a:pt x="7089" y="1843"/>
+                        <a:pt x="7089" y="3077"/>
+                      </a:cubicBezTo>
+                      <a:cubicBezTo>
+                        <a:pt x="7089" y="3077"/>
+                        <a:pt x="7089" y="3077"/>
+                        <a:pt x="7089" y="4766"/>
+                      </a:cubicBezTo>
+                      <a:cubicBezTo>
+                        <a:pt x="7089" y="6000"/>
+                        <a:pt x="7072" y="6807"/>
+                        <a:pt x="6466" y="7305"/>
+                      </a:cubicBezTo>
+                      <a:cubicBezTo>
+                        <a:pt x="6051" y="7669"/>
+                        <a:pt x="5370" y="7843"/>
+                        <a:pt x="4257" y="7843"/>
+                      </a:cubicBezTo>
+                      <a:cubicBezTo>
+                        <a:pt x="4257" y="7843"/>
+                        <a:pt x="4257" y="7843"/>
+                        <a:pt x="1390" y="7843"/>
+                      </a:cubicBezTo>
+                      <a:cubicBezTo>
+                        <a:pt x="1304" y="7843"/>
+                        <a:pt x="1252" y="7827"/>
+                        <a:pt x="1217" y="7800"/>
+                      </a:cubicBezTo>
+                      <a:cubicBezTo>
+                        <a:pt x="1177" y="7776"/>
+                        <a:pt x="1154" y="7740"/>
+                        <a:pt x="1154" y="7681"/>
+                      </a:cubicBezTo>
+                      <a:cubicBezTo>
+                        <a:pt x="1154" y="7681"/>
+                        <a:pt x="1154" y="7681"/>
+                        <a:pt x="1154" y="162"/>
+                      </a:cubicBezTo>
+                      <a:cubicBezTo>
+                        <a:pt x="1154" y="103"/>
+                        <a:pt x="1177" y="67"/>
+                        <a:pt x="1217" y="44"/>
+                      </a:cubicBezTo>
+                      <a:cubicBezTo>
+                        <a:pt x="1252" y="16"/>
+                        <a:pt x="1304" y="0"/>
+                        <a:pt x="1390" y="0"/>
+                      </a:cubicBezTo>
+                      <a:close/>
+                      <a:moveTo>
+                        <a:pt x="14706" y="0"/>
+                      </a:moveTo>
+                      <a:cubicBezTo>
+                        <a:pt x="14706" y="0"/>
+                        <a:pt x="14706" y="0"/>
+                        <a:pt x="16045" y="0"/>
+                      </a:cubicBezTo>
+                      <a:cubicBezTo>
+                        <a:pt x="16131" y="0"/>
+                        <a:pt x="16183" y="16"/>
+                        <a:pt x="16224" y="44"/>
+                      </a:cubicBezTo>
+                      <a:cubicBezTo>
+                        <a:pt x="16264" y="67"/>
+                        <a:pt x="16287" y="103"/>
+                        <a:pt x="16287" y="162"/>
+                      </a:cubicBezTo>
+                      <a:cubicBezTo>
+                        <a:pt x="16287" y="162"/>
+                        <a:pt x="16287" y="162"/>
+                        <a:pt x="16287" y="5712"/>
+                      </a:cubicBezTo>
+                      <a:cubicBezTo>
+                        <a:pt x="16287" y="6314"/>
+                        <a:pt x="16368" y="6646"/>
+                        <a:pt x="16627" y="6844"/>
+                      </a:cubicBezTo>
+                      <a:cubicBezTo>
+                        <a:pt x="16818" y="6990"/>
+                        <a:pt x="17072" y="7053"/>
+                        <a:pt x="17406" y="7053"/>
+                      </a:cubicBezTo>
+                      <a:cubicBezTo>
+                        <a:pt x="17776" y="7053"/>
+                        <a:pt x="18041" y="6982"/>
+                        <a:pt x="18226" y="6844"/>
+                      </a:cubicBezTo>
+                      <a:cubicBezTo>
+                        <a:pt x="18503" y="6638"/>
+                        <a:pt x="18566" y="6294"/>
+                        <a:pt x="18566" y="5712"/>
+                      </a:cubicBezTo>
+                      <a:cubicBezTo>
+                        <a:pt x="18566" y="5712"/>
+                        <a:pt x="18566" y="5712"/>
+                        <a:pt x="18566" y="162"/>
+                      </a:cubicBezTo>
+                      <a:cubicBezTo>
+                        <a:pt x="18566" y="103"/>
+                        <a:pt x="18589" y="67"/>
+                        <a:pt x="18630" y="44"/>
+                      </a:cubicBezTo>
+                      <a:cubicBezTo>
+                        <a:pt x="18664" y="16"/>
+                        <a:pt x="18722" y="0"/>
+                        <a:pt x="18803" y="0"/>
+                      </a:cubicBezTo>
+                      <a:cubicBezTo>
+                        <a:pt x="18803" y="0"/>
+                        <a:pt x="18803" y="0"/>
+                        <a:pt x="20147" y="0"/>
+                      </a:cubicBezTo>
+                      <a:cubicBezTo>
+                        <a:pt x="20234" y="0"/>
+                        <a:pt x="20286" y="16"/>
+                        <a:pt x="20320" y="44"/>
+                      </a:cubicBezTo>
+                      <a:cubicBezTo>
+                        <a:pt x="20361" y="67"/>
+                        <a:pt x="20384" y="103"/>
+                        <a:pt x="20384" y="162"/>
+                      </a:cubicBezTo>
+                      <a:cubicBezTo>
+                        <a:pt x="20384" y="162"/>
+                        <a:pt x="20384" y="162"/>
+                        <a:pt x="20384" y="5716"/>
+                      </a:cubicBezTo>
+                      <a:cubicBezTo>
+                        <a:pt x="20384" y="6464"/>
+                        <a:pt x="20257" y="6962"/>
+                        <a:pt x="19732" y="7382"/>
+                      </a:cubicBezTo>
+                      <a:cubicBezTo>
+                        <a:pt x="19287" y="7738"/>
+                        <a:pt x="18560" y="7943"/>
+                        <a:pt x="17430" y="7943"/>
+                      </a:cubicBezTo>
+                      <a:cubicBezTo>
+                        <a:pt x="16316" y="7943"/>
+                        <a:pt x="15583" y="7750"/>
+                        <a:pt x="15093" y="7382"/>
+                      </a:cubicBezTo>
+                      <a:cubicBezTo>
+                        <a:pt x="14625" y="7030"/>
+                        <a:pt x="14469" y="6523"/>
+                        <a:pt x="14469" y="5716"/>
+                      </a:cubicBezTo>
+                      <a:cubicBezTo>
+                        <a:pt x="14469" y="5716"/>
+                        <a:pt x="14469" y="5716"/>
+                        <a:pt x="14469" y="162"/>
+                      </a:cubicBezTo>
+                      <a:cubicBezTo>
+                        <a:pt x="14469" y="103"/>
+                        <a:pt x="14493" y="67"/>
+                        <a:pt x="14527" y="44"/>
+                      </a:cubicBezTo>
+                      <a:cubicBezTo>
+                        <a:pt x="14568" y="16"/>
+                        <a:pt x="14620" y="0"/>
+                        <a:pt x="14706" y="0"/>
+                      </a:cubicBezTo>
+                      <a:close/>
+                    </a:path>
+                  </a:pathLst>
+                </a:custGeom>
+                <a:solidFill>
+                  <a:schemeClr val="accent1"/>
+                </a:solidFill>
+                <a:ln w="12700" cap="flat">
+                  <a:noFill/>
+                  <a:miter lim="400000"/>
+                </a:ln>
+                <a:effectLst/>
+              </p:spPr>
+              <p:txBody>
+                <a:bodyPr wrap="square" lIns="46799" tIns="46799" rIns="46799" bIns="46799" numCol="1" anchor="t">
+                  <a:noAutofit/>
+                </a:bodyPr>
+                <a:lstStyle/>
+                <a:p>
+                  <a:pPr>
+                    <a:defRPr>
+                      <a:latin typeface="Verdana"/>
+                      <a:ea typeface="Verdana"/>
+                      <a:cs typeface="Verdana"/>
+                      <a:sym typeface="Verdana"/>
+                    </a:defRPr>
+                  </a:pPr>
+                </a:p>
+              </p:txBody>
+            </p:sp>
+            <p:pic>
+              <p:nvPicPr>
+                <p:cNvPr id="54" name="logoill.pdf" descr="logoill.pdf"/>
+                <p:cNvPicPr>
+                  <a:picLocks noChangeAspect="0"/>
+                </p:cNvPicPr>
+                <p:nvPr/>
+              </p:nvPicPr>
+              <p:blipFill>
+                <a:blip r:embed="rId4">
+                  <a:extLst/>
+                </a:blip>
+                <a:stretch>
+                  <a:fillRect/>
+                </a:stretch>
+              </p:blipFill>
+              <p:spPr>
+                <a:xfrm>
+                  <a:off x="486613" y="459579"/>
+                  <a:ext cx="164286" cy="157037"/>
+                </a:xfrm>
+                <a:prstGeom prst="rect">
+                  <a:avLst/>
+                </a:prstGeom>
+                <a:ln w="12700" cap="flat">
+                  <a:noFill/>
+                  <a:miter lim="400000"/>
+                </a:ln>
+                <a:effectLst/>
+              </p:spPr>
+            </p:pic>
+            <p:pic>
+              <p:nvPicPr>
+                <p:cNvPr id="55" name="mcstas-logo.pdf" descr="mcstas-logo.pdf"/>
+                <p:cNvPicPr>
+                  <a:picLocks noChangeAspect="0"/>
+                </p:cNvPicPr>
+                <p:nvPr/>
+              </p:nvPicPr>
+              <p:blipFill>
+                <a:blip r:embed="rId5">
+                  <a:extLst/>
+                </a:blip>
+                <a:srcRect l="0" t="0" r="0" b="0"/>
+                <a:stretch>
+                  <a:fillRect/>
+                </a:stretch>
+              </p:blipFill>
+              <p:spPr>
+                <a:xfrm>
+                  <a:off x="0" y="0"/>
+                  <a:ext cx="725762" cy="426459"/>
+                </a:xfrm>
+                <a:prstGeom prst="rect">
+                  <a:avLst/>
+                </a:prstGeom>
+                <a:ln w="12700" cap="flat">
+                  <a:noFill/>
+                  <a:miter lim="400000"/>
+                </a:ln>
+                <a:effectLst/>
+              </p:spPr>
+            </p:pic>
+            <p:pic>
+              <p:nvPicPr>
+                <p:cNvPr id="56" name="PSI-Logo_trans.png" descr="PSI-Logo_trans.png"/>
+                <p:cNvPicPr>
+                  <a:picLocks noChangeAspect="0"/>
+                </p:cNvPicPr>
+                <p:nvPr/>
+              </p:nvPicPr>
+              <p:blipFill>
+                <a:blip r:embed="rId6">
+                  <a:extLst/>
+                </a:blip>
+                <a:stretch>
+                  <a:fillRect/>
+                </a:stretch>
+              </p:blipFill>
+              <p:spPr>
+                <a:xfrm>
+                  <a:off x="270340" y="501170"/>
+                  <a:ext cx="204490" cy="74865"/>
+                </a:xfrm>
+                <a:prstGeom prst="rect">
+                  <a:avLst/>
+                </a:prstGeom>
+                <a:ln w="12700" cap="flat">
+                  <a:noFill/>
+                  <a:miter lim="400000"/>
+                </a:ln>
+                <a:effectLst/>
+              </p:spPr>
+            </p:pic>
+            <p:pic>
+              <p:nvPicPr>
+                <p:cNvPr id="57" name="ku-logo.pdf" descr="ku-logo.pdf"/>
+                <p:cNvPicPr>
+                  <a:picLocks noChangeAspect="0"/>
+                </p:cNvPicPr>
+                <p:nvPr/>
+              </p:nvPicPr>
+              <p:blipFill>
+                <a:blip r:embed="rId7">
+                  <a:extLst/>
+                </a:blip>
+                <a:stretch>
+                  <a:fillRect/>
+                </a:stretch>
+              </p:blipFill>
+              <p:spPr>
+                <a:xfrm>
+                  <a:off x="131011" y="451261"/>
+                  <a:ext cx="128373" cy="174419"/>
+                </a:xfrm>
+                <a:prstGeom prst="rect">
+                  <a:avLst/>
+                </a:prstGeom>
+                <a:ln w="12700" cap="flat">
+                  <a:noFill/>
+                  <a:miter lim="400000"/>
+                </a:ln>
+                <a:effectLst/>
+              </p:spPr>
+            </p:pic>
+            <p:pic>
+              <p:nvPicPr>
+                <p:cNvPr id="58" name="ESS_Logo_Frugal_Blue_cmyk.png" descr="ESS_Logo_Frugal_Blue_cmyk.png"/>
+                <p:cNvPicPr>
+                  <a:picLocks noChangeAspect="0"/>
+                </p:cNvPicPr>
+                <p:nvPr/>
+              </p:nvPicPr>
+              <p:blipFill>
+                <a:blip r:embed="rId8">
+                  <a:extLst/>
+                </a:blip>
+                <a:stretch>
+                  <a:fillRect/>
+                </a:stretch>
+              </p:blipFill>
+              <p:spPr>
+                <a:xfrm>
+                  <a:off x="214914" y="607364"/>
+                  <a:ext cx="279297" cy="150286"/>
+                </a:xfrm>
+                <a:prstGeom prst="rect">
+                  <a:avLst/>
+                </a:prstGeom>
+                <a:ln w="12700" cap="flat">
+                  <a:noFill/>
+                  <a:miter lim="400000"/>
+                </a:ln>
+                <a:effectLst/>
+              </p:spPr>
+            </p:pic>
+          </p:grpSp>
+        </p:grpSp>
+        <p:pic>
+          <p:nvPicPr>
+            <p:cNvPr id="61" name="Image" descr="Image"/>
+            <p:cNvPicPr>
+              <a:picLocks noChangeAspect="1"/>
+            </p:cNvPicPr>
+            <p:nvPr/>
+          </p:nvPicPr>
+          <p:blipFill>
+            <a:blip r:embed="rId9">
+              <a:extLst/>
+            </a:blip>
+            <a:srcRect l="0" t="0" r="77004" b="0"/>
+            <a:stretch>
+              <a:fillRect/>
+            </a:stretch>
+          </p:blipFill>
+          <p:spPr>
+            <a:xfrm>
+              <a:off x="44293" y="62025"/>
+              <a:ext cx="617630" cy="611845"/>
+            </a:xfrm>
+            <a:prstGeom prst="rect">
+              <a:avLst/>
+            </a:prstGeom>
+            <a:ln w="12700" cap="flat">
+              <a:noFill/>
+              <a:miter lim="400000"/>
+            </a:ln>
+            <a:effectLst/>
+          </p:spPr>
+        </p:pic>
+      </p:grpSp>
       <p:sp>
         <p:nvSpPr>
-          <p:cNvPr id="50" name="UserProfile.Offices.Workarea_{{DocumentLanguage}}text"/>
+          <p:cNvPr id="63" name="UserProfile.Offices.Workarea_{{DocumentLanguage}}text"/>
           <p:cNvSpPr txBox="1"/>
           <p:nvPr/>
         </p:nvSpPr>
@@ -3418,851 +5118,11 @@
           <a:p>
             <a:pPr/>
             <a:r>
-              <a:t>2021 ISIS McStas school</a:t>
+              <a:t>2025 ISIS McStas school</a:t>
             </a:r>
           </a:p>
         </p:txBody>
       </p:sp>
-      <p:grpSp>
-        <p:nvGrpSpPr>
-          <p:cNvPr id="63" name="Group"/>
-          <p:cNvGrpSpPr/>
-          <p:nvPr/>
-        </p:nvGrpSpPr>
-        <p:grpSpPr>
-          <a:xfrm>
-            <a:off x="17068" y="935881"/>
-            <a:ext cx="1506786" cy="5584238"/>
-            <a:chOff x="0" y="0"/>
-            <a:chExt cx="1506784" cy="5584236"/>
-          </a:xfrm>
-        </p:grpSpPr>
-        <p:pic>
-          <p:nvPicPr>
-            <p:cNvPr id="51" name="Image" descr="Image"/>
-            <p:cNvPicPr>
-              <a:picLocks noChangeAspect="1"/>
-            </p:cNvPicPr>
-            <p:nvPr/>
-          </p:nvPicPr>
-          <p:blipFill>
-            <a:blip r:embed="rId3">
-              <a:extLst/>
-            </a:blip>
-            <a:srcRect l="0" t="0" r="0" b="0"/>
-            <a:stretch>
-              <a:fillRect/>
-            </a:stretch>
-          </p:blipFill>
-          <p:spPr>
-            <a:xfrm>
-              <a:off x="0" y="0"/>
-              <a:ext cx="1506785" cy="5584237"/>
-            </a:xfrm>
-            <a:prstGeom prst="rect">
-              <a:avLst/>
-            </a:prstGeom>
-            <a:ln w="12700" cap="flat">
-              <a:noFill/>
-              <a:miter lim="400000"/>
-            </a:ln>
-            <a:effectLst/>
-          </p:spPr>
-        </p:pic>
-        <p:sp>
-          <p:nvSpPr>
-            <p:cNvPr id="52" name="Rectangle"/>
-            <p:cNvSpPr/>
-            <p:nvPr/>
-          </p:nvSpPr>
-          <p:spPr>
-            <a:xfrm>
-              <a:off x="26491" y="29555"/>
-              <a:ext cx="1453952" cy="791704"/>
-            </a:xfrm>
-            <a:prstGeom prst="rect">
-              <a:avLst/>
-            </a:prstGeom>
-            <a:solidFill>
-              <a:srgbClr val="FFFFFF"/>
-            </a:solidFill>
-            <a:ln w="12700" cap="flat">
-              <a:noFill/>
-              <a:miter lim="400000"/>
-            </a:ln>
-            <a:effectLst/>
-          </p:spPr>
-          <p:txBody>
-            <a:bodyPr wrap="square" lIns="46799" tIns="46799" rIns="46799" bIns="46799" numCol="1" anchor="ctr">
-              <a:noAutofit/>
-            </a:bodyPr>
-            <a:lstStyle/>
-            <a:p>
-              <a:pPr/>
-            </a:p>
-          </p:txBody>
-        </p:sp>
-        <p:grpSp>
-          <p:nvGrpSpPr>
-            <p:cNvPr id="61" name="Group"/>
-            <p:cNvGrpSpPr/>
-            <p:nvPr/>
-          </p:nvGrpSpPr>
-          <p:grpSpPr>
-            <a:xfrm>
-              <a:off x="161144" y="50051"/>
-              <a:ext cx="1271028" cy="5510910"/>
-              <a:chOff x="0" y="0"/>
-              <a:chExt cx="1271027" cy="5510908"/>
-            </a:xfrm>
-          </p:grpSpPr>
-          <p:sp>
-            <p:nvSpPr>
-              <p:cNvPr id="53" name="2021 Virtual ISIS McStas School"/>
-              <p:cNvSpPr txBox="1"/>
-              <p:nvPr/>
-            </p:nvSpPr>
-            <p:spPr>
-              <a:xfrm>
-                <a:off x="0" y="4478221"/>
-                <a:ext cx="1184497" cy="1032688"/>
-              </a:xfrm>
-              <a:prstGeom prst="rect">
-                <a:avLst/>
-              </a:prstGeom>
-              <a:noFill/>
-              <a:ln w="12700" cap="flat">
-                <a:noFill/>
-                <a:miter lim="400000"/>
-              </a:ln>
-              <a:effectLst/>
-              <a:extLst>
-                <a:ext uri="{C572A759-6A51-4108-AA02-DFA0A04FC94B}">
-                  <ma14:wrappingTextBoxFlag xmlns:ma14="http://schemas.microsoft.com/office/mac/drawingml/2011/main" val="1"/>
-                </a:ext>
-              </a:extLst>
-            </p:spPr>
-            <p:txBody>
-              <a:bodyPr wrap="square" lIns="0" tIns="0" rIns="0" bIns="0" numCol="1" anchor="b">
-                <a:normAutofit fontScale="100000" lnSpcReduction="0"/>
-              </a:bodyPr>
-              <a:lstStyle/>
-              <a:p>
-                <a:pPr algn="ctr" defTabSz="393192">
-                  <a:lnSpc>
-                    <a:spcPct val="110000"/>
-                  </a:lnSpc>
-                  <a:spcBef>
-                    <a:spcPts val="0"/>
-                  </a:spcBef>
-                  <a:defRPr b="1" i="1" sz="1591">
-                    <a:solidFill>
-                      <a:srgbClr val="FFFFFF"/>
-                    </a:solidFill>
-                  </a:defRPr>
-                </a:pPr>
-                <a:r>
-                  <a:t>2021 Virtual ISIS</a:t>
-                </a:r>
-                <a:br/>
-                <a:r>
-                  <a:t>McStas School</a:t>
-                </a:r>
-              </a:p>
-            </p:txBody>
-          </p:sp>
-          <p:grpSp>
-            <p:nvGrpSpPr>
-              <p:cNvPr id="60" name="Group"/>
-              <p:cNvGrpSpPr/>
-              <p:nvPr/>
-            </p:nvGrpSpPr>
-            <p:grpSpPr>
-              <a:xfrm>
-                <a:off x="545266" y="-1"/>
-                <a:ext cx="725762" cy="757651"/>
-                <a:chOff x="0" y="0"/>
-                <a:chExt cx="725761" cy="757649"/>
-              </a:xfrm>
-            </p:grpSpPr>
-            <p:sp>
-              <p:nvSpPr>
-                <p:cNvPr id="54" name="Logo color"/>
-                <p:cNvSpPr/>
-                <p:nvPr/>
-              </p:nvSpPr>
-              <p:spPr>
-                <a:xfrm>
-                  <a:off x="2507" y="452770"/>
-                  <a:ext cx="117009" cy="170656"/>
-                </a:xfrm>
-                <a:custGeom>
-                  <a:avLst/>
-                  <a:gdLst/>
-                  <a:ahLst/>
-                  <a:cxnLst>
-                    <a:cxn ang="0">
-                      <a:pos x="wd2" y="hd2"/>
-                    </a:cxn>
-                    <a:cxn ang="5400000">
-                      <a:pos x="wd2" y="hd2"/>
-                    </a:cxn>
-                    <a:cxn ang="10800000">
-                      <a:pos x="wd2" y="hd2"/>
-                    </a:cxn>
-                    <a:cxn ang="16200000">
-                      <a:pos x="wd2" y="hd2"/>
-                    </a:cxn>
-                  </a:cxnLst>
-                  <a:rect l="0" t="0" r="r" b="b"/>
-                  <a:pathLst>
-                    <a:path w="21600" h="21600" fill="norm" stroke="1" extrusionOk="0">
-                      <a:moveTo>
-                        <a:pt x="4597" y="18293"/>
-                      </a:moveTo>
-                      <a:cubicBezTo>
-                        <a:pt x="10549" y="19881"/>
-                        <a:pt x="11051" y="19881"/>
-                        <a:pt x="17003" y="18293"/>
-                      </a:cubicBezTo>
-                      <a:cubicBezTo>
-                        <a:pt x="17003" y="18293"/>
-                        <a:pt x="17003" y="18293"/>
-                        <a:pt x="21600" y="19949"/>
-                      </a:cubicBezTo>
-                      <a:cubicBezTo>
-                        <a:pt x="21600" y="19949"/>
-                        <a:pt x="21600" y="19949"/>
-                        <a:pt x="17003" y="21600"/>
-                      </a:cubicBezTo>
-                      <a:cubicBezTo>
-                        <a:pt x="11051" y="20016"/>
-                        <a:pt x="10549" y="20016"/>
-                        <a:pt x="4597" y="21600"/>
-                      </a:cubicBezTo>
-                      <a:cubicBezTo>
-                        <a:pt x="4597" y="21600"/>
-                        <a:pt x="4597" y="21600"/>
-                        <a:pt x="0" y="19949"/>
-                      </a:cubicBezTo>
-                      <a:cubicBezTo>
-                        <a:pt x="0" y="19949"/>
-                        <a:pt x="0" y="19949"/>
-                        <a:pt x="4597" y="18293"/>
-                      </a:cubicBezTo>
-                      <a:close/>
-                      <a:moveTo>
-                        <a:pt x="4597" y="14200"/>
-                      </a:moveTo>
-                      <a:cubicBezTo>
-                        <a:pt x="10549" y="15790"/>
-                        <a:pt x="11051" y="15790"/>
-                        <a:pt x="17003" y="14200"/>
-                      </a:cubicBezTo>
-                      <a:cubicBezTo>
-                        <a:pt x="17003" y="14200"/>
-                        <a:pt x="17003" y="14200"/>
-                        <a:pt x="21600" y="15858"/>
-                      </a:cubicBezTo>
-                      <a:cubicBezTo>
-                        <a:pt x="21600" y="15858"/>
-                        <a:pt x="21600" y="15858"/>
-                        <a:pt x="17003" y="17512"/>
-                      </a:cubicBezTo>
-                      <a:cubicBezTo>
-                        <a:pt x="11051" y="15925"/>
-                        <a:pt x="10549" y="15925"/>
-                        <a:pt x="4597" y="17512"/>
-                      </a:cubicBezTo>
-                      <a:cubicBezTo>
-                        <a:pt x="4597" y="17512"/>
-                        <a:pt x="4597" y="17512"/>
-                        <a:pt x="0" y="15858"/>
-                      </a:cubicBezTo>
-                      <a:cubicBezTo>
-                        <a:pt x="0" y="15858"/>
-                        <a:pt x="0" y="15858"/>
-                        <a:pt x="4597" y="14200"/>
-                      </a:cubicBezTo>
-                      <a:close/>
-                      <a:moveTo>
-                        <a:pt x="4597" y="10111"/>
-                      </a:moveTo>
-                      <a:cubicBezTo>
-                        <a:pt x="10549" y="11702"/>
-                        <a:pt x="11051" y="11702"/>
-                        <a:pt x="17003" y="10111"/>
-                      </a:cubicBezTo>
-                      <a:cubicBezTo>
-                        <a:pt x="17003" y="10111"/>
-                        <a:pt x="17003" y="10111"/>
-                        <a:pt x="21600" y="11769"/>
-                      </a:cubicBezTo>
-                      <a:cubicBezTo>
-                        <a:pt x="21600" y="11769"/>
-                        <a:pt x="21600" y="11769"/>
-                        <a:pt x="17003" y="13423"/>
-                      </a:cubicBezTo>
-                      <a:cubicBezTo>
-                        <a:pt x="11051" y="11837"/>
-                        <a:pt x="10549" y="11837"/>
-                        <a:pt x="4597" y="13423"/>
-                      </a:cubicBezTo>
-                      <a:cubicBezTo>
-                        <a:pt x="4597" y="13423"/>
-                        <a:pt x="4597" y="13423"/>
-                        <a:pt x="0" y="11769"/>
-                      </a:cubicBezTo>
-                      <a:cubicBezTo>
-                        <a:pt x="0" y="11769"/>
-                        <a:pt x="0" y="11769"/>
-                        <a:pt x="4597" y="10111"/>
-                      </a:cubicBezTo>
-                      <a:close/>
-                      <a:moveTo>
-                        <a:pt x="2971" y="918"/>
-                      </a:moveTo>
-                      <a:lnTo>
-                        <a:pt x="2971" y="6926"/>
-                      </a:lnTo>
-                      <a:cubicBezTo>
-                        <a:pt x="2971" y="6926"/>
-                        <a:pt x="2971" y="6926"/>
-                        <a:pt x="3980" y="6926"/>
-                      </a:cubicBezTo>
-                      <a:cubicBezTo>
-                        <a:pt x="4430" y="6926"/>
-                        <a:pt x="4695" y="6878"/>
-                        <a:pt x="4903" y="6708"/>
-                      </a:cubicBezTo>
-                      <a:cubicBezTo>
-                        <a:pt x="5220" y="6447"/>
-                        <a:pt x="5249" y="5917"/>
-                        <a:pt x="5249" y="4849"/>
-                      </a:cubicBezTo>
-                      <a:cubicBezTo>
-                        <a:pt x="5249" y="4849"/>
-                        <a:pt x="5249" y="4849"/>
-                        <a:pt x="5249" y="2990"/>
-                      </a:cubicBezTo>
-                      <a:cubicBezTo>
-                        <a:pt x="5249" y="1926"/>
-                        <a:pt x="5220" y="1396"/>
-                        <a:pt x="4903" y="1135"/>
-                      </a:cubicBezTo>
-                      <a:cubicBezTo>
-                        <a:pt x="4695" y="965"/>
-                        <a:pt x="4430" y="918"/>
-                        <a:pt x="3980" y="918"/>
-                      </a:cubicBezTo>
-                      <a:cubicBezTo>
-                        <a:pt x="3980" y="918"/>
-                        <a:pt x="3980" y="918"/>
-                        <a:pt x="2971" y="918"/>
-                      </a:cubicBezTo>
-                      <a:close/>
-                      <a:moveTo>
-                        <a:pt x="8068" y="0"/>
-                      </a:moveTo>
-                      <a:cubicBezTo>
-                        <a:pt x="8068" y="0"/>
-                        <a:pt x="8068" y="0"/>
-                        <a:pt x="13456" y="0"/>
-                      </a:cubicBezTo>
-                      <a:cubicBezTo>
-                        <a:pt x="13542" y="0"/>
-                        <a:pt x="13594" y="16"/>
-                        <a:pt x="13635" y="44"/>
-                      </a:cubicBezTo>
-                      <a:cubicBezTo>
-                        <a:pt x="13669" y="67"/>
-                        <a:pt x="13698" y="103"/>
-                        <a:pt x="13698" y="162"/>
-                      </a:cubicBezTo>
-                      <a:cubicBezTo>
-                        <a:pt x="13698" y="162"/>
-                        <a:pt x="13698" y="162"/>
-                        <a:pt x="13698" y="827"/>
-                      </a:cubicBezTo>
-                      <a:cubicBezTo>
-                        <a:pt x="13698" y="886"/>
-                        <a:pt x="13669" y="922"/>
-                        <a:pt x="13635" y="945"/>
-                      </a:cubicBezTo>
-                      <a:cubicBezTo>
-                        <a:pt x="13594" y="973"/>
-                        <a:pt x="13542" y="989"/>
-                        <a:pt x="13456" y="989"/>
-                      </a:cubicBezTo>
-                      <a:cubicBezTo>
-                        <a:pt x="13456" y="989"/>
-                        <a:pt x="13456" y="989"/>
-                        <a:pt x="11731" y="989"/>
-                      </a:cubicBezTo>
-                      <a:cubicBezTo>
-                        <a:pt x="11731" y="989"/>
-                        <a:pt x="11731" y="989"/>
-                        <a:pt x="11731" y="7681"/>
-                      </a:cubicBezTo>
-                      <a:cubicBezTo>
-                        <a:pt x="11731" y="7740"/>
-                        <a:pt x="11708" y="7776"/>
-                        <a:pt x="11667" y="7800"/>
-                      </a:cubicBezTo>
-                      <a:cubicBezTo>
-                        <a:pt x="11633" y="7827"/>
-                        <a:pt x="11581" y="7843"/>
-                        <a:pt x="11494" y="7843"/>
-                      </a:cubicBezTo>
-                      <a:cubicBezTo>
-                        <a:pt x="11494" y="7843"/>
-                        <a:pt x="11494" y="7843"/>
-                        <a:pt x="10029" y="7843"/>
-                      </a:cubicBezTo>
-                      <a:cubicBezTo>
-                        <a:pt x="9943" y="7843"/>
-                        <a:pt x="9891" y="7827"/>
-                        <a:pt x="9850" y="7800"/>
-                      </a:cubicBezTo>
-                      <a:cubicBezTo>
-                        <a:pt x="9810" y="7776"/>
-                        <a:pt x="9787" y="7740"/>
-                        <a:pt x="9787" y="7681"/>
-                      </a:cubicBezTo>
-                      <a:cubicBezTo>
-                        <a:pt x="9787" y="7681"/>
-                        <a:pt x="9787" y="7681"/>
-                        <a:pt x="9787" y="989"/>
-                      </a:cubicBezTo>
-                      <a:cubicBezTo>
-                        <a:pt x="9787" y="989"/>
-                        <a:pt x="9787" y="989"/>
-                        <a:pt x="8068" y="989"/>
-                      </a:cubicBezTo>
-                      <a:cubicBezTo>
-                        <a:pt x="7981" y="989"/>
-                        <a:pt x="7929" y="973"/>
-                        <a:pt x="7889" y="945"/>
-                      </a:cubicBezTo>
-                      <a:cubicBezTo>
-                        <a:pt x="7849" y="922"/>
-                        <a:pt x="7825" y="886"/>
-                        <a:pt x="7825" y="827"/>
-                      </a:cubicBezTo>
-                      <a:cubicBezTo>
-                        <a:pt x="7825" y="827"/>
-                        <a:pt x="7825" y="827"/>
-                        <a:pt x="7825" y="162"/>
-                      </a:cubicBezTo>
-                      <a:cubicBezTo>
-                        <a:pt x="7825" y="103"/>
-                        <a:pt x="7849" y="67"/>
-                        <a:pt x="7889" y="44"/>
-                      </a:cubicBezTo>
-                      <a:cubicBezTo>
-                        <a:pt x="7929" y="16"/>
-                        <a:pt x="7981" y="0"/>
-                        <a:pt x="8068" y="0"/>
-                      </a:cubicBezTo>
-                      <a:close/>
-                      <a:moveTo>
-                        <a:pt x="1390" y="0"/>
-                      </a:moveTo>
-                      <a:cubicBezTo>
-                        <a:pt x="1390" y="0"/>
-                        <a:pt x="1390" y="0"/>
-                        <a:pt x="4257" y="0"/>
-                      </a:cubicBezTo>
-                      <a:cubicBezTo>
-                        <a:pt x="5370" y="0"/>
-                        <a:pt x="6051" y="174"/>
-                        <a:pt x="6466" y="538"/>
-                      </a:cubicBezTo>
-                      <a:cubicBezTo>
-                        <a:pt x="7072" y="1036"/>
-                        <a:pt x="7089" y="1843"/>
-                        <a:pt x="7089" y="3077"/>
-                      </a:cubicBezTo>
-                      <a:cubicBezTo>
-                        <a:pt x="7089" y="3077"/>
-                        <a:pt x="7089" y="3077"/>
-                        <a:pt x="7089" y="4766"/>
-                      </a:cubicBezTo>
-                      <a:cubicBezTo>
-                        <a:pt x="7089" y="6000"/>
-                        <a:pt x="7072" y="6807"/>
-                        <a:pt x="6466" y="7305"/>
-                      </a:cubicBezTo>
-                      <a:cubicBezTo>
-                        <a:pt x="6051" y="7669"/>
-                        <a:pt x="5370" y="7843"/>
-                        <a:pt x="4257" y="7843"/>
-                      </a:cubicBezTo>
-                      <a:cubicBezTo>
-                        <a:pt x="4257" y="7843"/>
-                        <a:pt x="4257" y="7843"/>
-                        <a:pt x="1390" y="7843"/>
-                      </a:cubicBezTo>
-                      <a:cubicBezTo>
-                        <a:pt x="1304" y="7843"/>
-                        <a:pt x="1252" y="7827"/>
-                        <a:pt x="1217" y="7800"/>
-                      </a:cubicBezTo>
-                      <a:cubicBezTo>
-                        <a:pt x="1177" y="7776"/>
-                        <a:pt x="1154" y="7740"/>
-                        <a:pt x="1154" y="7681"/>
-                      </a:cubicBezTo>
-                      <a:cubicBezTo>
-                        <a:pt x="1154" y="7681"/>
-                        <a:pt x="1154" y="7681"/>
-                        <a:pt x="1154" y="162"/>
-                      </a:cubicBezTo>
-                      <a:cubicBezTo>
-                        <a:pt x="1154" y="103"/>
-                        <a:pt x="1177" y="67"/>
-                        <a:pt x="1217" y="44"/>
-                      </a:cubicBezTo>
-                      <a:cubicBezTo>
-                        <a:pt x="1252" y="16"/>
-                        <a:pt x="1304" y="0"/>
-                        <a:pt x="1390" y="0"/>
-                      </a:cubicBezTo>
-                      <a:close/>
-                      <a:moveTo>
-                        <a:pt x="14706" y="0"/>
-                      </a:moveTo>
-                      <a:cubicBezTo>
-                        <a:pt x="14706" y="0"/>
-                        <a:pt x="14706" y="0"/>
-                        <a:pt x="16045" y="0"/>
-                      </a:cubicBezTo>
-                      <a:cubicBezTo>
-                        <a:pt x="16131" y="0"/>
-                        <a:pt x="16183" y="16"/>
-                        <a:pt x="16224" y="44"/>
-                      </a:cubicBezTo>
-                      <a:cubicBezTo>
-                        <a:pt x="16264" y="67"/>
-                        <a:pt x="16287" y="103"/>
-                        <a:pt x="16287" y="162"/>
-                      </a:cubicBezTo>
-                      <a:cubicBezTo>
-                        <a:pt x="16287" y="162"/>
-                        <a:pt x="16287" y="162"/>
-                        <a:pt x="16287" y="5712"/>
-                      </a:cubicBezTo>
-                      <a:cubicBezTo>
-                        <a:pt x="16287" y="6314"/>
-                        <a:pt x="16368" y="6646"/>
-                        <a:pt x="16627" y="6844"/>
-                      </a:cubicBezTo>
-                      <a:cubicBezTo>
-                        <a:pt x="16818" y="6990"/>
-                        <a:pt x="17072" y="7053"/>
-                        <a:pt x="17406" y="7053"/>
-                      </a:cubicBezTo>
-                      <a:cubicBezTo>
-                        <a:pt x="17776" y="7053"/>
-                        <a:pt x="18041" y="6982"/>
-                        <a:pt x="18226" y="6844"/>
-                      </a:cubicBezTo>
-                      <a:cubicBezTo>
-                        <a:pt x="18503" y="6638"/>
-                        <a:pt x="18566" y="6294"/>
-                        <a:pt x="18566" y="5712"/>
-                      </a:cubicBezTo>
-                      <a:cubicBezTo>
-                        <a:pt x="18566" y="5712"/>
-                        <a:pt x="18566" y="5712"/>
-                        <a:pt x="18566" y="162"/>
-                      </a:cubicBezTo>
-                      <a:cubicBezTo>
-                        <a:pt x="18566" y="103"/>
-                        <a:pt x="18589" y="67"/>
-                        <a:pt x="18630" y="44"/>
-                      </a:cubicBezTo>
-                      <a:cubicBezTo>
-                        <a:pt x="18664" y="16"/>
-                        <a:pt x="18722" y="0"/>
-                        <a:pt x="18803" y="0"/>
-                      </a:cubicBezTo>
-                      <a:cubicBezTo>
-                        <a:pt x="18803" y="0"/>
-                        <a:pt x="18803" y="0"/>
-                        <a:pt x="20147" y="0"/>
-                      </a:cubicBezTo>
-                      <a:cubicBezTo>
-                        <a:pt x="20234" y="0"/>
-                        <a:pt x="20286" y="16"/>
-                        <a:pt x="20320" y="44"/>
-                      </a:cubicBezTo>
-                      <a:cubicBezTo>
-                        <a:pt x="20361" y="67"/>
-                        <a:pt x="20384" y="103"/>
-                        <a:pt x="20384" y="162"/>
-                      </a:cubicBezTo>
-                      <a:cubicBezTo>
-                        <a:pt x="20384" y="162"/>
-                        <a:pt x="20384" y="162"/>
-                        <a:pt x="20384" y="5716"/>
-                      </a:cubicBezTo>
-                      <a:cubicBezTo>
-                        <a:pt x="20384" y="6464"/>
-                        <a:pt x="20257" y="6962"/>
-                        <a:pt x="19732" y="7382"/>
-                      </a:cubicBezTo>
-                      <a:cubicBezTo>
-                        <a:pt x="19287" y="7738"/>
-                        <a:pt x="18560" y="7943"/>
-                        <a:pt x="17430" y="7943"/>
-                      </a:cubicBezTo>
-                      <a:cubicBezTo>
-                        <a:pt x="16316" y="7943"/>
-                        <a:pt x="15583" y="7750"/>
-                        <a:pt x="15093" y="7382"/>
-                      </a:cubicBezTo>
-                      <a:cubicBezTo>
-                        <a:pt x="14625" y="7030"/>
-                        <a:pt x="14469" y="6523"/>
-                        <a:pt x="14469" y="5716"/>
-                      </a:cubicBezTo>
-                      <a:cubicBezTo>
-                        <a:pt x="14469" y="5716"/>
-                        <a:pt x="14469" y="5716"/>
-                        <a:pt x="14469" y="162"/>
-                      </a:cubicBezTo>
-                      <a:cubicBezTo>
-                        <a:pt x="14469" y="103"/>
-                        <a:pt x="14493" y="67"/>
-                        <a:pt x="14527" y="44"/>
-                      </a:cubicBezTo>
-                      <a:cubicBezTo>
-                        <a:pt x="14568" y="16"/>
-                        <a:pt x="14620" y="0"/>
-                        <a:pt x="14706" y="0"/>
-                      </a:cubicBezTo>
-                      <a:close/>
-                    </a:path>
-                  </a:pathLst>
-                </a:custGeom>
-                <a:solidFill>
-                  <a:schemeClr val="accent1"/>
-                </a:solidFill>
-                <a:ln w="12700" cap="flat">
-                  <a:noFill/>
-                  <a:miter lim="400000"/>
-                </a:ln>
-                <a:effectLst/>
-              </p:spPr>
-              <p:txBody>
-                <a:bodyPr wrap="square" lIns="46799" tIns="46799" rIns="46799" bIns="46799" numCol="1" anchor="t">
-                  <a:noAutofit/>
-                </a:bodyPr>
-                <a:lstStyle/>
-                <a:p>
-                  <a:pPr>
-                    <a:defRPr>
-                      <a:latin typeface="Verdana"/>
-                      <a:ea typeface="Verdana"/>
-                      <a:cs typeface="Verdana"/>
-                      <a:sym typeface="Verdana"/>
-                    </a:defRPr>
-                  </a:pPr>
-                </a:p>
-              </p:txBody>
-            </p:sp>
-            <p:pic>
-              <p:nvPicPr>
-                <p:cNvPr id="55" name="logoill.pdf" descr="logoill.pdf"/>
-                <p:cNvPicPr>
-                  <a:picLocks noChangeAspect="0"/>
-                </p:cNvPicPr>
-                <p:nvPr/>
-              </p:nvPicPr>
-              <p:blipFill>
-                <a:blip r:embed="rId4">
-                  <a:extLst/>
-                </a:blip>
-                <a:stretch>
-                  <a:fillRect/>
-                </a:stretch>
-              </p:blipFill>
-              <p:spPr>
-                <a:xfrm>
-                  <a:off x="486613" y="459579"/>
-                  <a:ext cx="164286" cy="157037"/>
-                </a:xfrm>
-                <a:prstGeom prst="rect">
-                  <a:avLst/>
-                </a:prstGeom>
-                <a:ln w="12700" cap="flat">
-                  <a:noFill/>
-                  <a:miter lim="400000"/>
-                </a:ln>
-                <a:effectLst/>
-              </p:spPr>
-            </p:pic>
-            <p:pic>
-              <p:nvPicPr>
-                <p:cNvPr id="56" name="mcstas-logo.pdf" descr="mcstas-logo.pdf"/>
-                <p:cNvPicPr>
-                  <a:picLocks noChangeAspect="0"/>
-                </p:cNvPicPr>
-                <p:nvPr/>
-              </p:nvPicPr>
-              <p:blipFill>
-                <a:blip r:embed="rId5">
-                  <a:extLst/>
-                </a:blip>
-                <a:srcRect l="0" t="0" r="0" b="0"/>
-                <a:stretch>
-                  <a:fillRect/>
-                </a:stretch>
-              </p:blipFill>
-              <p:spPr>
-                <a:xfrm>
-                  <a:off x="0" y="0"/>
-                  <a:ext cx="725762" cy="426459"/>
-                </a:xfrm>
-                <a:prstGeom prst="rect">
-                  <a:avLst/>
-                </a:prstGeom>
-                <a:ln w="12700" cap="flat">
-                  <a:noFill/>
-                  <a:miter lim="400000"/>
-                </a:ln>
-                <a:effectLst/>
-              </p:spPr>
-            </p:pic>
-            <p:pic>
-              <p:nvPicPr>
-                <p:cNvPr id="57" name="PSI-Logo_trans.png" descr="PSI-Logo_trans.png"/>
-                <p:cNvPicPr>
-                  <a:picLocks noChangeAspect="0"/>
-                </p:cNvPicPr>
-                <p:nvPr/>
-              </p:nvPicPr>
-              <p:blipFill>
-                <a:blip r:embed="rId6">
-                  <a:extLst/>
-                </a:blip>
-                <a:stretch>
-                  <a:fillRect/>
-                </a:stretch>
-              </p:blipFill>
-              <p:spPr>
-                <a:xfrm>
-                  <a:off x="270340" y="501170"/>
-                  <a:ext cx="204490" cy="74865"/>
-                </a:xfrm>
-                <a:prstGeom prst="rect">
-                  <a:avLst/>
-                </a:prstGeom>
-                <a:ln w="12700" cap="flat">
-                  <a:noFill/>
-                  <a:miter lim="400000"/>
-                </a:ln>
-                <a:effectLst/>
-              </p:spPr>
-            </p:pic>
-            <p:pic>
-              <p:nvPicPr>
-                <p:cNvPr id="58" name="ku-logo.pdf" descr="ku-logo.pdf"/>
-                <p:cNvPicPr>
-                  <a:picLocks noChangeAspect="0"/>
-                </p:cNvPicPr>
-                <p:nvPr/>
-              </p:nvPicPr>
-              <p:blipFill>
-                <a:blip r:embed="rId7">
-                  <a:extLst/>
-                </a:blip>
-                <a:stretch>
-                  <a:fillRect/>
-                </a:stretch>
-              </p:blipFill>
-              <p:spPr>
-                <a:xfrm>
-                  <a:off x="131011" y="451261"/>
-                  <a:ext cx="128373" cy="174419"/>
-                </a:xfrm>
-                <a:prstGeom prst="rect">
-                  <a:avLst/>
-                </a:prstGeom>
-                <a:ln w="12700" cap="flat">
-                  <a:noFill/>
-                  <a:miter lim="400000"/>
-                </a:ln>
-                <a:effectLst/>
-              </p:spPr>
-            </p:pic>
-            <p:pic>
-              <p:nvPicPr>
-                <p:cNvPr id="59" name="ESS_Logo_Frugal_Blue_cmyk.png" descr="ESS_Logo_Frugal_Blue_cmyk.png"/>
-                <p:cNvPicPr>
-                  <a:picLocks noChangeAspect="0"/>
-                </p:cNvPicPr>
-                <p:nvPr/>
-              </p:nvPicPr>
-              <p:blipFill>
-                <a:blip r:embed="rId8">
-                  <a:extLst/>
-                </a:blip>
-                <a:stretch>
-                  <a:fillRect/>
-                </a:stretch>
-              </p:blipFill>
-              <p:spPr>
-                <a:xfrm>
-                  <a:off x="214914" y="607364"/>
-                  <a:ext cx="279297" cy="150286"/>
-                </a:xfrm>
-                <a:prstGeom prst="rect">
-                  <a:avLst/>
-                </a:prstGeom>
-                <a:ln w="12700" cap="flat">
-                  <a:noFill/>
-                  <a:miter lim="400000"/>
-                </a:ln>
-                <a:effectLst/>
-              </p:spPr>
-            </p:pic>
-          </p:grpSp>
-        </p:grpSp>
-        <p:pic>
-          <p:nvPicPr>
-            <p:cNvPr id="62" name="Image" descr="Image"/>
-            <p:cNvPicPr>
-              <a:picLocks noChangeAspect="1"/>
-            </p:cNvPicPr>
-            <p:nvPr/>
-          </p:nvPicPr>
-          <p:blipFill>
-            <a:blip r:embed="rId9">
-              <a:extLst/>
-            </a:blip>
-            <a:srcRect l="0" t="0" r="77004" b="0"/>
-            <a:stretch>
-              <a:fillRect/>
-            </a:stretch>
-          </p:blipFill>
-          <p:spPr>
-            <a:xfrm>
-              <a:off x="44293" y="62025"/>
-              <a:ext cx="617630" cy="611845"/>
-            </a:xfrm>
-            <a:prstGeom prst="rect">
-              <a:avLst/>
-            </a:prstGeom>
-            <a:ln w="12700" cap="flat">
-              <a:noFill/>
-              <a:miter lim="400000"/>
-            </a:ln>
-            <a:effectLst/>
-          </p:spPr>
-        </p:pic>
-      </p:grpSp>
     </p:spTree>
   </p:cSld>
   <p:clrMapOvr>
@@ -4983,9 +5843,849 @@
           </a:ln>
         </p:spPr>
       </p:pic>
+      <p:grpSp>
+        <p:nvGrpSpPr>
+          <p:cNvPr id="89" name="Group"/>
+          <p:cNvGrpSpPr/>
+          <p:nvPr/>
+        </p:nvGrpSpPr>
+        <p:grpSpPr>
+          <a:xfrm>
+            <a:off x="17068" y="935881"/>
+            <a:ext cx="1506786" cy="5584238"/>
+            <a:chOff x="0" y="0"/>
+            <a:chExt cx="1506784" cy="5584236"/>
+          </a:xfrm>
+        </p:grpSpPr>
+        <p:pic>
+          <p:nvPicPr>
+            <p:cNvPr id="77" name="Image" descr="Image"/>
+            <p:cNvPicPr>
+              <a:picLocks noChangeAspect="1"/>
+            </p:cNvPicPr>
+            <p:nvPr/>
+          </p:nvPicPr>
+          <p:blipFill>
+            <a:blip r:embed="rId3">
+              <a:extLst/>
+            </a:blip>
+            <a:srcRect l="0" t="0" r="0" b="0"/>
+            <a:stretch>
+              <a:fillRect/>
+            </a:stretch>
+          </p:blipFill>
+          <p:spPr>
+            <a:xfrm>
+              <a:off x="0" y="0"/>
+              <a:ext cx="1506785" cy="5584237"/>
+            </a:xfrm>
+            <a:prstGeom prst="rect">
+              <a:avLst/>
+            </a:prstGeom>
+            <a:ln w="12700" cap="flat">
+              <a:noFill/>
+              <a:miter lim="400000"/>
+            </a:ln>
+            <a:effectLst/>
+          </p:spPr>
+        </p:pic>
+        <p:sp>
+          <p:nvSpPr>
+            <p:cNvPr id="78" name="Rectangle"/>
+            <p:cNvSpPr/>
+            <p:nvPr/>
+          </p:nvSpPr>
+          <p:spPr>
+            <a:xfrm>
+              <a:off x="26491" y="29555"/>
+              <a:ext cx="1453952" cy="791704"/>
+            </a:xfrm>
+            <a:prstGeom prst="rect">
+              <a:avLst/>
+            </a:prstGeom>
+            <a:solidFill>
+              <a:srgbClr val="FFFFFF"/>
+            </a:solidFill>
+            <a:ln w="12700" cap="flat">
+              <a:noFill/>
+              <a:miter lim="400000"/>
+            </a:ln>
+            <a:effectLst/>
+          </p:spPr>
+          <p:txBody>
+            <a:bodyPr wrap="square" lIns="46799" tIns="46799" rIns="46799" bIns="46799" numCol="1" anchor="ctr">
+              <a:noAutofit/>
+            </a:bodyPr>
+            <a:lstStyle/>
+            <a:p>
+              <a:pPr/>
+            </a:p>
+          </p:txBody>
+        </p:sp>
+        <p:grpSp>
+          <p:nvGrpSpPr>
+            <p:cNvPr id="87" name="Group"/>
+            <p:cNvGrpSpPr/>
+            <p:nvPr/>
+          </p:nvGrpSpPr>
+          <p:grpSpPr>
+            <a:xfrm>
+              <a:off x="161144" y="50051"/>
+              <a:ext cx="1271028" cy="5510910"/>
+              <a:chOff x="0" y="0"/>
+              <a:chExt cx="1271027" cy="5510908"/>
+            </a:xfrm>
+          </p:grpSpPr>
+          <p:sp>
+            <p:nvSpPr>
+              <p:cNvPr id="79" name="2025 ISIS McStas School"/>
+              <p:cNvSpPr txBox="1"/>
+              <p:nvPr/>
+            </p:nvSpPr>
+            <p:spPr>
+              <a:xfrm>
+                <a:off x="0" y="4478221"/>
+                <a:ext cx="1184497" cy="1032688"/>
+              </a:xfrm>
+              <a:prstGeom prst="rect">
+                <a:avLst/>
+              </a:prstGeom>
+              <a:noFill/>
+              <a:ln w="12700" cap="flat">
+                <a:noFill/>
+                <a:miter lim="400000"/>
+              </a:ln>
+              <a:effectLst/>
+              <a:extLst>
+                <a:ext uri="{C572A759-6A51-4108-AA02-DFA0A04FC94B}">
+                  <ma14:wrappingTextBoxFlag xmlns:ma14="http://schemas.microsoft.com/office/mac/drawingml/2011/main" val="1"/>
+                </a:ext>
+              </a:extLst>
+            </p:spPr>
+            <p:txBody>
+              <a:bodyPr wrap="square" lIns="0" tIns="0" rIns="0" bIns="0" numCol="1" anchor="b">
+                <a:normAutofit fontScale="100000" lnSpcReduction="0"/>
+              </a:bodyPr>
+              <a:lstStyle/>
+              <a:p>
+                <a:pPr algn="ctr" defTabSz="521208">
+                  <a:lnSpc>
+                    <a:spcPct val="110000"/>
+                  </a:lnSpc>
+                  <a:spcBef>
+                    <a:spcPts val="0"/>
+                  </a:spcBef>
+                  <a:defRPr b="1" i="1" sz="2109">
+                    <a:solidFill>
+                      <a:srgbClr val="FFFFFF"/>
+                    </a:solidFill>
+                  </a:defRPr>
+                </a:pPr>
+                <a:r>
+                  <a:t>2025 ISIS</a:t>
+                </a:r>
+                <a:br/>
+                <a:r>
+                  <a:t>McStas School</a:t>
+                </a:r>
+              </a:p>
+            </p:txBody>
+          </p:sp>
+          <p:grpSp>
+            <p:nvGrpSpPr>
+              <p:cNvPr id="86" name="Group"/>
+              <p:cNvGrpSpPr/>
+              <p:nvPr/>
+            </p:nvGrpSpPr>
+            <p:grpSpPr>
+              <a:xfrm>
+                <a:off x="545266" y="-1"/>
+                <a:ext cx="725762" cy="757651"/>
+                <a:chOff x="0" y="0"/>
+                <a:chExt cx="725761" cy="757649"/>
+              </a:xfrm>
+            </p:grpSpPr>
+            <p:sp>
+              <p:nvSpPr>
+                <p:cNvPr id="80" name="Logo color"/>
+                <p:cNvSpPr/>
+                <p:nvPr/>
+              </p:nvSpPr>
+              <p:spPr>
+                <a:xfrm>
+                  <a:off x="2507" y="452770"/>
+                  <a:ext cx="117009" cy="170656"/>
+                </a:xfrm>
+                <a:custGeom>
+                  <a:avLst/>
+                  <a:gdLst/>
+                  <a:ahLst/>
+                  <a:cxnLst>
+                    <a:cxn ang="0">
+                      <a:pos x="wd2" y="hd2"/>
+                    </a:cxn>
+                    <a:cxn ang="5400000">
+                      <a:pos x="wd2" y="hd2"/>
+                    </a:cxn>
+                    <a:cxn ang="10800000">
+                      <a:pos x="wd2" y="hd2"/>
+                    </a:cxn>
+                    <a:cxn ang="16200000">
+                      <a:pos x="wd2" y="hd2"/>
+                    </a:cxn>
+                  </a:cxnLst>
+                  <a:rect l="0" t="0" r="r" b="b"/>
+                  <a:pathLst>
+                    <a:path w="21600" h="21600" fill="norm" stroke="1" extrusionOk="0">
+                      <a:moveTo>
+                        <a:pt x="4597" y="18293"/>
+                      </a:moveTo>
+                      <a:cubicBezTo>
+                        <a:pt x="10549" y="19881"/>
+                        <a:pt x="11051" y="19881"/>
+                        <a:pt x="17003" y="18293"/>
+                      </a:cubicBezTo>
+                      <a:cubicBezTo>
+                        <a:pt x="17003" y="18293"/>
+                        <a:pt x="17003" y="18293"/>
+                        <a:pt x="21600" y="19949"/>
+                      </a:cubicBezTo>
+                      <a:cubicBezTo>
+                        <a:pt x="21600" y="19949"/>
+                        <a:pt x="21600" y="19949"/>
+                        <a:pt x="17003" y="21600"/>
+                      </a:cubicBezTo>
+                      <a:cubicBezTo>
+                        <a:pt x="11051" y="20016"/>
+                        <a:pt x="10549" y="20016"/>
+                        <a:pt x="4597" y="21600"/>
+                      </a:cubicBezTo>
+                      <a:cubicBezTo>
+                        <a:pt x="4597" y="21600"/>
+                        <a:pt x="4597" y="21600"/>
+                        <a:pt x="0" y="19949"/>
+                      </a:cubicBezTo>
+                      <a:cubicBezTo>
+                        <a:pt x="0" y="19949"/>
+                        <a:pt x="0" y="19949"/>
+                        <a:pt x="4597" y="18293"/>
+                      </a:cubicBezTo>
+                      <a:close/>
+                      <a:moveTo>
+                        <a:pt x="4597" y="14200"/>
+                      </a:moveTo>
+                      <a:cubicBezTo>
+                        <a:pt x="10549" y="15790"/>
+                        <a:pt x="11051" y="15790"/>
+                        <a:pt x="17003" y="14200"/>
+                      </a:cubicBezTo>
+                      <a:cubicBezTo>
+                        <a:pt x="17003" y="14200"/>
+                        <a:pt x="17003" y="14200"/>
+                        <a:pt x="21600" y="15858"/>
+                      </a:cubicBezTo>
+                      <a:cubicBezTo>
+                        <a:pt x="21600" y="15858"/>
+                        <a:pt x="21600" y="15858"/>
+                        <a:pt x="17003" y="17512"/>
+                      </a:cubicBezTo>
+                      <a:cubicBezTo>
+                        <a:pt x="11051" y="15925"/>
+                        <a:pt x="10549" y="15925"/>
+                        <a:pt x="4597" y="17512"/>
+                      </a:cubicBezTo>
+                      <a:cubicBezTo>
+                        <a:pt x="4597" y="17512"/>
+                        <a:pt x="4597" y="17512"/>
+                        <a:pt x="0" y="15858"/>
+                      </a:cubicBezTo>
+                      <a:cubicBezTo>
+                        <a:pt x="0" y="15858"/>
+                        <a:pt x="0" y="15858"/>
+                        <a:pt x="4597" y="14200"/>
+                      </a:cubicBezTo>
+                      <a:close/>
+                      <a:moveTo>
+                        <a:pt x="4597" y="10111"/>
+                      </a:moveTo>
+                      <a:cubicBezTo>
+                        <a:pt x="10549" y="11702"/>
+                        <a:pt x="11051" y="11702"/>
+                        <a:pt x="17003" y="10111"/>
+                      </a:cubicBezTo>
+                      <a:cubicBezTo>
+                        <a:pt x="17003" y="10111"/>
+                        <a:pt x="17003" y="10111"/>
+                        <a:pt x="21600" y="11769"/>
+                      </a:cubicBezTo>
+                      <a:cubicBezTo>
+                        <a:pt x="21600" y="11769"/>
+                        <a:pt x="21600" y="11769"/>
+                        <a:pt x="17003" y="13423"/>
+                      </a:cubicBezTo>
+                      <a:cubicBezTo>
+                        <a:pt x="11051" y="11837"/>
+                        <a:pt x="10549" y="11837"/>
+                        <a:pt x="4597" y="13423"/>
+                      </a:cubicBezTo>
+                      <a:cubicBezTo>
+                        <a:pt x="4597" y="13423"/>
+                        <a:pt x="4597" y="13423"/>
+                        <a:pt x="0" y="11769"/>
+                      </a:cubicBezTo>
+                      <a:cubicBezTo>
+                        <a:pt x="0" y="11769"/>
+                        <a:pt x="0" y="11769"/>
+                        <a:pt x="4597" y="10111"/>
+                      </a:cubicBezTo>
+                      <a:close/>
+                      <a:moveTo>
+                        <a:pt x="2971" y="918"/>
+                      </a:moveTo>
+                      <a:lnTo>
+                        <a:pt x="2971" y="6926"/>
+                      </a:lnTo>
+                      <a:cubicBezTo>
+                        <a:pt x="2971" y="6926"/>
+                        <a:pt x="2971" y="6926"/>
+                        <a:pt x="3980" y="6926"/>
+                      </a:cubicBezTo>
+                      <a:cubicBezTo>
+                        <a:pt x="4430" y="6926"/>
+                        <a:pt x="4695" y="6878"/>
+                        <a:pt x="4903" y="6708"/>
+                      </a:cubicBezTo>
+                      <a:cubicBezTo>
+                        <a:pt x="5220" y="6447"/>
+                        <a:pt x="5249" y="5917"/>
+                        <a:pt x="5249" y="4849"/>
+                      </a:cubicBezTo>
+                      <a:cubicBezTo>
+                        <a:pt x="5249" y="4849"/>
+                        <a:pt x="5249" y="4849"/>
+                        <a:pt x="5249" y="2990"/>
+                      </a:cubicBezTo>
+                      <a:cubicBezTo>
+                        <a:pt x="5249" y="1926"/>
+                        <a:pt x="5220" y="1396"/>
+                        <a:pt x="4903" y="1135"/>
+                      </a:cubicBezTo>
+                      <a:cubicBezTo>
+                        <a:pt x="4695" y="965"/>
+                        <a:pt x="4430" y="918"/>
+                        <a:pt x="3980" y="918"/>
+                      </a:cubicBezTo>
+                      <a:cubicBezTo>
+                        <a:pt x="3980" y="918"/>
+                        <a:pt x="3980" y="918"/>
+                        <a:pt x="2971" y="918"/>
+                      </a:cubicBezTo>
+                      <a:close/>
+                      <a:moveTo>
+                        <a:pt x="8068" y="0"/>
+                      </a:moveTo>
+                      <a:cubicBezTo>
+                        <a:pt x="8068" y="0"/>
+                        <a:pt x="8068" y="0"/>
+                        <a:pt x="13456" y="0"/>
+                      </a:cubicBezTo>
+                      <a:cubicBezTo>
+                        <a:pt x="13542" y="0"/>
+                        <a:pt x="13594" y="16"/>
+                        <a:pt x="13635" y="44"/>
+                      </a:cubicBezTo>
+                      <a:cubicBezTo>
+                        <a:pt x="13669" y="67"/>
+                        <a:pt x="13698" y="103"/>
+                        <a:pt x="13698" y="162"/>
+                      </a:cubicBezTo>
+                      <a:cubicBezTo>
+                        <a:pt x="13698" y="162"/>
+                        <a:pt x="13698" y="162"/>
+                        <a:pt x="13698" y="827"/>
+                      </a:cubicBezTo>
+                      <a:cubicBezTo>
+                        <a:pt x="13698" y="886"/>
+                        <a:pt x="13669" y="922"/>
+                        <a:pt x="13635" y="945"/>
+                      </a:cubicBezTo>
+                      <a:cubicBezTo>
+                        <a:pt x="13594" y="973"/>
+                        <a:pt x="13542" y="989"/>
+                        <a:pt x="13456" y="989"/>
+                      </a:cubicBezTo>
+                      <a:cubicBezTo>
+                        <a:pt x="13456" y="989"/>
+                        <a:pt x="13456" y="989"/>
+                        <a:pt x="11731" y="989"/>
+                      </a:cubicBezTo>
+                      <a:cubicBezTo>
+                        <a:pt x="11731" y="989"/>
+                        <a:pt x="11731" y="989"/>
+                        <a:pt x="11731" y="7681"/>
+                      </a:cubicBezTo>
+                      <a:cubicBezTo>
+                        <a:pt x="11731" y="7740"/>
+                        <a:pt x="11708" y="7776"/>
+                        <a:pt x="11667" y="7800"/>
+                      </a:cubicBezTo>
+                      <a:cubicBezTo>
+                        <a:pt x="11633" y="7827"/>
+                        <a:pt x="11581" y="7843"/>
+                        <a:pt x="11494" y="7843"/>
+                      </a:cubicBezTo>
+                      <a:cubicBezTo>
+                        <a:pt x="11494" y="7843"/>
+                        <a:pt x="11494" y="7843"/>
+                        <a:pt x="10029" y="7843"/>
+                      </a:cubicBezTo>
+                      <a:cubicBezTo>
+                        <a:pt x="9943" y="7843"/>
+                        <a:pt x="9891" y="7827"/>
+                        <a:pt x="9850" y="7800"/>
+                      </a:cubicBezTo>
+                      <a:cubicBezTo>
+                        <a:pt x="9810" y="7776"/>
+                        <a:pt x="9787" y="7740"/>
+                        <a:pt x="9787" y="7681"/>
+                      </a:cubicBezTo>
+                      <a:cubicBezTo>
+                        <a:pt x="9787" y="7681"/>
+                        <a:pt x="9787" y="7681"/>
+                        <a:pt x="9787" y="989"/>
+                      </a:cubicBezTo>
+                      <a:cubicBezTo>
+                        <a:pt x="9787" y="989"/>
+                        <a:pt x="9787" y="989"/>
+                        <a:pt x="8068" y="989"/>
+                      </a:cubicBezTo>
+                      <a:cubicBezTo>
+                        <a:pt x="7981" y="989"/>
+                        <a:pt x="7929" y="973"/>
+                        <a:pt x="7889" y="945"/>
+                      </a:cubicBezTo>
+                      <a:cubicBezTo>
+                        <a:pt x="7849" y="922"/>
+                        <a:pt x="7825" y="886"/>
+                        <a:pt x="7825" y="827"/>
+                      </a:cubicBezTo>
+                      <a:cubicBezTo>
+                        <a:pt x="7825" y="827"/>
+                        <a:pt x="7825" y="827"/>
+                        <a:pt x="7825" y="162"/>
+                      </a:cubicBezTo>
+                      <a:cubicBezTo>
+                        <a:pt x="7825" y="103"/>
+                        <a:pt x="7849" y="67"/>
+                        <a:pt x="7889" y="44"/>
+                      </a:cubicBezTo>
+                      <a:cubicBezTo>
+                        <a:pt x="7929" y="16"/>
+                        <a:pt x="7981" y="0"/>
+                        <a:pt x="8068" y="0"/>
+                      </a:cubicBezTo>
+                      <a:close/>
+                      <a:moveTo>
+                        <a:pt x="1390" y="0"/>
+                      </a:moveTo>
+                      <a:cubicBezTo>
+                        <a:pt x="1390" y="0"/>
+                        <a:pt x="1390" y="0"/>
+                        <a:pt x="4257" y="0"/>
+                      </a:cubicBezTo>
+                      <a:cubicBezTo>
+                        <a:pt x="5370" y="0"/>
+                        <a:pt x="6051" y="174"/>
+                        <a:pt x="6466" y="538"/>
+                      </a:cubicBezTo>
+                      <a:cubicBezTo>
+                        <a:pt x="7072" y="1036"/>
+                        <a:pt x="7089" y="1843"/>
+                        <a:pt x="7089" y="3077"/>
+                      </a:cubicBezTo>
+                      <a:cubicBezTo>
+                        <a:pt x="7089" y="3077"/>
+                        <a:pt x="7089" y="3077"/>
+                        <a:pt x="7089" y="4766"/>
+                      </a:cubicBezTo>
+                      <a:cubicBezTo>
+                        <a:pt x="7089" y="6000"/>
+                        <a:pt x="7072" y="6807"/>
+                        <a:pt x="6466" y="7305"/>
+                      </a:cubicBezTo>
+                      <a:cubicBezTo>
+                        <a:pt x="6051" y="7669"/>
+                        <a:pt x="5370" y="7843"/>
+                        <a:pt x="4257" y="7843"/>
+                      </a:cubicBezTo>
+                      <a:cubicBezTo>
+                        <a:pt x="4257" y="7843"/>
+                        <a:pt x="4257" y="7843"/>
+                        <a:pt x="1390" y="7843"/>
+                      </a:cubicBezTo>
+                      <a:cubicBezTo>
+                        <a:pt x="1304" y="7843"/>
+                        <a:pt x="1252" y="7827"/>
+                        <a:pt x="1217" y="7800"/>
+                      </a:cubicBezTo>
+                      <a:cubicBezTo>
+                        <a:pt x="1177" y="7776"/>
+                        <a:pt x="1154" y="7740"/>
+                        <a:pt x="1154" y="7681"/>
+                      </a:cubicBezTo>
+                      <a:cubicBezTo>
+                        <a:pt x="1154" y="7681"/>
+                        <a:pt x="1154" y="7681"/>
+                        <a:pt x="1154" y="162"/>
+                      </a:cubicBezTo>
+                      <a:cubicBezTo>
+                        <a:pt x="1154" y="103"/>
+                        <a:pt x="1177" y="67"/>
+                        <a:pt x="1217" y="44"/>
+                      </a:cubicBezTo>
+                      <a:cubicBezTo>
+                        <a:pt x="1252" y="16"/>
+                        <a:pt x="1304" y="0"/>
+                        <a:pt x="1390" y="0"/>
+                      </a:cubicBezTo>
+                      <a:close/>
+                      <a:moveTo>
+                        <a:pt x="14706" y="0"/>
+                      </a:moveTo>
+                      <a:cubicBezTo>
+                        <a:pt x="14706" y="0"/>
+                        <a:pt x="14706" y="0"/>
+                        <a:pt x="16045" y="0"/>
+                      </a:cubicBezTo>
+                      <a:cubicBezTo>
+                        <a:pt x="16131" y="0"/>
+                        <a:pt x="16183" y="16"/>
+                        <a:pt x="16224" y="44"/>
+                      </a:cubicBezTo>
+                      <a:cubicBezTo>
+                        <a:pt x="16264" y="67"/>
+                        <a:pt x="16287" y="103"/>
+                        <a:pt x="16287" y="162"/>
+                      </a:cubicBezTo>
+                      <a:cubicBezTo>
+                        <a:pt x="16287" y="162"/>
+                        <a:pt x="16287" y="162"/>
+                        <a:pt x="16287" y="5712"/>
+                      </a:cubicBezTo>
+                      <a:cubicBezTo>
+                        <a:pt x="16287" y="6314"/>
+                        <a:pt x="16368" y="6646"/>
+                        <a:pt x="16627" y="6844"/>
+                      </a:cubicBezTo>
+                      <a:cubicBezTo>
+                        <a:pt x="16818" y="6990"/>
+                        <a:pt x="17072" y="7053"/>
+                        <a:pt x="17406" y="7053"/>
+                      </a:cubicBezTo>
+                      <a:cubicBezTo>
+                        <a:pt x="17776" y="7053"/>
+                        <a:pt x="18041" y="6982"/>
+                        <a:pt x="18226" y="6844"/>
+                      </a:cubicBezTo>
+                      <a:cubicBezTo>
+                        <a:pt x="18503" y="6638"/>
+                        <a:pt x="18566" y="6294"/>
+                        <a:pt x="18566" y="5712"/>
+                      </a:cubicBezTo>
+                      <a:cubicBezTo>
+                        <a:pt x="18566" y="5712"/>
+                        <a:pt x="18566" y="5712"/>
+                        <a:pt x="18566" y="162"/>
+                      </a:cubicBezTo>
+                      <a:cubicBezTo>
+                        <a:pt x="18566" y="103"/>
+                        <a:pt x="18589" y="67"/>
+                        <a:pt x="18630" y="44"/>
+                      </a:cubicBezTo>
+                      <a:cubicBezTo>
+                        <a:pt x="18664" y="16"/>
+                        <a:pt x="18722" y="0"/>
+                        <a:pt x="18803" y="0"/>
+                      </a:cubicBezTo>
+                      <a:cubicBezTo>
+                        <a:pt x="18803" y="0"/>
+                        <a:pt x="18803" y="0"/>
+                        <a:pt x="20147" y="0"/>
+                      </a:cubicBezTo>
+                      <a:cubicBezTo>
+                        <a:pt x="20234" y="0"/>
+                        <a:pt x="20286" y="16"/>
+                        <a:pt x="20320" y="44"/>
+                      </a:cubicBezTo>
+                      <a:cubicBezTo>
+                        <a:pt x="20361" y="67"/>
+                        <a:pt x="20384" y="103"/>
+                        <a:pt x="20384" y="162"/>
+                      </a:cubicBezTo>
+                      <a:cubicBezTo>
+                        <a:pt x="20384" y="162"/>
+                        <a:pt x="20384" y="162"/>
+                        <a:pt x="20384" y="5716"/>
+                      </a:cubicBezTo>
+                      <a:cubicBezTo>
+                        <a:pt x="20384" y="6464"/>
+                        <a:pt x="20257" y="6962"/>
+                        <a:pt x="19732" y="7382"/>
+                      </a:cubicBezTo>
+                      <a:cubicBezTo>
+                        <a:pt x="19287" y="7738"/>
+                        <a:pt x="18560" y="7943"/>
+                        <a:pt x="17430" y="7943"/>
+                      </a:cubicBezTo>
+                      <a:cubicBezTo>
+                        <a:pt x="16316" y="7943"/>
+                        <a:pt x="15583" y="7750"/>
+                        <a:pt x="15093" y="7382"/>
+                      </a:cubicBezTo>
+                      <a:cubicBezTo>
+                        <a:pt x="14625" y="7030"/>
+                        <a:pt x="14469" y="6523"/>
+                        <a:pt x="14469" y="5716"/>
+                      </a:cubicBezTo>
+                      <a:cubicBezTo>
+                        <a:pt x="14469" y="5716"/>
+                        <a:pt x="14469" y="5716"/>
+                        <a:pt x="14469" y="162"/>
+                      </a:cubicBezTo>
+                      <a:cubicBezTo>
+                        <a:pt x="14469" y="103"/>
+                        <a:pt x="14493" y="67"/>
+                        <a:pt x="14527" y="44"/>
+                      </a:cubicBezTo>
+                      <a:cubicBezTo>
+                        <a:pt x="14568" y="16"/>
+                        <a:pt x="14620" y="0"/>
+                        <a:pt x="14706" y="0"/>
+                      </a:cubicBezTo>
+                      <a:close/>
+                    </a:path>
+                  </a:pathLst>
+                </a:custGeom>
+                <a:solidFill>
+                  <a:schemeClr val="accent1"/>
+                </a:solidFill>
+                <a:ln w="12700" cap="flat">
+                  <a:noFill/>
+                  <a:miter lim="400000"/>
+                </a:ln>
+                <a:effectLst/>
+              </p:spPr>
+              <p:txBody>
+                <a:bodyPr wrap="square" lIns="46799" tIns="46799" rIns="46799" bIns="46799" numCol="1" anchor="t">
+                  <a:noAutofit/>
+                </a:bodyPr>
+                <a:lstStyle/>
+                <a:p>
+                  <a:pPr>
+                    <a:defRPr>
+                      <a:latin typeface="Verdana"/>
+                      <a:ea typeface="Verdana"/>
+                      <a:cs typeface="Verdana"/>
+                      <a:sym typeface="Verdana"/>
+                    </a:defRPr>
+                  </a:pPr>
+                </a:p>
+              </p:txBody>
+            </p:sp>
+            <p:pic>
+              <p:nvPicPr>
+                <p:cNvPr id="81" name="logoill.pdf" descr="logoill.pdf"/>
+                <p:cNvPicPr>
+                  <a:picLocks noChangeAspect="0"/>
+                </p:cNvPicPr>
+                <p:nvPr/>
+              </p:nvPicPr>
+              <p:blipFill>
+                <a:blip r:embed="rId4">
+                  <a:extLst/>
+                </a:blip>
+                <a:stretch>
+                  <a:fillRect/>
+                </a:stretch>
+              </p:blipFill>
+              <p:spPr>
+                <a:xfrm>
+                  <a:off x="486613" y="459579"/>
+                  <a:ext cx="164286" cy="157037"/>
+                </a:xfrm>
+                <a:prstGeom prst="rect">
+                  <a:avLst/>
+                </a:prstGeom>
+                <a:ln w="12700" cap="flat">
+                  <a:noFill/>
+                  <a:miter lim="400000"/>
+                </a:ln>
+                <a:effectLst/>
+              </p:spPr>
+            </p:pic>
+            <p:pic>
+              <p:nvPicPr>
+                <p:cNvPr id="82" name="mcstas-logo.pdf" descr="mcstas-logo.pdf"/>
+                <p:cNvPicPr>
+                  <a:picLocks noChangeAspect="0"/>
+                </p:cNvPicPr>
+                <p:nvPr/>
+              </p:nvPicPr>
+              <p:blipFill>
+                <a:blip r:embed="rId5">
+                  <a:extLst/>
+                </a:blip>
+                <a:srcRect l="0" t="0" r="0" b="0"/>
+                <a:stretch>
+                  <a:fillRect/>
+                </a:stretch>
+              </p:blipFill>
+              <p:spPr>
+                <a:xfrm>
+                  <a:off x="0" y="0"/>
+                  <a:ext cx="725762" cy="426459"/>
+                </a:xfrm>
+                <a:prstGeom prst="rect">
+                  <a:avLst/>
+                </a:prstGeom>
+                <a:ln w="12700" cap="flat">
+                  <a:noFill/>
+                  <a:miter lim="400000"/>
+                </a:ln>
+                <a:effectLst/>
+              </p:spPr>
+            </p:pic>
+            <p:pic>
+              <p:nvPicPr>
+                <p:cNvPr id="83" name="PSI-Logo_trans.png" descr="PSI-Logo_trans.png"/>
+                <p:cNvPicPr>
+                  <a:picLocks noChangeAspect="0"/>
+                </p:cNvPicPr>
+                <p:nvPr/>
+              </p:nvPicPr>
+              <p:blipFill>
+                <a:blip r:embed="rId6">
+                  <a:extLst/>
+                </a:blip>
+                <a:stretch>
+                  <a:fillRect/>
+                </a:stretch>
+              </p:blipFill>
+              <p:spPr>
+                <a:xfrm>
+                  <a:off x="270340" y="501170"/>
+                  <a:ext cx="204490" cy="74865"/>
+                </a:xfrm>
+                <a:prstGeom prst="rect">
+                  <a:avLst/>
+                </a:prstGeom>
+                <a:ln w="12700" cap="flat">
+                  <a:noFill/>
+                  <a:miter lim="400000"/>
+                </a:ln>
+                <a:effectLst/>
+              </p:spPr>
+            </p:pic>
+            <p:pic>
+              <p:nvPicPr>
+                <p:cNvPr id="84" name="ku-logo.pdf" descr="ku-logo.pdf"/>
+                <p:cNvPicPr>
+                  <a:picLocks noChangeAspect="0"/>
+                </p:cNvPicPr>
+                <p:nvPr/>
+              </p:nvPicPr>
+              <p:blipFill>
+                <a:blip r:embed="rId7">
+                  <a:extLst/>
+                </a:blip>
+                <a:stretch>
+                  <a:fillRect/>
+                </a:stretch>
+              </p:blipFill>
+              <p:spPr>
+                <a:xfrm>
+                  <a:off x="131011" y="451261"/>
+                  <a:ext cx="128373" cy="174419"/>
+                </a:xfrm>
+                <a:prstGeom prst="rect">
+                  <a:avLst/>
+                </a:prstGeom>
+                <a:ln w="12700" cap="flat">
+                  <a:noFill/>
+                  <a:miter lim="400000"/>
+                </a:ln>
+                <a:effectLst/>
+              </p:spPr>
+            </p:pic>
+            <p:pic>
+              <p:nvPicPr>
+                <p:cNvPr id="85" name="ESS_Logo_Frugal_Blue_cmyk.png" descr="ESS_Logo_Frugal_Blue_cmyk.png"/>
+                <p:cNvPicPr>
+                  <a:picLocks noChangeAspect="0"/>
+                </p:cNvPicPr>
+                <p:nvPr/>
+              </p:nvPicPr>
+              <p:blipFill>
+                <a:blip r:embed="rId8">
+                  <a:extLst/>
+                </a:blip>
+                <a:stretch>
+                  <a:fillRect/>
+                </a:stretch>
+              </p:blipFill>
+              <p:spPr>
+                <a:xfrm>
+                  <a:off x="214914" y="607364"/>
+                  <a:ext cx="279297" cy="150286"/>
+                </a:xfrm>
+                <a:prstGeom prst="rect">
+                  <a:avLst/>
+                </a:prstGeom>
+                <a:ln w="12700" cap="flat">
+                  <a:noFill/>
+                  <a:miter lim="400000"/>
+                </a:ln>
+                <a:effectLst/>
+              </p:spPr>
+            </p:pic>
+          </p:grpSp>
+        </p:grpSp>
+        <p:pic>
+          <p:nvPicPr>
+            <p:cNvPr id="88" name="Image" descr="Image"/>
+            <p:cNvPicPr>
+              <a:picLocks noChangeAspect="1"/>
+            </p:cNvPicPr>
+            <p:nvPr/>
+          </p:nvPicPr>
+          <p:blipFill>
+            <a:blip r:embed="rId9">
+              <a:extLst/>
+            </a:blip>
+            <a:srcRect l="0" t="0" r="77004" b="0"/>
+            <a:stretch>
+              <a:fillRect/>
+            </a:stretch>
+          </p:blipFill>
+          <p:spPr>
+            <a:xfrm>
+              <a:off x="44293" y="62025"/>
+              <a:ext cx="617630" cy="611845"/>
+            </a:xfrm>
+            <a:prstGeom prst="rect">
+              <a:avLst/>
+            </a:prstGeom>
+            <a:ln w="12700" cap="flat">
+              <a:noFill/>
+              <a:miter lim="400000"/>
+            </a:ln>
+            <a:effectLst/>
+          </p:spPr>
+        </p:pic>
+      </p:grpSp>
       <p:sp>
         <p:nvSpPr>
-          <p:cNvPr id="77" name="UserProfile.Offices.Workarea_{{DocumentLanguage}}text"/>
+          <p:cNvPr id="90" name="UserProfile.Offices.Workarea_{{DocumentLanguage}}text"/>
           <p:cNvSpPr txBox="1"/>
           <p:nvPr/>
         </p:nvSpPr>
@@ -5025,851 +6725,11 @@
           <a:p>
             <a:pPr/>
             <a:r>
-              <a:t>2021 ISIS McStas school</a:t>
+              <a:t>2025 ISIS McStas school</a:t>
             </a:r>
           </a:p>
         </p:txBody>
       </p:sp>
-      <p:grpSp>
-        <p:nvGrpSpPr>
-          <p:cNvPr id="90" name="Group"/>
-          <p:cNvGrpSpPr/>
-          <p:nvPr/>
-        </p:nvGrpSpPr>
-        <p:grpSpPr>
-          <a:xfrm>
-            <a:off x="17068" y="935881"/>
-            <a:ext cx="1506786" cy="5584238"/>
-            <a:chOff x="0" y="0"/>
-            <a:chExt cx="1506784" cy="5584236"/>
-          </a:xfrm>
-        </p:grpSpPr>
-        <p:pic>
-          <p:nvPicPr>
-            <p:cNvPr id="78" name="Image" descr="Image"/>
-            <p:cNvPicPr>
-              <a:picLocks noChangeAspect="1"/>
-            </p:cNvPicPr>
-            <p:nvPr/>
-          </p:nvPicPr>
-          <p:blipFill>
-            <a:blip r:embed="rId3">
-              <a:extLst/>
-            </a:blip>
-            <a:srcRect l="0" t="0" r="0" b="0"/>
-            <a:stretch>
-              <a:fillRect/>
-            </a:stretch>
-          </p:blipFill>
-          <p:spPr>
-            <a:xfrm>
-              <a:off x="0" y="0"/>
-              <a:ext cx="1506785" cy="5584237"/>
-            </a:xfrm>
-            <a:prstGeom prst="rect">
-              <a:avLst/>
-            </a:prstGeom>
-            <a:ln w="12700" cap="flat">
-              <a:noFill/>
-              <a:miter lim="400000"/>
-            </a:ln>
-            <a:effectLst/>
-          </p:spPr>
-        </p:pic>
-        <p:sp>
-          <p:nvSpPr>
-            <p:cNvPr id="79" name="Rectangle"/>
-            <p:cNvSpPr/>
-            <p:nvPr/>
-          </p:nvSpPr>
-          <p:spPr>
-            <a:xfrm>
-              <a:off x="26491" y="29555"/>
-              <a:ext cx="1453952" cy="791704"/>
-            </a:xfrm>
-            <a:prstGeom prst="rect">
-              <a:avLst/>
-            </a:prstGeom>
-            <a:solidFill>
-              <a:srgbClr val="FFFFFF"/>
-            </a:solidFill>
-            <a:ln w="12700" cap="flat">
-              <a:noFill/>
-              <a:miter lim="400000"/>
-            </a:ln>
-            <a:effectLst/>
-          </p:spPr>
-          <p:txBody>
-            <a:bodyPr wrap="square" lIns="46799" tIns="46799" rIns="46799" bIns="46799" numCol="1" anchor="ctr">
-              <a:noAutofit/>
-            </a:bodyPr>
-            <a:lstStyle/>
-            <a:p>
-              <a:pPr/>
-            </a:p>
-          </p:txBody>
-        </p:sp>
-        <p:grpSp>
-          <p:nvGrpSpPr>
-            <p:cNvPr id="88" name="Group"/>
-            <p:cNvGrpSpPr/>
-            <p:nvPr/>
-          </p:nvGrpSpPr>
-          <p:grpSpPr>
-            <a:xfrm>
-              <a:off x="161144" y="50051"/>
-              <a:ext cx="1271028" cy="5510910"/>
-              <a:chOff x="0" y="0"/>
-              <a:chExt cx="1271027" cy="5510908"/>
-            </a:xfrm>
-          </p:grpSpPr>
-          <p:sp>
-            <p:nvSpPr>
-              <p:cNvPr id="80" name="2021 Virtual ISIS McStas School"/>
-              <p:cNvSpPr txBox="1"/>
-              <p:nvPr/>
-            </p:nvSpPr>
-            <p:spPr>
-              <a:xfrm>
-                <a:off x="0" y="4478221"/>
-                <a:ext cx="1184497" cy="1032688"/>
-              </a:xfrm>
-              <a:prstGeom prst="rect">
-                <a:avLst/>
-              </a:prstGeom>
-              <a:noFill/>
-              <a:ln w="12700" cap="flat">
-                <a:noFill/>
-                <a:miter lim="400000"/>
-              </a:ln>
-              <a:effectLst/>
-              <a:extLst>
-                <a:ext uri="{C572A759-6A51-4108-AA02-DFA0A04FC94B}">
-                  <ma14:wrappingTextBoxFlag xmlns:ma14="http://schemas.microsoft.com/office/mac/drawingml/2011/main" val="1"/>
-                </a:ext>
-              </a:extLst>
-            </p:spPr>
-            <p:txBody>
-              <a:bodyPr wrap="square" lIns="0" tIns="0" rIns="0" bIns="0" numCol="1" anchor="b">
-                <a:normAutofit fontScale="100000" lnSpcReduction="0"/>
-              </a:bodyPr>
-              <a:lstStyle/>
-              <a:p>
-                <a:pPr algn="ctr" defTabSz="393192">
-                  <a:lnSpc>
-                    <a:spcPct val="110000"/>
-                  </a:lnSpc>
-                  <a:spcBef>
-                    <a:spcPts val="0"/>
-                  </a:spcBef>
-                  <a:defRPr b="1" i="1" sz="1591">
-                    <a:solidFill>
-                      <a:srgbClr val="FFFFFF"/>
-                    </a:solidFill>
-                  </a:defRPr>
-                </a:pPr>
-                <a:r>
-                  <a:t>2021 Virtual ISIS</a:t>
-                </a:r>
-                <a:br/>
-                <a:r>
-                  <a:t>McStas School</a:t>
-                </a:r>
-              </a:p>
-            </p:txBody>
-          </p:sp>
-          <p:grpSp>
-            <p:nvGrpSpPr>
-              <p:cNvPr id="87" name="Group"/>
-              <p:cNvGrpSpPr/>
-              <p:nvPr/>
-            </p:nvGrpSpPr>
-            <p:grpSpPr>
-              <a:xfrm>
-                <a:off x="545266" y="-1"/>
-                <a:ext cx="725762" cy="757651"/>
-                <a:chOff x="0" y="0"/>
-                <a:chExt cx="725761" cy="757649"/>
-              </a:xfrm>
-            </p:grpSpPr>
-            <p:sp>
-              <p:nvSpPr>
-                <p:cNvPr id="81" name="Logo color"/>
-                <p:cNvSpPr/>
-                <p:nvPr/>
-              </p:nvSpPr>
-              <p:spPr>
-                <a:xfrm>
-                  <a:off x="2507" y="452770"/>
-                  <a:ext cx="117009" cy="170656"/>
-                </a:xfrm>
-                <a:custGeom>
-                  <a:avLst/>
-                  <a:gdLst/>
-                  <a:ahLst/>
-                  <a:cxnLst>
-                    <a:cxn ang="0">
-                      <a:pos x="wd2" y="hd2"/>
-                    </a:cxn>
-                    <a:cxn ang="5400000">
-                      <a:pos x="wd2" y="hd2"/>
-                    </a:cxn>
-                    <a:cxn ang="10800000">
-                      <a:pos x="wd2" y="hd2"/>
-                    </a:cxn>
-                    <a:cxn ang="16200000">
-                      <a:pos x="wd2" y="hd2"/>
-                    </a:cxn>
-                  </a:cxnLst>
-                  <a:rect l="0" t="0" r="r" b="b"/>
-                  <a:pathLst>
-                    <a:path w="21600" h="21600" fill="norm" stroke="1" extrusionOk="0">
-                      <a:moveTo>
-                        <a:pt x="4597" y="18293"/>
-                      </a:moveTo>
-                      <a:cubicBezTo>
-                        <a:pt x="10549" y="19881"/>
-                        <a:pt x="11051" y="19881"/>
-                        <a:pt x="17003" y="18293"/>
-                      </a:cubicBezTo>
-                      <a:cubicBezTo>
-                        <a:pt x="17003" y="18293"/>
-                        <a:pt x="17003" y="18293"/>
-                        <a:pt x="21600" y="19949"/>
-                      </a:cubicBezTo>
-                      <a:cubicBezTo>
-                        <a:pt x="21600" y="19949"/>
-                        <a:pt x="21600" y="19949"/>
-                        <a:pt x="17003" y="21600"/>
-                      </a:cubicBezTo>
-                      <a:cubicBezTo>
-                        <a:pt x="11051" y="20016"/>
-                        <a:pt x="10549" y="20016"/>
-                        <a:pt x="4597" y="21600"/>
-                      </a:cubicBezTo>
-                      <a:cubicBezTo>
-                        <a:pt x="4597" y="21600"/>
-                        <a:pt x="4597" y="21600"/>
-                        <a:pt x="0" y="19949"/>
-                      </a:cubicBezTo>
-                      <a:cubicBezTo>
-                        <a:pt x="0" y="19949"/>
-                        <a:pt x="0" y="19949"/>
-                        <a:pt x="4597" y="18293"/>
-                      </a:cubicBezTo>
-                      <a:close/>
-                      <a:moveTo>
-                        <a:pt x="4597" y="14200"/>
-                      </a:moveTo>
-                      <a:cubicBezTo>
-                        <a:pt x="10549" y="15790"/>
-                        <a:pt x="11051" y="15790"/>
-                        <a:pt x="17003" y="14200"/>
-                      </a:cubicBezTo>
-                      <a:cubicBezTo>
-                        <a:pt x="17003" y="14200"/>
-                        <a:pt x="17003" y="14200"/>
-                        <a:pt x="21600" y="15858"/>
-                      </a:cubicBezTo>
-                      <a:cubicBezTo>
-                        <a:pt x="21600" y="15858"/>
-                        <a:pt x="21600" y="15858"/>
-                        <a:pt x="17003" y="17512"/>
-                      </a:cubicBezTo>
-                      <a:cubicBezTo>
-                        <a:pt x="11051" y="15925"/>
-                        <a:pt x="10549" y="15925"/>
-                        <a:pt x="4597" y="17512"/>
-                      </a:cubicBezTo>
-                      <a:cubicBezTo>
-                        <a:pt x="4597" y="17512"/>
-                        <a:pt x="4597" y="17512"/>
-                        <a:pt x="0" y="15858"/>
-                      </a:cubicBezTo>
-                      <a:cubicBezTo>
-                        <a:pt x="0" y="15858"/>
-                        <a:pt x="0" y="15858"/>
-                        <a:pt x="4597" y="14200"/>
-                      </a:cubicBezTo>
-                      <a:close/>
-                      <a:moveTo>
-                        <a:pt x="4597" y="10111"/>
-                      </a:moveTo>
-                      <a:cubicBezTo>
-                        <a:pt x="10549" y="11702"/>
-                        <a:pt x="11051" y="11702"/>
-                        <a:pt x="17003" y="10111"/>
-                      </a:cubicBezTo>
-                      <a:cubicBezTo>
-                        <a:pt x="17003" y="10111"/>
-                        <a:pt x="17003" y="10111"/>
-                        <a:pt x="21600" y="11769"/>
-                      </a:cubicBezTo>
-                      <a:cubicBezTo>
-                        <a:pt x="21600" y="11769"/>
-                        <a:pt x="21600" y="11769"/>
-                        <a:pt x="17003" y="13423"/>
-                      </a:cubicBezTo>
-                      <a:cubicBezTo>
-                        <a:pt x="11051" y="11837"/>
-                        <a:pt x="10549" y="11837"/>
-                        <a:pt x="4597" y="13423"/>
-                      </a:cubicBezTo>
-                      <a:cubicBezTo>
-                        <a:pt x="4597" y="13423"/>
-                        <a:pt x="4597" y="13423"/>
-                        <a:pt x="0" y="11769"/>
-                      </a:cubicBezTo>
-                      <a:cubicBezTo>
-                        <a:pt x="0" y="11769"/>
-                        <a:pt x="0" y="11769"/>
-                        <a:pt x="4597" y="10111"/>
-                      </a:cubicBezTo>
-                      <a:close/>
-                      <a:moveTo>
-                        <a:pt x="2971" y="918"/>
-                      </a:moveTo>
-                      <a:lnTo>
-                        <a:pt x="2971" y="6926"/>
-                      </a:lnTo>
-                      <a:cubicBezTo>
-                        <a:pt x="2971" y="6926"/>
-                        <a:pt x="2971" y="6926"/>
-                        <a:pt x="3980" y="6926"/>
-                      </a:cubicBezTo>
-                      <a:cubicBezTo>
-                        <a:pt x="4430" y="6926"/>
-                        <a:pt x="4695" y="6878"/>
-                        <a:pt x="4903" y="6708"/>
-                      </a:cubicBezTo>
-                      <a:cubicBezTo>
-                        <a:pt x="5220" y="6447"/>
-                        <a:pt x="5249" y="5917"/>
-                        <a:pt x="5249" y="4849"/>
-                      </a:cubicBezTo>
-                      <a:cubicBezTo>
-                        <a:pt x="5249" y="4849"/>
-                        <a:pt x="5249" y="4849"/>
-                        <a:pt x="5249" y="2990"/>
-                      </a:cubicBezTo>
-                      <a:cubicBezTo>
-                        <a:pt x="5249" y="1926"/>
-                        <a:pt x="5220" y="1396"/>
-                        <a:pt x="4903" y="1135"/>
-                      </a:cubicBezTo>
-                      <a:cubicBezTo>
-                        <a:pt x="4695" y="965"/>
-                        <a:pt x="4430" y="918"/>
-                        <a:pt x="3980" y="918"/>
-                      </a:cubicBezTo>
-                      <a:cubicBezTo>
-                        <a:pt x="3980" y="918"/>
-                        <a:pt x="3980" y="918"/>
-                        <a:pt x="2971" y="918"/>
-                      </a:cubicBezTo>
-                      <a:close/>
-                      <a:moveTo>
-                        <a:pt x="8068" y="0"/>
-                      </a:moveTo>
-                      <a:cubicBezTo>
-                        <a:pt x="8068" y="0"/>
-                        <a:pt x="8068" y="0"/>
-                        <a:pt x="13456" y="0"/>
-                      </a:cubicBezTo>
-                      <a:cubicBezTo>
-                        <a:pt x="13542" y="0"/>
-                        <a:pt x="13594" y="16"/>
-                        <a:pt x="13635" y="44"/>
-                      </a:cubicBezTo>
-                      <a:cubicBezTo>
-                        <a:pt x="13669" y="67"/>
-                        <a:pt x="13698" y="103"/>
-                        <a:pt x="13698" y="162"/>
-                      </a:cubicBezTo>
-                      <a:cubicBezTo>
-                        <a:pt x="13698" y="162"/>
-                        <a:pt x="13698" y="162"/>
-                        <a:pt x="13698" y="827"/>
-                      </a:cubicBezTo>
-                      <a:cubicBezTo>
-                        <a:pt x="13698" y="886"/>
-                        <a:pt x="13669" y="922"/>
-                        <a:pt x="13635" y="945"/>
-                      </a:cubicBezTo>
-                      <a:cubicBezTo>
-                        <a:pt x="13594" y="973"/>
-                        <a:pt x="13542" y="989"/>
-                        <a:pt x="13456" y="989"/>
-                      </a:cubicBezTo>
-                      <a:cubicBezTo>
-                        <a:pt x="13456" y="989"/>
-                        <a:pt x="13456" y="989"/>
-                        <a:pt x="11731" y="989"/>
-                      </a:cubicBezTo>
-                      <a:cubicBezTo>
-                        <a:pt x="11731" y="989"/>
-                        <a:pt x="11731" y="989"/>
-                        <a:pt x="11731" y="7681"/>
-                      </a:cubicBezTo>
-                      <a:cubicBezTo>
-                        <a:pt x="11731" y="7740"/>
-                        <a:pt x="11708" y="7776"/>
-                        <a:pt x="11667" y="7800"/>
-                      </a:cubicBezTo>
-                      <a:cubicBezTo>
-                        <a:pt x="11633" y="7827"/>
-                        <a:pt x="11581" y="7843"/>
-                        <a:pt x="11494" y="7843"/>
-                      </a:cubicBezTo>
-                      <a:cubicBezTo>
-                        <a:pt x="11494" y="7843"/>
-                        <a:pt x="11494" y="7843"/>
-                        <a:pt x="10029" y="7843"/>
-                      </a:cubicBezTo>
-                      <a:cubicBezTo>
-                        <a:pt x="9943" y="7843"/>
-                        <a:pt x="9891" y="7827"/>
-                        <a:pt x="9850" y="7800"/>
-                      </a:cubicBezTo>
-                      <a:cubicBezTo>
-                        <a:pt x="9810" y="7776"/>
-                        <a:pt x="9787" y="7740"/>
-                        <a:pt x="9787" y="7681"/>
-                      </a:cubicBezTo>
-                      <a:cubicBezTo>
-                        <a:pt x="9787" y="7681"/>
-                        <a:pt x="9787" y="7681"/>
-                        <a:pt x="9787" y="989"/>
-                      </a:cubicBezTo>
-                      <a:cubicBezTo>
-                        <a:pt x="9787" y="989"/>
-                        <a:pt x="9787" y="989"/>
-                        <a:pt x="8068" y="989"/>
-                      </a:cubicBezTo>
-                      <a:cubicBezTo>
-                        <a:pt x="7981" y="989"/>
-                        <a:pt x="7929" y="973"/>
-                        <a:pt x="7889" y="945"/>
-                      </a:cubicBezTo>
-                      <a:cubicBezTo>
-                        <a:pt x="7849" y="922"/>
-                        <a:pt x="7825" y="886"/>
-                        <a:pt x="7825" y="827"/>
-                      </a:cubicBezTo>
-                      <a:cubicBezTo>
-                        <a:pt x="7825" y="827"/>
-                        <a:pt x="7825" y="827"/>
-                        <a:pt x="7825" y="162"/>
-                      </a:cubicBezTo>
-                      <a:cubicBezTo>
-                        <a:pt x="7825" y="103"/>
-                        <a:pt x="7849" y="67"/>
-                        <a:pt x="7889" y="44"/>
-                      </a:cubicBezTo>
-                      <a:cubicBezTo>
-                        <a:pt x="7929" y="16"/>
-                        <a:pt x="7981" y="0"/>
-                        <a:pt x="8068" y="0"/>
-                      </a:cubicBezTo>
-                      <a:close/>
-                      <a:moveTo>
-                        <a:pt x="1390" y="0"/>
-                      </a:moveTo>
-                      <a:cubicBezTo>
-                        <a:pt x="1390" y="0"/>
-                        <a:pt x="1390" y="0"/>
-                        <a:pt x="4257" y="0"/>
-                      </a:cubicBezTo>
-                      <a:cubicBezTo>
-                        <a:pt x="5370" y="0"/>
-                        <a:pt x="6051" y="174"/>
-                        <a:pt x="6466" y="538"/>
-                      </a:cubicBezTo>
-                      <a:cubicBezTo>
-                        <a:pt x="7072" y="1036"/>
-                        <a:pt x="7089" y="1843"/>
-                        <a:pt x="7089" y="3077"/>
-                      </a:cubicBezTo>
-                      <a:cubicBezTo>
-                        <a:pt x="7089" y="3077"/>
-                        <a:pt x="7089" y="3077"/>
-                        <a:pt x="7089" y="4766"/>
-                      </a:cubicBezTo>
-                      <a:cubicBezTo>
-                        <a:pt x="7089" y="6000"/>
-                        <a:pt x="7072" y="6807"/>
-                        <a:pt x="6466" y="7305"/>
-                      </a:cubicBezTo>
-                      <a:cubicBezTo>
-                        <a:pt x="6051" y="7669"/>
-                        <a:pt x="5370" y="7843"/>
-                        <a:pt x="4257" y="7843"/>
-                      </a:cubicBezTo>
-                      <a:cubicBezTo>
-                        <a:pt x="4257" y="7843"/>
-                        <a:pt x="4257" y="7843"/>
-                        <a:pt x="1390" y="7843"/>
-                      </a:cubicBezTo>
-                      <a:cubicBezTo>
-                        <a:pt x="1304" y="7843"/>
-                        <a:pt x="1252" y="7827"/>
-                        <a:pt x="1217" y="7800"/>
-                      </a:cubicBezTo>
-                      <a:cubicBezTo>
-                        <a:pt x="1177" y="7776"/>
-                        <a:pt x="1154" y="7740"/>
-                        <a:pt x="1154" y="7681"/>
-                      </a:cubicBezTo>
-                      <a:cubicBezTo>
-                        <a:pt x="1154" y="7681"/>
-                        <a:pt x="1154" y="7681"/>
-                        <a:pt x="1154" y="162"/>
-                      </a:cubicBezTo>
-                      <a:cubicBezTo>
-                        <a:pt x="1154" y="103"/>
-                        <a:pt x="1177" y="67"/>
-                        <a:pt x="1217" y="44"/>
-                      </a:cubicBezTo>
-                      <a:cubicBezTo>
-                        <a:pt x="1252" y="16"/>
-                        <a:pt x="1304" y="0"/>
-                        <a:pt x="1390" y="0"/>
-                      </a:cubicBezTo>
-                      <a:close/>
-                      <a:moveTo>
-                        <a:pt x="14706" y="0"/>
-                      </a:moveTo>
-                      <a:cubicBezTo>
-                        <a:pt x="14706" y="0"/>
-                        <a:pt x="14706" y="0"/>
-                        <a:pt x="16045" y="0"/>
-                      </a:cubicBezTo>
-                      <a:cubicBezTo>
-                        <a:pt x="16131" y="0"/>
-                        <a:pt x="16183" y="16"/>
-                        <a:pt x="16224" y="44"/>
-                      </a:cubicBezTo>
-                      <a:cubicBezTo>
-                        <a:pt x="16264" y="67"/>
-                        <a:pt x="16287" y="103"/>
-                        <a:pt x="16287" y="162"/>
-                      </a:cubicBezTo>
-                      <a:cubicBezTo>
-                        <a:pt x="16287" y="162"/>
-                        <a:pt x="16287" y="162"/>
-                        <a:pt x="16287" y="5712"/>
-                      </a:cubicBezTo>
-                      <a:cubicBezTo>
-                        <a:pt x="16287" y="6314"/>
-                        <a:pt x="16368" y="6646"/>
-                        <a:pt x="16627" y="6844"/>
-                      </a:cubicBezTo>
-                      <a:cubicBezTo>
-                        <a:pt x="16818" y="6990"/>
-                        <a:pt x="17072" y="7053"/>
-                        <a:pt x="17406" y="7053"/>
-                      </a:cubicBezTo>
-                      <a:cubicBezTo>
-                        <a:pt x="17776" y="7053"/>
-                        <a:pt x="18041" y="6982"/>
-                        <a:pt x="18226" y="6844"/>
-                      </a:cubicBezTo>
-                      <a:cubicBezTo>
-                        <a:pt x="18503" y="6638"/>
-                        <a:pt x="18566" y="6294"/>
-                        <a:pt x="18566" y="5712"/>
-                      </a:cubicBezTo>
-                      <a:cubicBezTo>
-                        <a:pt x="18566" y="5712"/>
-                        <a:pt x="18566" y="5712"/>
-                        <a:pt x="18566" y="162"/>
-                      </a:cubicBezTo>
-                      <a:cubicBezTo>
-                        <a:pt x="18566" y="103"/>
-                        <a:pt x="18589" y="67"/>
-                        <a:pt x="18630" y="44"/>
-                      </a:cubicBezTo>
-                      <a:cubicBezTo>
-                        <a:pt x="18664" y="16"/>
-                        <a:pt x="18722" y="0"/>
-                        <a:pt x="18803" y="0"/>
-                      </a:cubicBezTo>
-                      <a:cubicBezTo>
-                        <a:pt x="18803" y="0"/>
-                        <a:pt x="18803" y="0"/>
-                        <a:pt x="20147" y="0"/>
-                      </a:cubicBezTo>
-                      <a:cubicBezTo>
-                        <a:pt x="20234" y="0"/>
-                        <a:pt x="20286" y="16"/>
-                        <a:pt x="20320" y="44"/>
-                      </a:cubicBezTo>
-                      <a:cubicBezTo>
-                        <a:pt x="20361" y="67"/>
-                        <a:pt x="20384" y="103"/>
-                        <a:pt x="20384" y="162"/>
-                      </a:cubicBezTo>
-                      <a:cubicBezTo>
-                        <a:pt x="20384" y="162"/>
-                        <a:pt x="20384" y="162"/>
-                        <a:pt x="20384" y="5716"/>
-                      </a:cubicBezTo>
-                      <a:cubicBezTo>
-                        <a:pt x="20384" y="6464"/>
-                        <a:pt x="20257" y="6962"/>
-                        <a:pt x="19732" y="7382"/>
-                      </a:cubicBezTo>
-                      <a:cubicBezTo>
-                        <a:pt x="19287" y="7738"/>
-                        <a:pt x="18560" y="7943"/>
-                        <a:pt x="17430" y="7943"/>
-                      </a:cubicBezTo>
-                      <a:cubicBezTo>
-                        <a:pt x="16316" y="7943"/>
-                        <a:pt x="15583" y="7750"/>
-                        <a:pt x="15093" y="7382"/>
-                      </a:cubicBezTo>
-                      <a:cubicBezTo>
-                        <a:pt x="14625" y="7030"/>
-                        <a:pt x="14469" y="6523"/>
-                        <a:pt x="14469" y="5716"/>
-                      </a:cubicBezTo>
-                      <a:cubicBezTo>
-                        <a:pt x="14469" y="5716"/>
-                        <a:pt x="14469" y="5716"/>
-                        <a:pt x="14469" y="162"/>
-                      </a:cubicBezTo>
-                      <a:cubicBezTo>
-                        <a:pt x="14469" y="103"/>
-                        <a:pt x="14493" y="67"/>
-                        <a:pt x="14527" y="44"/>
-                      </a:cubicBezTo>
-                      <a:cubicBezTo>
-                        <a:pt x="14568" y="16"/>
-                        <a:pt x="14620" y="0"/>
-                        <a:pt x="14706" y="0"/>
-                      </a:cubicBezTo>
-                      <a:close/>
-                    </a:path>
-                  </a:pathLst>
-                </a:custGeom>
-                <a:solidFill>
-                  <a:schemeClr val="accent1"/>
-                </a:solidFill>
-                <a:ln w="12700" cap="flat">
-                  <a:noFill/>
-                  <a:miter lim="400000"/>
-                </a:ln>
-                <a:effectLst/>
-              </p:spPr>
-              <p:txBody>
-                <a:bodyPr wrap="square" lIns="46799" tIns="46799" rIns="46799" bIns="46799" numCol="1" anchor="t">
-                  <a:noAutofit/>
-                </a:bodyPr>
-                <a:lstStyle/>
-                <a:p>
-                  <a:pPr>
-                    <a:defRPr>
-                      <a:latin typeface="Verdana"/>
-                      <a:ea typeface="Verdana"/>
-                      <a:cs typeface="Verdana"/>
-                      <a:sym typeface="Verdana"/>
-                    </a:defRPr>
-                  </a:pPr>
-                </a:p>
-              </p:txBody>
-            </p:sp>
-            <p:pic>
-              <p:nvPicPr>
-                <p:cNvPr id="82" name="logoill.pdf" descr="logoill.pdf"/>
-                <p:cNvPicPr>
-                  <a:picLocks noChangeAspect="0"/>
-                </p:cNvPicPr>
-                <p:nvPr/>
-              </p:nvPicPr>
-              <p:blipFill>
-                <a:blip r:embed="rId4">
-                  <a:extLst/>
-                </a:blip>
-                <a:stretch>
-                  <a:fillRect/>
-                </a:stretch>
-              </p:blipFill>
-              <p:spPr>
-                <a:xfrm>
-                  <a:off x="486613" y="459579"/>
-                  <a:ext cx="164286" cy="157037"/>
-                </a:xfrm>
-                <a:prstGeom prst="rect">
-                  <a:avLst/>
-                </a:prstGeom>
-                <a:ln w="12700" cap="flat">
-                  <a:noFill/>
-                  <a:miter lim="400000"/>
-                </a:ln>
-                <a:effectLst/>
-              </p:spPr>
-            </p:pic>
-            <p:pic>
-              <p:nvPicPr>
-                <p:cNvPr id="83" name="mcstas-logo.pdf" descr="mcstas-logo.pdf"/>
-                <p:cNvPicPr>
-                  <a:picLocks noChangeAspect="0"/>
-                </p:cNvPicPr>
-                <p:nvPr/>
-              </p:nvPicPr>
-              <p:blipFill>
-                <a:blip r:embed="rId5">
-                  <a:extLst/>
-                </a:blip>
-                <a:srcRect l="0" t="0" r="0" b="0"/>
-                <a:stretch>
-                  <a:fillRect/>
-                </a:stretch>
-              </p:blipFill>
-              <p:spPr>
-                <a:xfrm>
-                  <a:off x="0" y="0"/>
-                  <a:ext cx="725762" cy="426459"/>
-                </a:xfrm>
-                <a:prstGeom prst="rect">
-                  <a:avLst/>
-                </a:prstGeom>
-                <a:ln w="12700" cap="flat">
-                  <a:noFill/>
-                  <a:miter lim="400000"/>
-                </a:ln>
-                <a:effectLst/>
-              </p:spPr>
-            </p:pic>
-            <p:pic>
-              <p:nvPicPr>
-                <p:cNvPr id="84" name="PSI-Logo_trans.png" descr="PSI-Logo_trans.png"/>
-                <p:cNvPicPr>
-                  <a:picLocks noChangeAspect="0"/>
-                </p:cNvPicPr>
-                <p:nvPr/>
-              </p:nvPicPr>
-              <p:blipFill>
-                <a:blip r:embed="rId6">
-                  <a:extLst/>
-                </a:blip>
-                <a:stretch>
-                  <a:fillRect/>
-                </a:stretch>
-              </p:blipFill>
-              <p:spPr>
-                <a:xfrm>
-                  <a:off x="270340" y="501170"/>
-                  <a:ext cx="204490" cy="74865"/>
-                </a:xfrm>
-                <a:prstGeom prst="rect">
-                  <a:avLst/>
-                </a:prstGeom>
-                <a:ln w="12700" cap="flat">
-                  <a:noFill/>
-                  <a:miter lim="400000"/>
-                </a:ln>
-                <a:effectLst/>
-              </p:spPr>
-            </p:pic>
-            <p:pic>
-              <p:nvPicPr>
-                <p:cNvPr id="85" name="ku-logo.pdf" descr="ku-logo.pdf"/>
-                <p:cNvPicPr>
-                  <a:picLocks noChangeAspect="0"/>
-                </p:cNvPicPr>
-                <p:nvPr/>
-              </p:nvPicPr>
-              <p:blipFill>
-                <a:blip r:embed="rId7">
-                  <a:extLst/>
-                </a:blip>
-                <a:stretch>
-                  <a:fillRect/>
-                </a:stretch>
-              </p:blipFill>
-              <p:spPr>
-                <a:xfrm>
-                  <a:off x="131011" y="451261"/>
-                  <a:ext cx="128373" cy="174419"/>
-                </a:xfrm>
-                <a:prstGeom prst="rect">
-                  <a:avLst/>
-                </a:prstGeom>
-                <a:ln w="12700" cap="flat">
-                  <a:noFill/>
-                  <a:miter lim="400000"/>
-                </a:ln>
-                <a:effectLst/>
-              </p:spPr>
-            </p:pic>
-            <p:pic>
-              <p:nvPicPr>
-                <p:cNvPr id="86" name="ESS_Logo_Frugal_Blue_cmyk.png" descr="ESS_Logo_Frugal_Blue_cmyk.png"/>
-                <p:cNvPicPr>
-                  <a:picLocks noChangeAspect="0"/>
-                </p:cNvPicPr>
-                <p:nvPr/>
-              </p:nvPicPr>
-              <p:blipFill>
-                <a:blip r:embed="rId8">
-                  <a:extLst/>
-                </a:blip>
-                <a:stretch>
-                  <a:fillRect/>
-                </a:stretch>
-              </p:blipFill>
-              <p:spPr>
-                <a:xfrm>
-                  <a:off x="214914" y="607364"/>
-                  <a:ext cx="279297" cy="150286"/>
-                </a:xfrm>
-                <a:prstGeom prst="rect">
-                  <a:avLst/>
-                </a:prstGeom>
-                <a:ln w="12700" cap="flat">
-                  <a:noFill/>
-                  <a:miter lim="400000"/>
-                </a:ln>
-                <a:effectLst/>
-              </p:spPr>
-            </p:pic>
-          </p:grpSp>
-        </p:grpSp>
-        <p:pic>
-          <p:nvPicPr>
-            <p:cNvPr id="89" name="Image" descr="Image"/>
-            <p:cNvPicPr>
-              <a:picLocks noChangeAspect="1"/>
-            </p:cNvPicPr>
-            <p:nvPr/>
-          </p:nvPicPr>
-          <p:blipFill>
-            <a:blip r:embed="rId9">
-              <a:extLst/>
-            </a:blip>
-            <a:srcRect l="0" t="0" r="77004" b="0"/>
-            <a:stretch>
-              <a:fillRect/>
-            </a:stretch>
-          </p:blipFill>
-          <p:spPr>
-            <a:xfrm>
-              <a:off x="44293" y="62025"/>
-              <a:ext cx="617630" cy="611845"/>
-            </a:xfrm>
-            <a:prstGeom prst="rect">
-              <a:avLst/>
-            </a:prstGeom>
-            <a:ln w="12700" cap="flat">
-              <a:noFill/>
-              <a:miter lim="400000"/>
-            </a:ln>
-            <a:effectLst/>
-          </p:spPr>
-        </p:pic>
-      </p:grpSp>
     </p:spTree>
   </p:cSld>
   <p:clrMapOvr>
@@ -6640,9 +7500,849 @@
           </a:ln>
         </p:spPr>
       </p:pic>
+      <p:grpSp>
+        <p:nvGrpSpPr>
+          <p:cNvPr id="118" name="Group"/>
+          <p:cNvGrpSpPr/>
+          <p:nvPr/>
+        </p:nvGrpSpPr>
+        <p:grpSpPr>
+          <a:xfrm>
+            <a:off x="17068" y="935881"/>
+            <a:ext cx="1506786" cy="5584238"/>
+            <a:chOff x="0" y="0"/>
+            <a:chExt cx="1506784" cy="5584236"/>
+          </a:xfrm>
+        </p:grpSpPr>
+        <p:pic>
+          <p:nvPicPr>
+            <p:cNvPr id="106" name="Image" descr="Image"/>
+            <p:cNvPicPr>
+              <a:picLocks noChangeAspect="1"/>
+            </p:cNvPicPr>
+            <p:nvPr/>
+          </p:nvPicPr>
+          <p:blipFill>
+            <a:blip r:embed="rId3">
+              <a:extLst/>
+            </a:blip>
+            <a:srcRect l="0" t="0" r="0" b="0"/>
+            <a:stretch>
+              <a:fillRect/>
+            </a:stretch>
+          </p:blipFill>
+          <p:spPr>
+            <a:xfrm>
+              <a:off x="0" y="0"/>
+              <a:ext cx="1506785" cy="5584237"/>
+            </a:xfrm>
+            <a:prstGeom prst="rect">
+              <a:avLst/>
+            </a:prstGeom>
+            <a:ln w="12700" cap="flat">
+              <a:noFill/>
+              <a:miter lim="400000"/>
+            </a:ln>
+            <a:effectLst/>
+          </p:spPr>
+        </p:pic>
+        <p:sp>
+          <p:nvSpPr>
+            <p:cNvPr id="107" name="Rectangle"/>
+            <p:cNvSpPr/>
+            <p:nvPr/>
+          </p:nvSpPr>
+          <p:spPr>
+            <a:xfrm>
+              <a:off x="26491" y="29555"/>
+              <a:ext cx="1453952" cy="791704"/>
+            </a:xfrm>
+            <a:prstGeom prst="rect">
+              <a:avLst/>
+            </a:prstGeom>
+            <a:solidFill>
+              <a:srgbClr val="FFFFFF"/>
+            </a:solidFill>
+            <a:ln w="12700" cap="flat">
+              <a:noFill/>
+              <a:miter lim="400000"/>
+            </a:ln>
+            <a:effectLst/>
+          </p:spPr>
+          <p:txBody>
+            <a:bodyPr wrap="square" lIns="46799" tIns="46799" rIns="46799" bIns="46799" numCol="1" anchor="ctr">
+              <a:noAutofit/>
+            </a:bodyPr>
+            <a:lstStyle/>
+            <a:p>
+              <a:pPr/>
+            </a:p>
+          </p:txBody>
+        </p:sp>
+        <p:grpSp>
+          <p:nvGrpSpPr>
+            <p:cNvPr id="116" name="Group"/>
+            <p:cNvGrpSpPr/>
+            <p:nvPr/>
+          </p:nvGrpSpPr>
+          <p:grpSpPr>
+            <a:xfrm>
+              <a:off x="161144" y="50051"/>
+              <a:ext cx="1271028" cy="5510910"/>
+              <a:chOff x="0" y="0"/>
+              <a:chExt cx="1271027" cy="5510908"/>
+            </a:xfrm>
+          </p:grpSpPr>
+          <p:sp>
+            <p:nvSpPr>
+              <p:cNvPr id="108" name="2025 ISIS McStas School"/>
+              <p:cNvSpPr txBox="1"/>
+              <p:nvPr/>
+            </p:nvSpPr>
+            <p:spPr>
+              <a:xfrm>
+                <a:off x="0" y="4478221"/>
+                <a:ext cx="1184497" cy="1032688"/>
+              </a:xfrm>
+              <a:prstGeom prst="rect">
+                <a:avLst/>
+              </a:prstGeom>
+              <a:noFill/>
+              <a:ln w="12700" cap="flat">
+                <a:noFill/>
+                <a:miter lim="400000"/>
+              </a:ln>
+              <a:effectLst/>
+              <a:extLst>
+                <a:ext uri="{C572A759-6A51-4108-AA02-DFA0A04FC94B}">
+                  <ma14:wrappingTextBoxFlag xmlns:ma14="http://schemas.microsoft.com/office/mac/drawingml/2011/main" val="1"/>
+                </a:ext>
+              </a:extLst>
+            </p:spPr>
+            <p:txBody>
+              <a:bodyPr wrap="square" lIns="0" tIns="0" rIns="0" bIns="0" numCol="1" anchor="b">
+                <a:normAutofit fontScale="100000" lnSpcReduction="0"/>
+              </a:bodyPr>
+              <a:lstStyle/>
+              <a:p>
+                <a:pPr algn="ctr" defTabSz="521208">
+                  <a:lnSpc>
+                    <a:spcPct val="110000"/>
+                  </a:lnSpc>
+                  <a:spcBef>
+                    <a:spcPts val="0"/>
+                  </a:spcBef>
+                  <a:defRPr b="1" i="1" sz="2109">
+                    <a:solidFill>
+                      <a:srgbClr val="FFFFFF"/>
+                    </a:solidFill>
+                  </a:defRPr>
+                </a:pPr>
+                <a:r>
+                  <a:t>2025 ISIS</a:t>
+                </a:r>
+                <a:br/>
+                <a:r>
+                  <a:t>McStas School</a:t>
+                </a:r>
+              </a:p>
+            </p:txBody>
+          </p:sp>
+          <p:grpSp>
+            <p:nvGrpSpPr>
+              <p:cNvPr id="115" name="Group"/>
+              <p:cNvGrpSpPr/>
+              <p:nvPr/>
+            </p:nvGrpSpPr>
+            <p:grpSpPr>
+              <a:xfrm>
+                <a:off x="545266" y="-1"/>
+                <a:ext cx="725762" cy="757651"/>
+                <a:chOff x="0" y="0"/>
+                <a:chExt cx="725761" cy="757649"/>
+              </a:xfrm>
+            </p:grpSpPr>
+            <p:sp>
+              <p:nvSpPr>
+                <p:cNvPr id="109" name="Logo color"/>
+                <p:cNvSpPr/>
+                <p:nvPr/>
+              </p:nvSpPr>
+              <p:spPr>
+                <a:xfrm>
+                  <a:off x="2507" y="452770"/>
+                  <a:ext cx="117009" cy="170656"/>
+                </a:xfrm>
+                <a:custGeom>
+                  <a:avLst/>
+                  <a:gdLst/>
+                  <a:ahLst/>
+                  <a:cxnLst>
+                    <a:cxn ang="0">
+                      <a:pos x="wd2" y="hd2"/>
+                    </a:cxn>
+                    <a:cxn ang="5400000">
+                      <a:pos x="wd2" y="hd2"/>
+                    </a:cxn>
+                    <a:cxn ang="10800000">
+                      <a:pos x="wd2" y="hd2"/>
+                    </a:cxn>
+                    <a:cxn ang="16200000">
+                      <a:pos x="wd2" y="hd2"/>
+                    </a:cxn>
+                  </a:cxnLst>
+                  <a:rect l="0" t="0" r="r" b="b"/>
+                  <a:pathLst>
+                    <a:path w="21600" h="21600" fill="norm" stroke="1" extrusionOk="0">
+                      <a:moveTo>
+                        <a:pt x="4597" y="18293"/>
+                      </a:moveTo>
+                      <a:cubicBezTo>
+                        <a:pt x="10549" y="19881"/>
+                        <a:pt x="11051" y="19881"/>
+                        <a:pt x="17003" y="18293"/>
+                      </a:cubicBezTo>
+                      <a:cubicBezTo>
+                        <a:pt x="17003" y="18293"/>
+                        <a:pt x="17003" y="18293"/>
+                        <a:pt x="21600" y="19949"/>
+                      </a:cubicBezTo>
+                      <a:cubicBezTo>
+                        <a:pt x="21600" y="19949"/>
+                        <a:pt x="21600" y="19949"/>
+                        <a:pt x="17003" y="21600"/>
+                      </a:cubicBezTo>
+                      <a:cubicBezTo>
+                        <a:pt x="11051" y="20016"/>
+                        <a:pt x="10549" y="20016"/>
+                        <a:pt x="4597" y="21600"/>
+                      </a:cubicBezTo>
+                      <a:cubicBezTo>
+                        <a:pt x="4597" y="21600"/>
+                        <a:pt x="4597" y="21600"/>
+                        <a:pt x="0" y="19949"/>
+                      </a:cubicBezTo>
+                      <a:cubicBezTo>
+                        <a:pt x="0" y="19949"/>
+                        <a:pt x="0" y="19949"/>
+                        <a:pt x="4597" y="18293"/>
+                      </a:cubicBezTo>
+                      <a:close/>
+                      <a:moveTo>
+                        <a:pt x="4597" y="14200"/>
+                      </a:moveTo>
+                      <a:cubicBezTo>
+                        <a:pt x="10549" y="15790"/>
+                        <a:pt x="11051" y="15790"/>
+                        <a:pt x="17003" y="14200"/>
+                      </a:cubicBezTo>
+                      <a:cubicBezTo>
+                        <a:pt x="17003" y="14200"/>
+                        <a:pt x="17003" y="14200"/>
+                        <a:pt x="21600" y="15858"/>
+                      </a:cubicBezTo>
+                      <a:cubicBezTo>
+                        <a:pt x="21600" y="15858"/>
+                        <a:pt x="21600" y="15858"/>
+                        <a:pt x="17003" y="17512"/>
+                      </a:cubicBezTo>
+                      <a:cubicBezTo>
+                        <a:pt x="11051" y="15925"/>
+                        <a:pt x="10549" y="15925"/>
+                        <a:pt x="4597" y="17512"/>
+                      </a:cubicBezTo>
+                      <a:cubicBezTo>
+                        <a:pt x="4597" y="17512"/>
+                        <a:pt x="4597" y="17512"/>
+                        <a:pt x="0" y="15858"/>
+                      </a:cubicBezTo>
+                      <a:cubicBezTo>
+                        <a:pt x="0" y="15858"/>
+                        <a:pt x="0" y="15858"/>
+                        <a:pt x="4597" y="14200"/>
+                      </a:cubicBezTo>
+                      <a:close/>
+                      <a:moveTo>
+                        <a:pt x="4597" y="10111"/>
+                      </a:moveTo>
+                      <a:cubicBezTo>
+                        <a:pt x="10549" y="11702"/>
+                        <a:pt x="11051" y="11702"/>
+                        <a:pt x="17003" y="10111"/>
+                      </a:cubicBezTo>
+                      <a:cubicBezTo>
+                        <a:pt x="17003" y="10111"/>
+                        <a:pt x="17003" y="10111"/>
+                        <a:pt x="21600" y="11769"/>
+                      </a:cubicBezTo>
+                      <a:cubicBezTo>
+                        <a:pt x="21600" y="11769"/>
+                        <a:pt x="21600" y="11769"/>
+                        <a:pt x="17003" y="13423"/>
+                      </a:cubicBezTo>
+                      <a:cubicBezTo>
+                        <a:pt x="11051" y="11837"/>
+                        <a:pt x="10549" y="11837"/>
+                        <a:pt x="4597" y="13423"/>
+                      </a:cubicBezTo>
+                      <a:cubicBezTo>
+                        <a:pt x="4597" y="13423"/>
+                        <a:pt x="4597" y="13423"/>
+                        <a:pt x="0" y="11769"/>
+                      </a:cubicBezTo>
+                      <a:cubicBezTo>
+                        <a:pt x="0" y="11769"/>
+                        <a:pt x="0" y="11769"/>
+                        <a:pt x="4597" y="10111"/>
+                      </a:cubicBezTo>
+                      <a:close/>
+                      <a:moveTo>
+                        <a:pt x="2971" y="918"/>
+                      </a:moveTo>
+                      <a:lnTo>
+                        <a:pt x="2971" y="6926"/>
+                      </a:lnTo>
+                      <a:cubicBezTo>
+                        <a:pt x="2971" y="6926"/>
+                        <a:pt x="2971" y="6926"/>
+                        <a:pt x="3980" y="6926"/>
+                      </a:cubicBezTo>
+                      <a:cubicBezTo>
+                        <a:pt x="4430" y="6926"/>
+                        <a:pt x="4695" y="6878"/>
+                        <a:pt x="4903" y="6708"/>
+                      </a:cubicBezTo>
+                      <a:cubicBezTo>
+                        <a:pt x="5220" y="6447"/>
+                        <a:pt x="5249" y="5917"/>
+                        <a:pt x="5249" y="4849"/>
+                      </a:cubicBezTo>
+                      <a:cubicBezTo>
+                        <a:pt x="5249" y="4849"/>
+                        <a:pt x="5249" y="4849"/>
+                        <a:pt x="5249" y="2990"/>
+                      </a:cubicBezTo>
+                      <a:cubicBezTo>
+                        <a:pt x="5249" y="1926"/>
+                        <a:pt x="5220" y="1396"/>
+                        <a:pt x="4903" y="1135"/>
+                      </a:cubicBezTo>
+                      <a:cubicBezTo>
+                        <a:pt x="4695" y="965"/>
+                        <a:pt x="4430" y="918"/>
+                        <a:pt x="3980" y="918"/>
+                      </a:cubicBezTo>
+                      <a:cubicBezTo>
+                        <a:pt x="3980" y="918"/>
+                        <a:pt x="3980" y="918"/>
+                        <a:pt x="2971" y="918"/>
+                      </a:cubicBezTo>
+                      <a:close/>
+                      <a:moveTo>
+                        <a:pt x="8068" y="0"/>
+                      </a:moveTo>
+                      <a:cubicBezTo>
+                        <a:pt x="8068" y="0"/>
+                        <a:pt x="8068" y="0"/>
+                        <a:pt x="13456" y="0"/>
+                      </a:cubicBezTo>
+                      <a:cubicBezTo>
+                        <a:pt x="13542" y="0"/>
+                        <a:pt x="13594" y="16"/>
+                        <a:pt x="13635" y="44"/>
+                      </a:cubicBezTo>
+                      <a:cubicBezTo>
+                        <a:pt x="13669" y="67"/>
+                        <a:pt x="13698" y="103"/>
+                        <a:pt x="13698" y="162"/>
+                      </a:cubicBezTo>
+                      <a:cubicBezTo>
+                        <a:pt x="13698" y="162"/>
+                        <a:pt x="13698" y="162"/>
+                        <a:pt x="13698" y="827"/>
+                      </a:cubicBezTo>
+                      <a:cubicBezTo>
+                        <a:pt x="13698" y="886"/>
+                        <a:pt x="13669" y="922"/>
+                        <a:pt x="13635" y="945"/>
+                      </a:cubicBezTo>
+                      <a:cubicBezTo>
+                        <a:pt x="13594" y="973"/>
+                        <a:pt x="13542" y="989"/>
+                        <a:pt x="13456" y="989"/>
+                      </a:cubicBezTo>
+                      <a:cubicBezTo>
+                        <a:pt x="13456" y="989"/>
+                        <a:pt x="13456" y="989"/>
+                        <a:pt x="11731" y="989"/>
+                      </a:cubicBezTo>
+                      <a:cubicBezTo>
+                        <a:pt x="11731" y="989"/>
+                        <a:pt x="11731" y="989"/>
+                        <a:pt x="11731" y="7681"/>
+                      </a:cubicBezTo>
+                      <a:cubicBezTo>
+                        <a:pt x="11731" y="7740"/>
+                        <a:pt x="11708" y="7776"/>
+                        <a:pt x="11667" y="7800"/>
+                      </a:cubicBezTo>
+                      <a:cubicBezTo>
+                        <a:pt x="11633" y="7827"/>
+                        <a:pt x="11581" y="7843"/>
+                        <a:pt x="11494" y="7843"/>
+                      </a:cubicBezTo>
+                      <a:cubicBezTo>
+                        <a:pt x="11494" y="7843"/>
+                        <a:pt x="11494" y="7843"/>
+                        <a:pt x="10029" y="7843"/>
+                      </a:cubicBezTo>
+                      <a:cubicBezTo>
+                        <a:pt x="9943" y="7843"/>
+                        <a:pt x="9891" y="7827"/>
+                        <a:pt x="9850" y="7800"/>
+                      </a:cubicBezTo>
+                      <a:cubicBezTo>
+                        <a:pt x="9810" y="7776"/>
+                        <a:pt x="9787" y="7740"/>
+                        <a:pt x="9787" y="7681"/>
+                      </a:cubicBezTo>
+                      <a:cubicBezTo>
+                        <a:pt x="9787" y="7681"/>
+                        <a:pt x="9787" y="7681"/>
+                        <a:pt x="9787" y="989"/>
+                      </a:cubicBezTo>
+                      <a:cubicBezTo>
+                        <a:pt x="9787" y="989"/>
+                        <a:pt x="9787" y="989"/>
+                        <a:pt x="8068" y="989"/>
+                      </a:cubicBezTo>
+                      <a:cubicBezTo>
+                        <a:pt x="7981" y="989"/>
+                        <a:pt x="7929" y="973"/>
+                        <a:pt x="7889" y="945"/>
+                      </a:cubicBezTo>
+                      <a:cubicBezTo>
+                        <a:pt x="7849" y="922"/>
+                        <a:pt x="7825" y="886"/>
+                        <a:pt x="7825" y="827"/>
+                      </a:cubicBezTo>
+                      <a:cubicBezTo>
+                        <a:pt x="7825" y="827"/>
+                        <a:pt x="7825" y="827"/>
+                        <a:pt x="7825" y="162"/>
+                      </a:cubicBezTo>
+                      <a:cubicBezTo>
+                        <a:pt x="7825" y="103"/>
+                        <a:pt x="7849" y="67"/>
+                        <a:pt x="7889" y="44"/>
+                      </a:cubicBezTo>
+                      <a:cubicBezTo>
+                        <a:pt x="7929" y="16"/>
+                        <a:pt x="7981" y="0"/>
+                        <a:pt x="8068" y="0"/>
+                      </a:cubicBezTo>
+                      <a:close/>
+                      <a:moveTo>
+                        <a:pt x="1390" y="0"/>
+                      </a:moveTo>
+                      <a:cubicBezTo>
+                        <a:pt x="1390" y="0"/>
+                        <a:pt x="1390" y="0"/>
+                        <a:pt x="4257" y="0"/>
+                      </a:cubicBezTo>
+                      <a:cubicBezTo>
+                        <a:pt x="5370" y="0"/>
+                        <a:pt x="6051" y="174"/>
+                        <a:pt x="6466" y="538"/>
+                      </a:cubicBezTo>
+                      <a:cubicBezTo>
+                        <a:pt x="7072" y="1036"/>
+                        <a:pt x="7089" y="1843"/>
+                        <a:pt x="7089" y="3077"/>
+                      </a:cubicBezTo>
+                      <a:cubicBezTo>
+                        <a:pt x="7089" y="3077"/>
+                        <a:pt x="7089" y="3077"/>
+                        <a:pt x="7089" y="4766"/>
+                      </a:cubicBezTo>
+                      <a:cubicBezTo>
+                        <a:pt x="7089" y="6000"/>
+                        <a:pt x="7072" y="6807"/>
+                        <a:pt x="6466" y="7305"/>
+                      </a:cubicBezTo>
+                      <a:cubicBezTo>
+                        <a:pt x="6051" y="7669"/>
+                        <a:pt x="5370" y="7843"/>
+                        <a:pt x="4257" y="7843"/>
+                      </a:cubicBezTo>
+                      <a:cubicBezTo>
+                        <a:pt x="4257" y="7843"/>
+                        <a:pt x="4257" y="7843"/>
+                        <a:pt x="1390" y="7843"/>
+                      </a:cubicBezTo>
+                      <a:cubicBezTo>
+                        <a:pt x="1304" y="7843"/>
+                        <a:pt x="1252" y="7827"/>
+                        <a:pt x="1217" y="7800"/>
+                      </a:cubicBezTo>
+                      <a:cubicBezTo>
+                        <a:pt x="1177" y="7776"/>
+                        <a:pt x="1154" y="7740"/>
+                        <a:pt x="1154" y="7681"/>
+                      </a:cubicBezTo>
+                      <a:cubicBezTo>
+                        <a:pt x="1154" y="7681"/>
+                        <a:pt x="1154" y="7681"/>
+                        <a:pt x="1154" y="162"/>
+                      </a:cubicBezTo>
+                      <a:cubicBezTo>
+                        <a:pt x="1154" y="103"/>
+                        <a:pt x="1177" y="67"/>
+                        <a:pt x="1217" y="44"/>
+                      </a:cubicBezTo>
+                      <a:cubicBezTo>
+                        <a:pt x="1252" y="16"/>
+                        <a:pt x="1304" y="0"/>
+                        <a:pt x="1390" y="0"/>
+                      </a:cubicBezTo>
+                      <a:close/>
+                      <a:moveTo>
+                        <a:pt x="14706" y="0"/>
+                      </a:moveTo>
+                      <a:cubicBezTo>
+                        <a:pt x="14706" y="0"/>
+                        <a:pt x="14706" y="0"/>
+                        <a:pt x="16045" y="0"/>
+                      </a:cubicBezTo>
+                      <a:cubicBezTo>
+                        <a:pt x="16131" y="0"/>
+                        <a:pt x="16183" y="16"/>
+                        <a:pt x="16224" y="44"/>
+                      </a:cubicBezTo>
+                      <a:cubicBezTo>
+                        <a:pt x="16264" y="67"/>
+                        <a:pt x="16287" y="103"/>
+                        <a:pt x="16287" y="162"/>
+                      </a:cubicBezTo>
+                      <a:cubicBezTo>
+                        <a:pt x="16287" y="162"/>
+                        <a:pt x="16287" y="162"/>
+                        <a:pt x="16287" y="5712"/>
+                      </a:cubicBezTo>
+                      <a:cubicBezTo>
+                        <a:pt x="16287" y="6314"/>
+                        <a:pt x="16368" y="6646"/>
+                        <a:pt x="16627" y="6844"/>
+                      </a:cubicBezTo>
+                      <a:cubicBezTo>
+                        <a:pt x="16818" y="6990"/>
+                        <a:pt x="17072" y="7053"/>
+                        <a:pt x="17406" y="7053"/>
+                      </a:cubicBezTo>
+                      <a:cubicBezTo>
+                        <a:pt x="17776" y="7053"/>
+                        <a:pt x="18041" y="6982"/>
+                        <a:pt x="18226" y="6844"/>
+                      </a:cubicBezTo>
+                      <a:cubicBezTo>
+                        <a:pt x="18503" y="6638"/>
+                        <a:pt x="18566" y="6294"/>
+                        <a:pt x="18566" y="5712"/>
+                      </a:cubicBezTo>
+                      <a:cubicBezTo>
+                        <a:pt x="18566" y="5712"/>
+                        <a:pt x="18566" y="5712"/>
+                        <a:pt x="18566" y="162"/>
+                      </a:cubicBezTo>
+                      <a:cubicBezTo>
+                        <a:pt x="18566" y="103"/>
+                        <a:pt x="18589" y="67"/>
+                        <a:pt x="18630" y="44"/>
+                      </a:cubicBezTo>
+                      <a:cubicBezTo>
+                        <a:pt x="18664" y="16"/>
+                        <a:pt x="18722" y="0"/>
+                        <a:pt x="18803" y="0"/>
+                      </a:cubicBezTo>
+                      <a:cubicBezTo>
+                        <a:pt x="18803" y="0"/>
+                        <a:pt x="18803" y="0"/>
+                        <a:pt x="20147" y="0"/>
+                      </a:cubicBezTo>
+                      <a:cubicBezTo>
+                        <a:pt x="20234" y="0"/>
+                        <a:pt x="20286" y="16"/>
+                        <a:pt x="20320" y="44"/>
+                      </a:cubicBezTo>
+                      <a:cubicBezTo>
+                        <a:pt x="20361" y="67"/>
+                        <a:pt x="20384" y="103"/>
+                        <a:pt x="20384" y="162"/>
+                      </a:cubicBezTo>
+                      <a:cubicBezTo>
+                        <a:pt x="20384" y="162"/>
+                        <a:pt x="20384" y="162"/>
+                        <a:pt x="20384" y="5716"/>
+                      </a:cubicBezTo>
+                      <a:cubicBezTo>
+                        <a:pt x="20384" y="6464"/>
+                        <a:pt x="20257" y="6962"/>
+                        <a:pt x="19732" y="7382"/>
+                      </a:cubicBezTo>
+                      <a:cubicBezTo>
+                        <a:pt x="19287" y="7738"/>
+                        <a:pt x="18560" y="7943"/>
+                        <a:pt x="17430" y="7943"/>
+                      </a:cubicBezTo>
+                      <a:cubicBezTo>
+                        <a:pt x="16316" y="7943"/>
+                        <a:pt x="15583" y="7750"/>
+                        <a:pt x="15093" y="7382"/>
+                      </a:cubicBezTo>
+                      <a:cubicBezTo>
+                        <a:pt x="14625" y="7030"/>
+                        <a:pt x="14469" y="6523"/>
+                        <a:pt x="14469" y="5716"/>
+                      </a:cubicBezTo>
+                      <a:cubicBezTo>
+                        <a:pt x="14469" y="5716"/>
+                        <a:pt x="14469" y="5716"/>
+                        <a:pt x="14469" y="162"/>
+                      </a:cubicBezTo>
+                      <a:cubicBezTo>
+                        <a:pt x="14469" y="103"/>
+                        <a:pt x="14493" y="67"/>
+                        <a:pt x="14527" y="44"/>
+                      </a:cubicBezTo>
+                      <a:cubicBezTo>
+                        <a:pt x="14568" y="16"/>
+                        <a:pt x="14620" y="0"/>
+                        <a:pt x="14706" y="0"/>
+                      </a:cubicBezTo>
+                      <a:close/>
+                    </a:path>
+                  </a:pathLst>
+                </a:custGeom>
+                <a:solidFill>
+                  <a:schemeClr val="accent1"/>
+                </a:solidFill>
+                <a:ln w="12700" cap="flat">
+                  <a:noFill/>
+                  <a:miter lim="400000"/>
+                </a:ln>
+                <a:effectLst/>
+              </p:spPr>
+              <p:txBody>
+                <a:bodyPr wrap="square" lIns="46799" tIns="46799" rIns="46799" bIns="46799" numCol="1" anchor="t">
+                  <a:noAutofit/>
+                </a:bodyPr>
+                <a:lstStyle/>
+                <a:p>
+                  <a:pPr>
+                    <a:defRPr>
+                      <a:latin typeface="Verdana"/>
+                      <a:ea typeface="Verdana"/>
+                      <a:cs typeface="Verdana"/>
+                      <a:sym typeface="Verdana"/>
+                    </a:defRPr>
+                  </a:pPr>
+                </a:p>
+              </p:txBody>
+            </p:sp>
+            <p:pic>
+              <p:nvPicPr>
+                <p:cNvPr id="110" name="logoill.pdf" descr="logoill.pdf"/>
+                <p:cNvPicPr>
+                  <a:picLocks noChangeAspect="0"/>
+                </p:cNvPicPr>
+                <p:nvPr/>
+              </p:nvPicPr>
+              <p:blipFill>
+                <a:blip r:embed="rId4">
+                  <a:extLst/>
+                </a:blip>
+                <a:stretch>
+                  <a:fillRect/>
+                </a:stretch>
+              </p:blipFill>
+              <p:spPr>
+                <a:xfrm>
+                  <a:off x="486613" y="459579"/>
+                  <a:ext cx="164286" cy="157037"/>
+                </a:xfrm>
+                <a:prstGeom prst="rect">
+                  <a:avLst/>
+                </a:prstGeom>
+                <a:ln w="12700" cap="flat">
+                  <a:noFill/>
+                  <a:miter lim="400000"/>
+                </a:ln>
+                <a:effectLst/>
+              </p:spPr>
+            </p:pic>
+            <p:pic>
+              <p:nvPicPr>
+                <p:cNvPr id="111" name="mcstas-logo.pdf" descr="mcstas-logo.pdf"/>
+                <p:cNvPicPr>
+                  <a:picLocks noChangeAspect="0"/>
+                </p:cNvPicPr>
+                <p:nvPr/>
+              </p:nvPicPr>
+              <p:blipFill>
+                <a:blip r:embed="rId5">
+                  <a:extLst/>
+                </a:blip>
+                <a:srcRect l="0" t="0" r="0" b="0"/>
+                <a:stretch>
+                  <a:fillRect/>
+                </a:stretch>
+              </p:blipFill>
+              <p:spPr>
+                <a:xfrm>
+                  <a:off x="0" y="0"/>
+                  <a:ext cx="725762" cy="426459"/>
+                </a:xfrm>
+                <a:prstGeom prst="rect">
+                  <a:avLst/>
+                </a:prstGeom>
+                <a:ln w="12700" cap="flat">
+                  <a:noFill/>
+                  <a:miter lim="400000"/>
+                </a:ln>
+                <a:effectLst/>
+              </p:spPr>
+            </p:pic>
+            <p:pic>
+              <p:nvPicPr>
+                <p:cNvPr id="112" name="PSI-Logo_trans.png" descr="PSI-Logo_trans.png"/>
+                <p:cNvPicPr>
+                  <a:picLocks noChangeAspect="0"/>
+                </p:cNvPicPr>
+                <p:nvPr/>
+              </p:nvPicPr>
+              <p:blipFill>
+                <a:blip r:embed="rId6">
+                  <a:extLst/>
+                </a:blip>
+                <a:stretch>
+                  <a:fillRect/>
+                </a:stretch>
+              </p:blipFill>
+              <p:spPr>
+                <a:xfrm>
+                  <a:off x="270340" y="501170"/>
+                  <a:ext cx="204490" cy="74865"/>
+                </a:xfrm>
+                <a:prstGeom prst="rect">
+                  <a:avLst/>
+                </a:prstGeom>
+                <a:ln w="12700" cap="flat">
+                  <a:noFill/>
+                  <a:miter lim="400000"/>
+                </a:ln>
+                <a:effectLst/>
+              </p:spPr>
+            </p:pic>
+            <p:pic>
+              <p:nvPicPr>
+                <p:cNvPr id="113" name="ku-logo.pdf" descr="ku-logo.pdf"/>
+                <p:cNvPicPr>
+                  <a:picLocks noChangeAspect="0"/>
+                </p:cNvPicPr>
+                <p:nvPr/>
+              </p:nvPicPr>
+              <p:blipFill>
+                <a:blip r:embed="rId7">
+                  <a:extLst/>
+                </a:blip>
+                <a:stretch>
+                  <a:fillRect/>
+                </a:stretch>
+              </p:blipFill>
+              <p:spPr>
+                <a:xfrm>
+                  <a:off x="131011" y="451261"/>
+                  <a:ext cx="128373" cy="174419"/>
+                </a:xfrm>
+                <a:prstGeom prst="rect">
+                  <a:avLst/>
+                </a:prstGeom>
+                <a:ln w="12700" cap="flat">
+                  <a:noFill/>
+                  <a:miter lim="400000"/>
+                </a:ln>
+                <a:effectLst/>
+              </p:spPr>
+            </p:pic>
+            <p:pic>
+              <p:nvPicPr>
+                <p:cNvPr id="114" name="ESS_Logo_Frugal_Blue_cmyk.png" descr="ESS_Logo_Frugal_Blue_cmyk.png"/>
+                <p:cNvPicPr>
+                  <a:picLocks noChangeAspect="0"/>
+                </p:cNvPicPr>
+                <p:nvPr/>
+              </p:nvPicPr>
+              <p:blipFill>
+                <a:blip r:embed="rId8">
+                  <a:extLst/>
+                </a:blip>
+                <a:stretch>
+                  <a:fillRect/>
+                </a:stretch>
+              </p:blipFill>
+              <p:spPr>
+                <a:xfrm>
+                  <a:off x="214914" y="607364"/>
+                  <a:ext cx="279297" cy="150286"/>
+                </a:xfrm>
+                <a:prstGeom prst="rect">
+                  <a:avLst/>
+                </a:prstGeom>
+                <a:ln w="12700" cap="flat">
+                  <a:noFill/>
+                  <a:miter lim="400000"/>
+                </a:ln>
+                <a:effectLst/>
+              </p:spPr>
+            </p:pic>
+          </p:grpSp>
+        </p:grpSp>
+        <p:pic>
+          <p:nvPicPr>
+            <p:cNvPr id="117" name="Image" descr="Image"/>
+            <p:cNvPicPr>
+              <a:picLocks noChangeAspect="1"/>
+            </p:cNvPicPr>
+            <p:nvPr/>
+          </p:nvPicPr>
+          <p:blipFill>
+            <a:blip r:embed="rId9">
+              <a:extLst/>
+            </a:blip>
+            <a:srcRect l="0" t="0" r="77004" b="0"/>
+            <a:stretch>
+              <a:fillRect/>
+            </a:stretch>
+          </p:blipFill>
+          <p:spPr>
+            <a:xfrm>
+              <a:off x="44293" y="62025"/>
+              <a:ext cx="617630" cy="611845"/>
+            </a:xfrm>
+            <a:prstGeom prst="rect">
+              <a:avLst/>
+            </a:prstGeom>
+            <a:ln w="12700" cap="flat">
+              <a:noFill/>
+              <a:miter lim="400000"/>
+            </a:ln>
+            <a:effectLst/>
+          </p:spPr>
+        </p:pic>
+      </p:grpSp>
       <p:sp>
         <p:nvSpPr>
-          <p:cNvPr id="106" name="UserProfile.Offices.Workarea_{{DocumentLanguage}}text"/>
+          <p:cNvPr id="119" name="UserProfile.Offices.Workarea_{{DocumentLanguage}}text"/>
           <p:cNvSpPr txBox="1"/>
           <p:nvPr/>
         </p:nvSpPr>
@@ -6682,851 +8382,11 @@
           <a:p>
             <a:pPr/>
             <a:r>
-              <a:t>2021 ISIS McStas school</a:t>
+              <a:t>2025 ISIS McStas school</a:t>
             </a:r>
           </a:p>
         </p:txBody>
       </p:sp>
-      <p:grpSp>
-        <p:nvGrpSpPr>
-          <p:cNvPr id="119" name="Group"/>
-          <p:cNvGrpSpPr/>
-          <p:nvPr/>
-        </p:nvGrpSpPr>
-        <p:grpSpPr>
-          <a:xfrm>
-            <a:off x="17068" y="935881"/>
-            <a:ext cx="1506786" cy="5584238"/>
-            <a:chOff x="0" y="0"/>
-            <a:chExt cx="1506784" cy="5584236"/>
-          </a:xfrm>
-        </p:grpSpPr>
-        <p:pic>
-          <p:nvPicPr>
-            <p:cNvPr id="107" name="Image" descr="Image"/>
-            <p:cNvPicPr>
-              <a:picLocks noChangeAspect="1"/>
-            </p:cNvPicPr>
-            <p:nvPr/>
-          </p:nvPicPr>
-          <p:blipFill>
-            <a:blip r:embed="rId3">
-              <a:extLst/>
-            </a:blip>
-            <a:srcRect l="0" t="0" r="0" b="0"/>
-            <a:stretch>
-              <a:fillRect/>
-            </a:stretch>
-          </p:blipFill>
-          <p:spPr>
-            <a:xfrm>
-              <a:off x="0" y="0"/>
-              <a:ext cx="1506785" cy="5584237"/>
-            </a:xfrm>
-            <a:prstGeom prst="rect">
-              <a:avLst/>
-            </a:prstGeom>
-            <a:ln w="12700" cap="flat">
-              <a:noFill/>
-              <a:miter lim="400000"/>
-            </a:ln>
-            <a:effectLst/>
-          </p:spPr>
-        </p:pic>
-        <p:sp>
-          <p:nvSpPr>
-            <p:cNvPr id="108" name="Rectangle"/>
-            <p:cNvSpPr/>
-            <p:nvPr/>
-          </p:nvSpPr>
-          <p:spPr>
-            <a:xfrm>
-              <a:off x="26491" y="29555"/>
-              <a:ext cx="1453952" cy="791704"/>
-            </a:xfrm>
-            <a:prstGeom prst="rect">
-              <a:avLst/>
-            </a:prstGeom>
-            <a:solidFill>
-              <a:srgbClr val="FFFFFF"/>
-            </a:solidFill>
-            <a:ln w="12700" cap="flat">
-              <a:noFill/>
-              <a:miter lim="400000"/>
-            </a:ln>
-            <a:effectLst/>
-          </p:spPr>
-          <p:txBody>
-            <a:bodyPr wrap="square" lIns="46799" tIns="46799" rIns="46799" bIns="46799" numCol="1" anchor="ctr">
-              <a:noAutofit/>
-            </a:bodyPr>
-            <a:lstStyle/>
-            <a:p>
-              <a:pPr/>
-            </a:p>
-          </p:txBody>
-        </p:sp>
-        <p:grpSp>
-          <p:nvGrpSpPr>
-            <p:cNvPr id="117" name="Group"/>
-            <p:cNvGrpSpPr/>
-            <p:nvPr/>
-          </p:nvGrpSpPr>
-          <p:grpSpPr>
-            <a:xfrm>
-              <a:off x="161144" y="50051"/>
-              <a:ext cx="1271028" cy="5510910"/>
-              <a:chOff x="0" y="0"/>
-              <a:chExt cx="1271027" cy="5510908"/>
-            </a:xfrm>
-          </p:grpSpPr>
-          <p:sp>
-            <p:nvSpPr>
-              <p:cNvPr id="109" name="2021 Virtual ISIS McStas School"/>
-              <p:cNvSpPr txBox="1"/>
-              <p:nvPr/>
-            </p:nvSpPr>
-            <p:spPr>
-              <a:xfrm>
-                <a:off x="0" y="4478221"/>
-                <a:ext cx="1184497" cy="1032688"/>
-              </a:xfrm>
-              <a:prstGeom prst="rect">
-                <a:avLst/>
-              </a:prstGeom>
-              <a:noFill/>
-              <a:ln w="12700" cap="flat">
-                <a:noFill/>
-                <a:miter lim="400000"/>
-              </a:ln>
-              <a:effectLst/>
-              <a:extLst>
-                <a:ext uri="{C572A759-6A51-4108-AA02-DFA0A04FC94B}">
-                  <ma14:wrappingTextBoxFlag xmlns:ma14="http://schemas.microsoft.com/office/mac/drawingml/2011/main" val="1"/>
-                </a:ext>
-              </a:extLst>
-            </p:spPr>
-            <p:txBody>
-              <a:bodyPr wrap="square" lIns="0" tIns="0" rIns="0" bIns="0" numCol="1" anchor="b">
-                <a:normAutofit fontScale="100000" lnSpcReduction="0"/>
-              </a:bodyPr>
-              <a:lstStyle/>
-              <a:p>
-                <a:pPr algn="ctr" defTabSz="393192">
-                  <a:lnSpc>
-                    <a:spcPct val="110000"/>
-                  </a:lnSpc>
-                  <a:spcBef>
-                    <a:spcPts val="0"/>
-                  </a:spcBef>
-                  <a:defRPr b="1" i="1" sz="1591">
-                    <a:solidFill>
-                      <a:srgbClr val="FFFFFF"/>
-                    </a:solidFill>
-                  </a:defRPr>
-                </a:pPr>
-                <a:r>
-                  <a:t>2021 Virtual ISIS</a:t>
-                </a:r>
-                <a:br/>
-                <a:r>
-                  <a:t>McStas School</a:t>
-                </a:r>
-              </a:p>
-            </p:txBody>
-          </p:sp>
-          <p:grpSp>
-            <p:nvGrpSpPr>
-              <p:cNvPr id="116" name="Group"/>
-              <p:cNvGrpSpPr/>
-              <p:nvPr/>
-            </p:nvGrpSpPr>
-            <p:grpSpPr>
-              <a:xfrm>
-                <a:off x="545266" y="-1"/>
-                <a:ext cx="725762" cy="757651"/>
-                <a:chOff x="0" y="0"/>
-                <a:chExt cx="725761" cy="757649"/>
-              </a:xfrm>
-            </p:grpSpPr>
-            <p:sp>
-              <p:nvSpPr>
-                <p:cNvPr id="110" name="Logo color"/>
-                <p:cNvSpPr/>
-                <p:nvPr/>
-              </p:nvSpPr>
-              <p:spPr>
-                <a:xfrm>
-                  <a:off x="2507" y="452770"/>
-                  <a:ext cx="117009" cy="170656"/>
-                </a:xfrm>
-                <a:custGeom>
-                  <a:avLst/>
-                  <a:gdLst/>
-                  <a:ahLst/>
-                  <a:cxnLst>
-                    <a:cxn ang="0">
-                      <a:pos x="wd2" y="hd2"/>
-                    </a:cxn>
-                    <a:cxn ang="5400000">
-                      <a:pos x="wd2" y="hd2"/>
-                    </a:cxn>
-                    <a:cxn ang="10800000">
-                      <a:pos x="wd2" y="hd2"/>
-                    </a:cxn>
-                    <a:cxn ang="16200000">
-                      <a:pos x="wd2" y="hd2"/>
-                    </a:cxn>
-                  </a:cxnLst>
-                  <a:rect l="0" t="0" r="r" b="b"/>
-                  <a:pathLst>
-                    <a:path w="21600" h="21600" fill="norm" stroke="1" extrusionOk="0">
-                      <a:moveTo>
-                        <a:pt x="4597" y="18293"/>
-                      </a:moveTo>
-                      <a:cubicBezTo>
-                        <a:pt x="10549" y="19881"/>
-                        <a:pt x="11051" y="19881"/>
-                        <a:pt x="17003" y="18293"/>
-                      </a:cubicBezTo>
-                      <a:cubicBezTo>
-                        <a:pt x="17003" y="18293"/>
-                        <a:pt x="17003" y="18293"/>
-                        <a:pt x="21600" y="19949"/>
-                      </a:cubicBezTo>
-                      <a:cubicBezTo>
-                        <a:pt x="21600" y="19949"/>
-                        <a:pt x="21600" y="19949"/>
-                        <a:pt x="17003" y="21600"/>
-                      </a:cubicBezTo>
-                      <a:cubicBezTo>
-                        <a:pt x="11051" y="20016"/>
-                        <a:pt x="10549" y="20016"/>
-                        <a:pt x="4597" y="21600"/>
-                      </a:cubicBezTo>
-                      <a:cubicBezTo>
-                        <a:pt x="4597" y="21600"/>
-                        <a:pt x="4597" y="21600"/>
-                        <a:pt x="0" y="19949"/>
-                      </a:cubicBezTo>
-                      <a:cubicBezTo>
-                        <a:pt x="0" y="19949"/>
-                        <a:pt x="0" y="19949"/>
-                        <a:pt x="4597" y="18293"/>
-                      </a:cubicBezTo>
-                      <a:close/>
-                      <a:moveTo>
-                        <a:pt x="4597" y="14200"/>
-                      </a:moveTo>
-                      <a:cubicBezTo>
-                        <a:pt x="10549" y="15790"/>
-                        <a:pt x="11051" y="15790"/>
-                        <a:pt x="17003" y="14200"/>
-                      </a:cubicBezTo>
-                      <a:cubicBezTo>
-                        <a:pt x="17003" y="14200"/>
-                        <a:pt x="17003" y="14200"/>
-                        <a:pt x="21600" y="15858"/>
-                      </a:cubicBezTo>
-                      <a:cubicBezTo>
-                        <a:pt x="21600" y="15858"/>
-                        <a:pt x="21600" y="15858"/>
-                        <a:pt x="17003" y="17512"/>
-                      </a:cubicBezTo>
-                      <a:cubicBezTo>
-                        <a:pt x="11051" y="15925"/>
-                        <a:pt x="10549" y="15925"/>
-                        <a:pt x="4597" y="17512"/>
-                      </a:cubicBezTo>
-                      <a:cubicBezTo>
-                        <a:pt x="4597" y="17512"/>
-                        <a:pt x="4597" y="17512"/>
-                        <a:pt x="0" y="15858"/>
-                      </a:cubicBezTo>
-                      <a:cubicBezTo>
-                        <a:pt x="0" y="15858"/>
-                        <a:pt x="0" y="15858"/>
-                        <a:pt x="4597" y="14200"/>
-                      </a:cubicBezTo>
-                      <a:close/>
-                      <a:moveTo>
-                        <a:pt x="4597" y="10111"/>
-                      </a:moveTo>
-                      <a:cubicBezTo>
-                        <a:pt x="10549" y="11702"/>
-                        <a:pt x="11051" y="11702"/>
-                        <a:pt x="17003" y="10111"/>
-                      </a:cubicBezTo>
-                      <a:cubicBezTo>
-                        <a:pt x="17003" y="10111"/>
-                        <a:pt x="17003" y="10111"/>
-                        <a:pt x="21600" y="11769"/>
-                      </a:cubicBezTo>
-                      <a:cubicBezTo>
-                        <a:pt x="21600" y="11769"/>
-                        <a:pt x="21600" y="11769"/>
-                        <a:pt x="17003" y="13423"/>
-                      </a:cubicBezTo>
-                      <a:cubicBezTo>
-                        <a:pt x="11051" y="11837"/>
-                        <a:pt x="10549" y="11837"/>
-                        <a:pt x="4597" y="13423"/>
-                      </a:cubicBezTo>
-                      <a:cubicBezTo>
-                        <a:pt x="4597" y="13423"/>
-                        <a:pt x="4597" y="13423"/>
-                        <a:pt x="0" y="11769"/>
-                      </a:cubicBezTo>
-                      <a:cubicBezTo>
-                        <a:pt x="0" y="11769"/>
-                        <a:pt x="0" y="11769"/>
-                        <a:pt x="4597" y="10111"/>
-                      </a:cubicBezTo>
-                      <a:close/>
-                      <a:moveTo>
-                        <a:pt x="2971" y="918"/>
-                      </a:moveTo>
-                      <a:lnTo>
-                        <a:pt x="2971" y="6926"/>
-                      </a:lnTo>
-                      <a:cubicBezTo>
-                        <a:pt x="2971" y="6926"/>
-                        <a:pt x="2971" y="6926"/>
-                        <a:pt x="3980" y="6926"/>
-                      </a:cubicBezTo>
-                      <a:cubicBezTo>
-                        <a:pt x="4430" y="6926"/>
-                        <a:pt x="4695" y="6878"/>
-                        <a:pt x="4903" y="6708"/>
-                      </a:cubicBezTo>
-                      <a:cubicBezTo>
-                        <a:pt x="5220" y="6447"/>
-                        <a:pt x="5249" y="5917"/>
-                        <a:pt x="5249" y="4849"/>
-                      </a:cubicBezTo>
-                      <a:cubicBezTo>
-                        <a:pt x="5249" y="4849"/>
-                        <a:pt x="5249" y="4849"/>
-                        <a:pt x="5249" y="2990"/>
-                      </a:cubicBezTo>
-                      <a:cubicBezTo>
-                        <a:pt x="5249" y="1926"/>
-                        <a:pt x="5220" y="1396"/>
-                        <a:pt x="4903" y="1135"/>
-                      </a:cubicBezTo>
-                      <a:cubicBezTo>
-                        <a:pt x="4695" y="965"/>
-                        <a:pt x="4430" y="918"/>
-                        <a:pt x="3980" y="918"/>
-                      </a:cubicBezTo>
-                      <a:cubicBezTo>
-                        <a:pt x="3980" y="918"/>
-                        <a:pt x="3980" y="918"/>
-                        <a:pt x="2971" y="918"/>
-                      </a:cubicBezTo>
-                      <a:close/>
-                      <a:moveTo>
-                        <a:pt x="8068" y="0"/>
-                      </a:moveTo>
-                      <a:cubicBezTo>
-                        <a:pt x="8068" y="0"/>
-                        <a:pt x="8068" y="0"/>
-                        <a:pt x="13456" y="0"/>
-                      </a:cubicBezTo>
-                      <a:cubicBezTo>
-                        <a:pt x="13542" y="0"/>
-                        <a:pt x="13594" y="16"/>
-                        <a:pt x="13635" y="44"/>
-                      </a:cubicBezTo>
-                      <a:cubicBezTo>
-                        <a:pt x="13669" y="67"/>
-                        <a:pt x="13698" y="103"/>
-                        <a:pt x="13698" y="162"/>
-                      </a:cubicBezTo>
-                      <a:cubicBezTo>
-                        <a:pt x="13698" y="162"/>
-                        <a:pt x="13698" y="162"/>
-                        <a:pt x="13698" y="827"/>
-                      </a:cubicBezTo>
-                      <a:cubicBezTo>
-                        <a:pt x="13698" y="886"/>
-                        <a:pt x="13669" y="922"/>
-                        <a:pt x="13635" y="945"/>
-                      </a:cubicBezTo>
-                      <a:cubicBezTo>
-                        <a:pt x="13594" y="973"/>
-                        <a:pt x="13542" y="989"/>
-                        <a:pt x="13456" y="989"/>
-                      </a:cubicBezTo>
-                      <a:cubicBezTo>
-                        <a:pt x="13456" y="989"/>
-                        <a:pt x="13456" y="989"/>
-                        <a:pt x="11731" y="989"/>
-                      </a:cubicBezTo>
-                      <a:cubicBezTo>
-                        <a:pt x="11731" y="989"/>
-                        <a:pt x="11731" y="989"/>
-                        <a:pt x="11731" y="7681"/>
-                      </a:cubicBezTo>
-                      <a:cubicBezTo>
-                        <a:pt x="11731" y="7740"/>
-                        <a:pt x="11708" y="7776"/>
-                        <a:pt x="11667" y="7800"/>
-                      </a:cubicBezTo>
-                      <a:cubicBezTo>
-                        <a:pt x="11633" y="7827"/>
-                        <a:pt x="11581" y="7843"/>
-                        <a:pt x="11494" y="7843"/>
-                      </a:cubicBezTo>
-                      <a:cubicBezTo>
-                        <a:pt x="11494" y="7843"/>
-                        <a:pt x="11494" y="7843"/>
-                        <a:pt x="10029" y="7843"/>
-                      </a:cubicBezTo>
-                      <a:cubicBezTo>
-                        <a:pt x="9943" y="7843"/>
-                        <a:pt x="9891" y="7827"/>
-                        <a:pt x="9850" y="7800"/>
-                      </a:cubicBezTo>
-                      <a:cubicBezTo>
-                        <a:pt x="9810" y="7776"/>
-                        <a:pt x="9787" y="7740"/>
-                        <a:pt x="9787" y="7681"/>
-                      </a:cubicBezTo>
-                      <a:cubicBezTo>
-                        <a:pt x="9787" y="7681"/>
-                        <a:pt x="9787" y="7681"/>
-                        <a:pt x="9787" y="989"/>
-                      </a:cubicBezTo>
-                      <a:cubicBezTo>
-                        <a:pt x="9787" y="989"/>
-                        <a:pt x="9787" y="989"/>
-                        <a:pt x="8068" y="989"/>
-                      </a:cubicBezTo>
-                      <a:cubicBezTo>
-                        <a:pt x="7981" y="989"/>
-                        <a:pt x="7929" y="973"/>
-                        <a:pt x="7889" y="945"/>
-                      </a:cubicBezTo>
-                      <a:cubicBezTo>
-                        <a:pt x="7849" y="922"/>
-                        <a:pt x="7825" y="886"/>
-                        <a:pt x="7825" y="827"/>
-                      </a:cubicBezTo>
-                      <a:cubicBezTo>
-                        <a:pt x="7825" y="827"/>
-                        <a:pt x="7825" y="827"/>
-                        <a:pt x="7825" y="162"/>
-                      </a:cubicBezTo>
-                      <a:cubicBezTo>
-                        <a:pt x="7825" y="103"/>
-                        <a:pt x="7849" y="67"/>
-                        <a:pt x="7889" y="44"/>
-                      </a:cubicBezTo>
-                      <a:cubicBezTo>
-                        <a:pt x="7929" y="16"/>
-                        <a:pt x="7981" y="0"/>
-                        <a:pt x="8068" y="0"/>
-                      </a:cubicBezTo>
-                      <a:close/>
-                      <a:moveTo>
-                        <a:pt x="1390" y="0"/>
-                      </a:moveTo>
-                      <a:cubicBezTo>
-                        <a:pt x="1390" y="0"/>
-                        <a:pt x="1390" y="0"/>
-                        <a:pt x="4257" y="0"/>
-                      </a:cubicBezTo>
-                      <a:cubicBezTo>
-                        <a:pt x="5370" y="0"/>
-                        <a:pt x="6051" y="174"/>
-                        <a:pt x="6466" y="538"/>
-                      </a:cubicBezTo>
-                      <a:cubicBezTo>
-                        <a:pt x="7072" y="1036"/>
-                        <a:pt x="7089" y="1843"/>
-                        <a:pt x="7089" y="3077"/>
-                      </a:cubicBezTo>
-                      <a:cubicBezTo>
-                        <a:pt x="7089" y="3077"/>
-                        <a:pt x="7089" y="3077"/>
-                        <a:pt x="7089" y="4766"/>
-                      </a:cubicBezTo>
-                      <a:cubicBezTo>
-                        <a:pt x="7089" y="6000"/>
-                        <a:pt x="7072" y="6807"/>
-                        <a:pt x="6466" y="7305"/>
-                      </a:cubicBezTo>
-                      <a:cubicBezTo>
-                        <a:pt x="6051" y="7669"/>
-                        <a:pt x="5370" y="7843"/>
-                        <a:pt x="4257" y="7843"/>
-                      </a:cubicBezTo>
-                      <a:cubicBezTo>
-                        <a:pt x="4257" y="7843"/>
-                        <a:pt x="4257" y="7843"/>
-                        <a:pt x="1390" y="7843"/>
-                      </a:cubicBezTo>
-                      <a:cubicBezTo>
-                        <a:pt x="1304" y="7843"/>
-                        <a:pt x="1252" y="7827"/>
-                        <a:pt x="1217" y="7800"/>
-                      </a:cubicBezTo>
-                      <a:cubicBezTo>
-                        <a:pt x="1177" y="7776"/>
-                        <a:pt x="1154" y="7740"/>
-                        <a:pt x="1154" y="7681"/>
-                      </a:cubicBezTo>
-                      <a:cubicBezTo>
-                        <a:pt x="1154" y="7681"/>
-                        <a:pt x="1154" y="7681"/>
-                        <a:pt x="1154" y="162"/>
-                      </a:cubicBezTo>
-                      <a:cubicBezTo>
-                        <a:pt x="1154" y="103"/>
-                        <a:pt x="1177" y="67"/>
-                        <a:pt x="1217" y="44"/>
-                      </a:cubicBezTo>
-                      <a:cubicBezTo>
-                        <a:pt x="1252" y="16"/>
-                        <a:pt x="1304" y="0"/>
-                        <a:pt x="1390" y="0"/>
-                      </a:cubicBezTo>
-                      <a:close/>
-                      <a:moveTo>
-                        <a:pt x="14706" y="0"/>
-                      </a:moveTo>
-                      <a:cubicBezTo>
-                        <a:pt x="14706" y="0"/>
-                        <a:pt x="14706" y="0"/>
-                        <a:pt x="16045" y="0"/>
-                      </a:cubicBezTo>
-                      <a:cubicBezTo>
-                        <a:pt x="16131" y="0"/>
-                        <a:pt x="16183" y="16"/>
-                        <a:pt x="16224" y="44"/>
-                      </a:cubicBezTo>
-                      <a:cubicBezTo>
-                        <a:pt x="16264" y="67"/>
-                        <a:pt x="16287" y="103"/>
-                        <a:pt x="16287" y="162"/>
-                      </a:cubicBezTo>
-                      <a:cubicBezTo>
-                        <a:pt x="16287" y="162"/>
-                        <a:pt x="16287" y="162"/>
-                        <a:pt x="16287" y="5712"/>
-                      </a:cubicBezTo>
-                      <a:cubicBezTo>
-                        <a:pt x="16287" y="6314"/>
-                        <a:pt x="16368" y="6646"/>
-                        <a:pt x="16627" y="6844"/>
-                      </a:cubicBezTo>
-                      <a:cubicBezTo>
-                        <a:pt x="16818" y="6990"/>
-                        <a:pt x="17072" y="7053"/>
-                        <a:pt x="17406" y="7053"/>
-                      </a:cubicBezTo>
-                      <a:cubicBezTo>
-                        <a:pt x="17776" y="7053"/>
-                        <a:pt x="18041" y="6982"/>
-                        <a:pt x="18226" y="6844"/>
-                      </a:cubicBezTo>
-                      <a:cubicBezTo>
-                        <a:pt x="18503" y="6638"/>
-                        <a:pt x="18566" y="6294"/>
-                        <a:pt x="18566" y="5712"/>
-                      </a:cubicBezTo>
-                      <a:cubicBezTo>
-                        <a:pt x="18566" y="5712"/>
-                        <a:pt x="18566" y="5712"/>
-                        <a:pt x="18566" y="162"/>
-                      </a:cubicBezTo>
-                      <a:cubicBezTo>
-                        <a:pt x="18566" y="103"/>
-                        <a:pt x="18589" y="67"/>
-                        <a:pt x="18630" y="44"/>
-                      </a:cubicBezTo>
-                      <a:cubicBezTo>
-                        <a:pt x="18664" y="16"/>
-                        <a:pt x="18722" y="0"/>
-                        <a:pt x="18803" y="0"/>
-                      </a:cubicBezTo>
-                      <a:cubicBezTo>
-                        <a:pt x="18803" y="0"/>
-                        <a:pt x="18803" y="0"/>
-                        <a:pt x="20147" y="0"/>
-                      </a:cubicBezTo>
-                      <a:cubicBezTo>
-                        <a:pt x="20234" y="0"/>
-                        <a:pt x="20286" y="16"/>
-                        <a:pt x="20320" y="44"/>
-                      </a:cubicBezTo>
-                      <a:cubicBezTo>
-                        <a:pt x="20361" y="67"/>
-                        <a:pt x="20384" y="103"/>
-                        <a:pt x="20384" y="162"/>
-                      </a:cubicBezTo>
-                      <a:cubicBezTo>
-                        <a:pt x="20384" y="162"/>
-                        <a:pt x="20384" y="162"/>
-                        <a:pt x="20384" y="5716"/>
-                      </a:cubicBezTo>
-                      <a:cubicBezTo>
-                        <a:pt x="20384" y="6464"/>
-                        <a:pt x="20257" y="6962"/>
-                        <a:pt x="19732" y="7382"/>
-                      </a:cubicBezTo>
-                      <a:cubicBezTo>
-                        <a:pt x="19287" y="7738"/>
-                        <a:pt x="18560" y="7943"/>
-                        <a:pt x="17430" y="7943"/>
-                      </a:cubicBezTo>
-                      <a:cubicBezTo>
-                        <a:pt x="16316" y="7943"/>
-                        <a:pt x="15583" y="7750"/>
-                        <a:pt x="15093" y="7382"/>
-                      </a:cubicBezTo>
-                      <a:cubicBezTo>
-                        <a:pt x="14625" y="7030"/>
-                        <a:pt x="14469" y="6523"/>
-                        <a:pt x="14469" y="5716"/>
-                      </a:cubicBezTo>
-                      <a:cubicBezTo>
-                        <a:pt x="14469" y="5716"/>
-                        <a:pt x="14469" y="5716"/>
-                        <a:pt x="14469" y="162"/>
-                      </a:cubicBezTo>
-                      <a:cubicBezTo>
-                        <a:pt x="14469" y="103"/>
-                        <a:pt x="14493" y="67"/>
-                        <a:pt x="14527" y="44"/>
-                      </a:cubicBezTo>
-                      <a:cubicBezTo>
-                        <a:pt x="14568" y="16"/>
-                        <a:pt x="14620" y="0"/>
-                        <a:pt x="14706" y="0"/>
-                      </a:cubicBezTo>
-                      <a:close/>
-                    </a:path>
-                  </a:pathLst>
-                </a:custGeom>
-                <a:solidFill>
-                  <a:schemeClr val="accent1"/>
-                </a:solidFill>
-                <a:ln w="12700" cap="flat">
-                  <a:noFill/>
-                  <a:miter lim="400000"/>
-                </a:ln>
-                <a:effectLst/>
-              </p:spPr>
-              <p:txBody>
-                <a:bodyPr wrap="square" lIns="46799" tIns="46799" rIns="46799" bIns="46799" numCol="1" anchor="t">
-                  <a:noAutofit/>
-                </a:bodyPr>
-                <a:lstStyle/>
-                <a:p>
-                  <a:pPr>
-                    <a:defRPr>
-                      <a:latin typeface="Verdana"/>
-                      <a:ea typeface="Verdana"/>
-                      <a:cs typeface="Verdana"/>
-                      <a:sym typeface="Verdana"/>
-                    </a:defRPr>
-                  </a:pPr>
-                </a:p>
-              </p:txBody>
-            </p:sp>
-            <p:pic>
-              <p:nvPicPr>
-                <p:cNvPr id="111" name="logoill.pdf" descr="logoill.pdf"/>
-                <p:cNvPicPr>
-                  <a:picLocks noChangeAspect="0"/>
-                </p:cNvPicPr>
-                <p:nvPr/>
-              </p:nvPicPr>
-              <p:blipFill>
-                <a:blip r:embed="rId4">
-                  <a:extLst/>
-                </a:blip>
-                <a:stretch>
-                  <a:fillRect/>
-                </a:stretch>
-              </p:blipFill>
-              <p:spPr>
-                <a:xfrm>
-                  <a:off x="486613" y="459579"/>
-                  <a:ext cx="164286" cy="157037"/>
-                </a:xfrm>
-                <a:prstGeom prst="rect">
-                  <a:avLst/>
-                </a:prstGeom>
-                <a:ln w="12700" cap="flat">
-                  <a:noFill/>
-                  <a:miter lim="400000"/>
-                </a:ln>
-                <a:effectLst/>
-              </p:spPr>
-            </p:pic>
-            <p:pic>
-              <p:nvPicPr>
-                <p:cNvPr id="112" name="mcstas-logo.pdf" descr="mcstas-logo.pdf"/>
-                <p:cNvPicPr>
-                  <a:picLocks noChangeAspect="0"/>
-                </p:cNvPicPr>
-                <p:nvPr/>
-              </p:nvPicPr>
-              <p:blipFill>
-                <a:blip r:embed="rId5">
-                  <a:extLst/>
-                </a:blip>
-                <a:srcRect l="0" t="0" r="0" b="0"/>
-                <a:stretch>
-                  <a:fillRect/>
-                </a:stretch>
-              </p:blipFill>
-              <p:spPr>
-                <a:xfrm>
-                  <a:off x="0" y="0"/>
-                  <a:ext cx="725762" cy="426459"/>
-                </a:xfrm>
-                <a:prstGeom prst="rect">
-                  <a:avLst/>
-                </a:prstGeom>
-                <a:ln w="12700" cap="flat">
-                  <a:noFill/>
-                  <a:miter lim="400000"/>
-                </a:ln>
-                <a:effectLst/>
-              </p:spPr>
-            </p:pic>
-            <p:pic>
-              <p:nvPicPr>
-                <p:cNvPr id="113" name="PSI-Logo_trans.png" descr="PSI-Logo_trans.png"/>
-                <p:cNvPicPr>
-                  <a:picLocks noChangeAspect="0"/>
-                </p:cNvPicPr>
-                <p:nvPr/>
-              </p:nvPicPr>
-              <p:blipFill>
-                <a:blip r:embed="rId6">
-                  <a:extLst/>
-                </a:blip>
-                <a:stretch>
-                  <a:fillRect/>
-                </a:stretch>
-              </p:blipFill>
-              <p:spPr>
-                <a:xfrm>
-                  <a:off x="270340" y="501170"/>
-                  <a:ext cx="204490" cy="74865"/>
-                </a:xfrm>
-                <a:prstGeom prst="rect">
-                  <a:avLst/>
-                </a:prstGeom>
-                <a:ln w="12700" cap="flat">
-                  <a:noFill/>
-                  <a:miter lim="400000"/>
-                </a:ln>
-                <a:effectLst/>
-              </p:spPr>
-            </p:pic>
-            <p:pic>
-              <p:nvPicPr>
-                <p:cNvPr id="114" name="ku-logo.pdf" descr="ku-logo.pdf"/>
-                <p:cNvPicPr>
-                  <a:picLocks noChangeAspect="0"/>
-                </p:cNvPicPr>
-                <p:nvPr/>
-              </p:nvPicPr>
-              <p:blipFill>
-                <a:blip r:embed="rId7">
-                  <a:extLst/>
-                </a:blip>
-                <a:stretch>
-                  <a:fillRect/>
-                </a:stretch>
-              </p:blipFill>
-              <p:spPr>
-                <a:xfrm>
-                  <a:off x="131011" y="451261"/>
-                  <a:ext cx="128373" cy="174419"/>
-                </a:xfrm>
-                <a:prstGeom prst="rect">
-                  <a:avLst/>
-                </a:prstGeom>
-                <a:ln w="12700" cap="flat">
-                  <a:noFill/>
-                  <a:miter lim="400000"/>
-                </a:ln>
-                <a:effectLst/>
-              </p:spPr>
-            </p:pic>
-            <p:pic>
-              <p:nvPicPr>
-                <p:cNvPr id="115" name="ESS_Logo_Frugal_Blue_cmyk.png" descr="ESS_Logo_Frugal_Blue_cmyk.png"/>
-                <p:cNvPicPr>
-                  <a:picLocks noChangeAspect="0"/>
-                </p:cNvPicPr>
-                <p:nvPr/>
-              </p:nvPicPr>
-              <p:blipFill>
-                <a:blip r:embed="rId8">
-                  <a:extLst/>
-                </a:blip>
-                <a:stretch>
-                  <a:fillRect/>
-                </a:stretch>
-              </p:blipFill>
-              <p:spPr>
-                <a:xfrm>
-                  <a:off x="214914" y="607364"/>
-                  <a:ext cx="279297" cy="150286"/>
-                </a:xfrm>
-                <a:prstGeom prst="rect">
-                  <a:avLst/>
-                </a:prstGeom>
-                <a:ln w="12700" cap="flat">
-                  <a:noFill/>
-                  <a:miter lim="400000"/>
-                </a:ln>
-                <a:effectLst/>
-              </p:spPr>
-            </p:pic>
-          </p:grpSp>
-        </p:grpSp>
-        <p:pic>
-          <p:nvPicPr>
-            <p:cNvPr id="118" name="Image" descr="Image"/>
-            <p:cNvPicPr>
-              <a:picLocks noChangeAspect="1"/>
-            </p:cNvPicPr>
-            <p:nvPr/>
-          </p:nvPicPr>
-          <p:blipFill>
-            <a:blip r:embed="rId9">
-              <a:extLst/>
-            </a:blip>
-            <a:srcRect l="0" t="0" r="77004" b="0"/>
-            <a:stretch>
-              <a:fillRect/>
-            </a:stretch>
-          </p:blipFill>
-          <p:spPr>
-            <a:xfrm>
-              <a:off x="44293" y="62025"/>
-              <a:ext cx="617630" cy="611845"/>
-            </a:xfrm>
-            <a:prstGeom prst="rect">
-              <a:avLst/>
-            </a:prstGeom>
-            <a:ln w="12700" cap="flat">
-              <a:noFill/>
-              <a:miter lim="400000"/>
-            </a:ln>
-            <a:effectLst/>
-          </p:spPr>
-        </p:pic>
-      </p:grpSp>
     </p:spTree>
   </p:cSld>
   <p:clrMapOvr>
@@ -8297,56 +9157,9 @@
           </a:ln>
         </p:spPr>
       </p:pic>
-      <p:sp>
-        <p:nvSpPr>
-          <p:cNvPr id="135" name="UserProfile.Offices.Workarea_{{DocumentLanguage}}text"/>
-          <p:cNvSpPr txBox="1"/>
-          <p:nvPr/>
-        </p:nvSpPr>
-        <p:spPr>
-          <a:xfrm>
-            <a:off x="1774725" y="6636099"/>
-            <a:ext cx="3397072" cy="127001"/>
-          </a:xfrm>
-          <a:prstGeom prst="rect">
-            <a:avLst/>
-          </a:prstGeom>
-          <a:ln w="12700">
-            <a:miter lim="400000"/>
-          </a:ln>
-          <a:extLst>
-            <a:ext uri="{C572A759-6A51-4108-AA02-DFA0A04FC94B}">
-              <ma14:wrappingTextBoxFlag xmlns:ma14="http://schemas.microsoft.com/office/mac/drawingml/2011/main" val="1"/>
-            </a:ext>
-          </a:extLst>
-        </p:spPr>
-        <p:txBody>
-          <a:bodyPr lIns="0" tIns="0" rIns="0" bIns="0" anchor="ctr">
-            <a:spAutoFit/>
-          </a:bodyPr>
-          <a:lstStyle>
-            <a:lvl1pPr>
-              <a:spcBef>
-                <a:spcPts val="0"/>
-              </a:spcBef>
-              <a:defRPr b="1" sz="700">
-                <a:solidFill>
-                  <a:srgbClr val="FFFFFF"/>
-                </a:solidFill>
-              </a:defRPr>
-            </a:lvl1pPr>
-          </a:lstStyle>
-          <a:p>
-            <a:pPr/>
-            <a:r>
-              <a:t>2021 ISIS McStas school</a:t>
-            </a:r>
-          </a:p>
-        </p:txBody>
-      </p:sp>
       <p:grpSp>
         <p:nvGrpSpPr>
-          <p:cNvPr id="148" name="Group"/>
+          <p:cNvPr id="147" name="Group"/>
           <p:cNvGrpSpPr/>
           <p:nvPr/>
         </p:nvGrpSpPr>
@@ -8360,7 +9173,7 @@
         </p:grpSpPr>
         <p:pic>
           <p:nvPicPr>
-            <p:cNvPr id="136" name="Image" descr="Image"/>
+            <p:cNvPr id="135" name="Image" descr="Image"/>
             <p:cNvPicPr>
               <a:picLocks noChangeAspect="1"/>
             </p:cNvPicPr>
@@ -8392,7 +9205,7 @@
         </p:pic>
         <p:sp>
           <p:nvSpPr>
-            <p:cNvPr id="137" name="Rectangle"/>
+            <p:cNvPr id="136" name="Rectangle"/>
             <p:cNvSpPr/>
             <p:nvPr/>
           </p:nvSpPr>
@@ -8425,7 +9238,7 @@
         </p:sp>
         <p:grpSp>
           <p:nvGrpSpPr>
-            <p:cNvPr id="146" name="Group"/>
+            <p:cNvPr id="145" name="Group"/>
             <p:cNvGrpSpPr/>
             <p:nvPr/>
           </p:nvGrpSpPr>
@@ -8439,7 +9252,7 @@
           </p:grpSpPr>
           <p:sp>
             <p:nvSpPr>
-              <p:cNvPr id="138" name="2021 Virtual ISIS McStas School"/>
+              <p:cNvPr id="137" name="2021 Virtual ISIS McStas School"/>
               <p:cNvSpPr txBox="1"/>
               <p:nvPr/>
             </p:nvSpPr>
@@ -8494,7 +9307,7 @@
           </p:sp>
           <p:grpSp>
             <p:nvGrpSpPr>
-              <p:cNvPr id="145" name="Group"/>
+              <p:cNvPr id="144" name="Group"/>
               <p:cNvGrpSpPr/>
               <p:nvPr/>
             </p:nvGrpSpPr>
@@ -8508,7 +9321,7 @@
             </p:grpSpPr>
             <p:sp>
               <p:nvSpPr>
-                <p:cNvPr id="139" name="Logo color"/>
+                <p:cNvPr id="138" name="Logo color"/>
                 <p:cNvSpPr/>
                 <p:nvPr/>
               </p:nvSpPr>
@@ -8995,7 +9808,7 @@
             </p:sp>
             <p:pic>
               <p:nvPicPr>
-                <p:cNvPr id="140" name="logoill.pdf" descr="logoill.pdf"/>
+                <p:cNvPr id="139" name="logoill.pdf" descr="logoill.pdf"/>
                 <p:cNvPicPr>
                   <a:picLocks noChangeAspect="0"/>
                 </p:cNvPicPr>
@@ -9026,7 +9839,7 @@
             </p:pic>
             <p:pic>
               <p:nvPicPr>
-                <p:cNvPr id="141" name="mcstas-logo.pdf" descr="mcstas-logo.pdf"/>
+                <p:cNvPr id="140" name="mcstas-logo.pdf" descr="mcstas-logo.pdf"/>
                 <p:cNvPicPr>
                   <a:picLocks noChangeAspect="0"/>
                 </p:cNvPicPr>
@@ -9058,7 +9871,7 @@
             </p:pic>
             <p:pic>
               <p:nvPicPr>
-                <p:cNvPr id="142" name="PSI-Logo_trans.png" descr="PSI-Logo_trans.png"/>
+                <p:cNvPr id="141" name="PSI-Logo_trans.png" descr="PSI-Logo_trans.png"/>
                 <p:cNvPicPr>
                   <a:picLocks noChangeAspect="0"/>
                 </p:cNvPicPr>
@@ -9089,7 +9902,7 @@
             </p:pic>
             <p:pic>
               <p:nvPicPr>
-                <p:cNvPr id="143" name="ku-logo.pdf" descr="ku-logo.pdf"/>
+                <p:cNvPr id="142" name="ku-logo.pdf" descr="ku-logo.pdf"/>
                 <p:cNvPicPr>
                   <a:picLocks noChangeAspect="0"/>
                 </p:cNvPicPr>
@@ -9120,7 +9933,7 @@
             </p:pic>
             <p:pic>
               <p:nvPicPr>
-                <p:cNvPr id="144" name="ESS_Logo_Frugal_Blue_cmyk.png" descr="ESS_Logo_Frugal_Blue_cmyk.png"/>
+                <p:cNvPr id="143" name="ESS_Logo_Frugal_Blue_cmyk.png" descr="ESS_Logo_Frugal_Blue_cmyk.png"/>
                 <p:cNvPicPr>
                   <a:picLocks noChangeAspect="0"/>
                 </p:cNvPicPr>
@@ -9153,7 +9966,7 @@
         </p:grpSp>
         <p:pic>
           <p:nvPicPr>
-            <p:cNvPr id="147" name="Image" descr="Image"/>
+            <p:cNvPr id="146" name="Image" descr="Image"/>
             <p:cNvPicPr>
               <a:picLocks noChangeAspect="1"/>
             </p:cNvPicPr>
@@ -9184,6 +9997,53 @@
           </p:spPr>
         </p:pic>
       </p:grpSp>
+      <p:sp>
+        <p:nvSpPr>
+          <p:cNvPr id="148" name="UserProfile.Offices.Workarea_{{DocumentLanguage}}text"/>
+          <p:cNvSpPr txBox="1"/>
+          <p:nvPr/>
+        </p:nvSpPr>
+        <p:spPr>
+          <a:xfrm>
+            <a:off x="1774725" y="6636099"/>
+            <a:ext cx="3397072" cy="127001"/>
+          </a:xfrm>
+          <a:prstGeom prst="rect">
+            <a:avLst/>
+          </a:prstGeom>
+          <a:ln w="12700">
+            <a:miter lim="400000"/>
+          </a:ln>
+          <a:extLst>
+            <a:ext uri="{C572A759-6A51-4108-AA02-DFA0A04FC94B}">
+              <ma14:wrappingTextBoxFlag xmlns:ma14="http://schemas.microsoft.com/office/mac/drawingml/2011/main" val="1"/>
+            </a:ext>
+          </a:extLst>
+        </p:spPr>
+        <p:txBody>
+          <a:bodyPr lIns="0" tIns="0" rIns="0" bIns="0" anchor="ctr">
+            <a:spAutoFit/>
+          </a:bodyPr>
+          <a:lstStyle>
+            <a:lvl1pPr>
+              <a:spcBef>
+                <a:spcPts val="0"/>
+              </a:spcBef>
+              <a:defRPr b="1" sz="700">
+                <a:solidFill>
+                  <a:srgbClr val="FFFFFF"/>
+                </a:solidFill>
+              </a:defRPr>
+            </a:lvl1pPr>
+          </a:lstStyle>
+          <a:p>
+            <a:pPr/>
+            <a:r>
+              <a:t>2025 ISIS McStas school</a:t>
+            </a:r>
+          </a:p>
+        </p:txBody>
+      </p:sp>
     </p:spTree>
   </p:cSld>
   <p:clrMapOvr>
@@ -10742,7 +11602,7 @@
       </p:grpSp>
       <p:sp>
         <p:nvSpPr>
-          <p:cNvPr id="174" name="2021 ISIS McStas School"/>
+          <p:cNvPr id="174" name="2025 ISIS McStas School"/>
           <p:cNvSpPr txBox="1"/>
           <p:nvPr/>
         </p:nvSpPr>
@@ -10779,7 +11639,7 @@
               <a:defRPr b="1" i="1" sz="1400"/>
             </a:pPr>
             <a:r>
-              <a:t>2021 ISIS</a:t>
+              <a:t>2025 ISIS</a:t>
             </a:r>
             <a:br/>
             <a:r>
@@ -10830,7 +11690,7 @@
           <a:p>
             <a:pPr/>
             <a:r>
-              <a:t>2021 ISIS McStas school</a:t>
+              <a:t>2025 ISIS McStas school</a:t>
             </a:r>
           </a:p>
         </p:txBody>
@@ -11501,9 +12361,849 @@
           </a:ln>
         </p:spPr>
       </p:pic>
+      <p:grpSp>
+        <p:nvGrpSpPr>
+          <p:cNvPr id="200" name="Group"/>
+          <p:cNvGrpSpPr/>
+          <p:nvPr/>
+        </p:nvGrpSpPr>
+        <p:grpSpPr>
+          <a:xfrm>
+            <a:off x="17068" y="935881"/>
+            <a:ext cx="1506786" cy="5584238"/>
+            <a:chOff x="0" y="0"/>
+            <a:chExt cx="1506784" cy="5584236"/>
+          </a:xfrm>
+        </p:grpSpPr>
+        <p:pic>
+          <p:nvPicPr>
+            <p:cNvPr id="188" name="Image" descr="Image"/>
+            <p:cNvPicPr>
+              <a:picLocks noChangeAspect="1"/>
+            </p:cNvPicPr>
+            <p:nvPr/>
+          </p:nvPicPr>
+          <p:blipFill>
+            <a:blip r:embed="rId3">
+              <a:extLst/>
+            </a:blip>
+            <a:srcRect l="0" t="0" r="0" b="0"/>
+            <a:stretch>
+              <a:fillRect/>
+            </a:stretch>
+          </p:blipFill>
+          <p:spPr>
+            <a:xfrm>
+              <a:off x="0" y="0"/>
+              <a:ext cx="1506785" cy="5584237"/>
+            </a:xfrm>
+            <a:prstGeom prst="rect">
+              <a:avLst/>
+            </a:prstGeom>
+            <a:ln w="12700" cap="flat">
+              <a:noFill/>
+              <a:miter lim="400000"/>
+            </a:ln>
+            <a:effectLst/>
+          </p:spPr>
+        </p:pic>
+        <p:sp>
+          <p:nvSpPr>
+            <p:cNvPr id="189" name="Rectangle"/>
+            <p:cNvSpPr/>
+            <p:nvPr/>
+          </p:nvSpPr>
+          <p:spPr>
+            <a:xfrm>
+              <a:off x="26491" y="29555"/>
+              <a:ext cx="1453952" cy="791704"/>
+            </a:xfrm>
+            <a:prstGeom prst="rect">
+              <a:avLst/>
+            </a:prstGeom>
+            <a:solidFill>
+              <a:srgbClr val="FFFFFF"/>
+            </a:solidFill>
+            <a:ln w="12700" cap="flat">
+              <a:noFill/>
+              <a:miter lim="400000"/>
+            </a:ln>
+            <a:effectLst/>
+          </p:spPr>
+          <p:txBody>
+            <a:bodyPr wrap="square" lIns="46799" tIns="46799" rIns="46799" bIns="46799" numCol="1" anchor="ctr">
+              <a:noAutofit/>
+            </a:bodyPr>
+            <a:lstStyle/>
+            <a:p>
+              <a:pPr/>
+            </a:p>
+          </p:txBody>
+        </p:sp>
+        <p:grpSp>
+          <p:nvGrpSpPr>
+            <p:cNvPr id="198" name="Group"/>
+            <p:cNvGrpSpPr/>
+            <p:nvPr/>
+          </p:nvGrpSpPr>
+          <p:grpSpPr>
+            <a:xfrm>
+              <a:off x="161144" y="50051"/>
+              <a:ext cx="1271028" cy="5510910"/>
+              <a:chOff x="0" y="0"/>
+              <a:chExt cx="1271027" cy="5510908"/>
+            </a:xfrm>
+          </p:grpSpPr>
+          <p:sp>
+            <p:nvSpPr>
+              <p:cNvPr id="190" name="2025 ISIS McStas School"/>
+              <p:cNvSpPr txBox="1"/>
+              <p:nvPr/>
+            </p:nvSpPr>
+            <p:spPr>
+              <a:xfrm>
+                <a:off x="0" y="4478221"/>
+                <a:ext cx="1184497" cy="1032688"/>
+              </a:xfrm>
+              <a:prstGeom prst="rect">
+                <a:avLst/>
+              </a:prstGeom>
+              <a:noFill/>
+              <a:ln w="12700" cap="flat">
+                <a:noFill/>
+                <a:miter lim="400000"/>
+              </a:ln>
+              <a:effectLst/>
+              <a:extLst>
+                <a:ext uri="{C572A759-6A51-4108-AA02-DFA0A04FC94B}">
+                  <ma14:wrappingTextBoxFlag xmlns:ma14="http://schemas.microsoft.com/office/mac/drawingml/2011/main" val="1"/>
+                </a:ext>
+              </a:extLst>
+            </p:spPr>
+            <p:txBody>
+              <a:bodyPr wrap="square" lIns="0" tIns="0" rIns="0" bIns="0" numCol="1" anchor="b">
+                <a:normAutofit fontScale="100000" lnSpcReduction="0"/>
+              </a:bodyPr>
+              <a:lstStyle/>
+              <a:p>
+                <a:pPr algn="ctr" defTabSz="521208">
+                  <a:lnSpc>
+                    <a:spcPct val="110000"/>
+                  </a:lnSpc>
+                  <a:spcBef>
+                    <a:spcPts val="0"/>
+                  </a:spcBef>
+                  <a:defRPr b="1" i="1" sz="2109">
+                    <a:solidFill>
+                      <a:srgbClr val="FFFFFF"/>
+                    </a:solidFill>
+                  </a:defRPr>
+                </a:pPr>
+                <a:r>
+                  <a:t>2025 ISIS</a:t>
+                </a:r>
+                <a:br/>
+                <a:r>
+                  <a:t>McStas School</a:t>
+                </a:r>
+              </a:p>
+            </p:txBody>
+          </p:sp>
+          <p:grpSp>
+            <p:nvGrpSpPr>
+              <p:cNvPr id="197" name="Group"/>
+              <p:cNvGrpSpPr/>
+              <p:nvPr/>
+            </p:nvGrpSpPr>
+            <p:grpSpPr>
+              <a:xfrm>
+                <a:off x="545266" y="-1"/>
+                <a:ext cx="725762" cy="757651"/>
+                <a:chOff x="0" y="0"/>
+                <a:chExt cx="725761" cy="757649"/>
+              </a:xfrm>
+            </p:grpSpPr>
+            <p:sp>
+              <p:nvSpPr>
+                <p:cNvPr id="191" name="Logo color"/>
+                <p:cNvSpPr/>
+                <p:nvPr/>
+              </p:nvSpPr>
+              <p:spPr>
+                <a:xfrm>
+                  <a:off x="2507" y="452770"/>
+                  <a:ext cx="117009" cy="170656"/>
+                </a:xfrm>
+                <a:custGeom>
+                  <a:avLst/>
+                  <a:gdLst/>
+                  <a:ahLst/>
+                  <a:cxnLst>
+                    <a:cxn ang="0">
+                      <a:pos x="wd2" y="hd2"/>
+                    </a:cxn>
+                    <a:cxn ang="5400000">
+                      <a:pos x="wd2" y="hd2"/>
+                    </a:cxn>
+                    <a:cxn ang="10800000">
+                      <a:pos x="wd2" y="hd2"/>
+                    </a:cxn>
+                    <a:cxn ang="16200000">
+                      <a:pos x="wd2" y="hd2"/>
+                    </a:cxn>
+                  </a:cxnLst>
+                  <a:rect l="0" t="0" r="r" b="b"/>
+                  <a:pathLst>
+                    <a:path w="21600" h="21600" fill="norm" stroke="1" extrusionOk="0">
+                      <a:moveTo>
+                        <a:pt x="4597" y="18293"/>
+                      </a:moveTo>
+                      <a:cubicBezTo>
+                        <a:pt x="10549" y="19881"/>
+                        <a:pt x="11051" y="19881"/>
+                        <a:pt x="17003" y="18293"/>
+                      </a:cubicBezTo>
+                      <a:cubicBezTo>
+                        <a:pt x="17003" y="18293"/>
+                        <a:pt x="17003" y="18293"/>
+                        <a:pt x="21600" y="19949"/>
+                      </a:cubicBezTo>
+                      <a:cubicBezTo>
+                        <a:pt x="21600" y="19949"/>
+                        <a:pt x="21600" y="19949"/>
+                        <a:pt x="17003" y="21600"/>
+                      </a:cubicBezTo>
+                      <a:cubicBezTo>
+                        <a:pt x="11051" y="20016"/>
+                        <a:pt x="10549" y="20016"/>
+                        <a:pt x="4597" y="21600"/>
+                      </a:cubicBezTo>
+                      <a:cubicBezTo>
+                        <a:pt x="4597" y="21600"/>
+                        <a:pt x="4597" y="21600"/>
+                        <a:pt x="0" y="19949"/>
+                      </a:cubicBezTo>
+                      <a:cubicBezTo>
+                        <a:pt x="0" y="19949"/>
+                        <a:pt x="0" y="19949"/>
+                        <a:pt x="4597" y="18293"/>
+                      </a:cubicBezTo>
+                      <a:close/>
+                      <a:moveTo>
+                        <a:pt x="4597" y="14200"/>
+                      </a:moveTo>
+                      <a:cubicBezTo>
+                        <a:pt x="10549" y="15790"/>
+                        <a:pt x="11051" y="15790"/>
+                        <a:pt x="17003" y="14200"/>
+                      </a:cubicBezTo>
+                      <a:cubicBezTo>
+                        <a:pt x="17003" y="14200"/>
+                        <a:pt x="17003" y="14200"/>
+                        <a:pt x="21600" y="15858"/>
+                      </a:cubicBezTo>
+                      <a:cubicBezTo>
+                        <a:pt x="21600" y="15858"/>
+                        <a:pt x="21600" y="15858"/>
+                        <a:pt x="17003" y="17512"/>
+                      </a:cubicBezTo>
+                      <a:cubicBezTo>
+                        <a:pt x="11051" y="15925"/>
+                        <a:pt x="10549" y="15925"/>
+                        <a:pt x="4597" y="17512"/>
+                      </a:cubicBezTo>
+                      <a:cubicBezTo>
+                        <a:pt x="4597" y="17512"/>
+                        <a:pt x="4597" y="17512"/>
+                        <a:pt x="0" y="15858"/>
+                      </a:cubicBezTo>
+                      <a:cubicBezTo>
+                        <a:pt x="0" y="15858"/>
+                        <a:pt x="0" y="15858"/>
+                        <a:pt x="4597" y="14200"/>
+                      </a:cubicBezTo>
+                      <a:close/>
+                      <a:moveTo>
+                        <a:pt x="4597" y="10111"/>
+                      </a:moveTo>
+                      <a:cubicBezTo>
+                        <a:pt x="10549" y="11702"/>
+                        <a:pt x="11051" y="11702"/>
+                        <a:pt x="17003" y="10111"/>
+                      </a:cubicBezTo>
+                      <a:cubicBezTo>
+                        <a:pt x="17003" y="10111"/>
+                        <a:pt x="17003" y="10111"/>
+                        <a:pt x="21600" y="11769"/>
+                      </a:cubicBezTo>
+                      <a:cubicBezTo>
+                        <a:pt x="21600" y="11769"/>
+                        <a:pt x="21600" y="11769"/>
+                        <a:pt x="17003" y="13423"/>
+                      </a:cubicBezTo>
+                      <a:cubicBezTo>
+                        <a:pt x="11051" y="11837"/>
+                        <a:pt x="10549" y="11837"/>
+                        <a:pt x="4597" y="13423"/>
+                      </a:cubicBezTo>
+                      <a:cubicBezTo>
+                        <a:pt x="4597" y="13423"/>
+                        <a:pt x="4597" y="13423"/>
+                        <a:pt x="0" y="11769"/>
+                      </a:cubicBezTo>
+                      <a:cubicBezTo>
+                        <a:pt x="0" y="11769"/>
+                        <a:pt x="0" y="11769"/>
+                        <a:pt x="4597" y="10111"/>
+                      </a:cubicBezTo>
+                      <a:close/>
+                      <a:moveTo>
+                        <a:pt x="2971" y="918"/>
+                      </a:moveTo>
+                      <a:lnTo>
+                        <a:pt x="2971" y="6926"/>
+                      </a:lnTo>
+                      <a:cubicBezTo>
+                        <a:pt x="2971" y="6926"/>
+                        <a:pt x="2971" y="6926"/>
+                        <a:pt x="3980" y="6926"/>
+                      </a:cubicBezTo>
+                      <a:cubicBezTo>
+                        <a:pt x="4430" y="6926"/>
+                        <a:pt x="4695" y="6878"/>
+                        <a:pt x="4903" y="6708"/>
+                      </a:cubicBezTo>
+                      <a:cubicBezTo>
+                        <a:pt x="5220" y="6447"/>
+                        <a:pt x="5249" y="5917"/>
+                        <a:pt x="5249" y="4849"/>
+                      </a:cubicBezTo>
+                      <a:cubicBezTo>
+                        <a:pt x="5249" y="4849"/>
+                        <a:pt x="5249" y="4849"/>
+                        <a:pt x="5249" y="2990"/>
+                      </a:cubicBezTo>
+                      <a:cubicBezTo>
+                        <a:pt x="5249" y="1926"/>
+                        <a:pt x="5220" y="1396"/>
+                        <a:pt x="4903" y="1135"/>
+                      </a:cubicBezTo>
+                      <a:cubicBezTo>
+                        <a:pt x="4695" y="965"/>
+                        <a:pt x="4430" y="918"/>
+                        <a:pt x="3980" y="918"/>
+                      </a:cubicBezTo>
+                      <a:cubicBezTo>
+                        <a:pt x="3980" y="918"/>
+                        <a:pt x="3980" y="918"/>
+                        <a:pt x="2971" y="918"/>
+                      </a:cubicBezTo>
+                      <a:close/>
+                      <a:moveTo>
+                        <a:pt x="8068" y="0"/>
+                      </a:moveTo>
+                      <a:cubicBezTo>
+                        <a:pt x="8068" y="0"/>
+                        <a:pt x="8068" y="0"/>
+                        <a:pt x="13456" y="0"/>
+                      </a:cubicBezTo>
+                      <a:cubicBezTo>
+                        <a:pt x="13542" y="0"/>
+                        <a:pt x="13594" y="16"/>
+                        <a:pt x="13635" y="44"/>
+                      </a:cubicBezTo>
+                      <a:cubicBezTo>
+                        <a:pt x="13669" y="67"/>
+                        <a:pt x="13698" y="103"/>
+                        <a:pt x="13698" y="162"/>
+                      </a:cubicBezTo>
+                      <a:cubicBezTo>
+                        <a:pt x="13698" y="162"/>
+                        <a:pt x="13698" y="162"/>
+                        <a:pt x="13698" y="827"/>
+                      </a:cubicBezTo>
+                      <a:cubicBezTo>
+                        <a:pt x="13698" y="886"/>
+                        <a:pt x="13669" y="922"/>
+                        <a:pt x="13635" y="945"/>
+                      </a:cubicBezTo>
+                      <a:cubicBezTo>
+                        <a:pt x="13594" y="973"/>
+                        <a:pt x="13542" y="989"/>
+                        <a:pt x="13456" y="989"/>
+                      </a:cubicBezTo>
+                      <a:cubicBezTo>
+                        <a:pt x="13456" y="989"/>
+                        <a:pt x="13456" y="989"/>
+                        <a:pt x="11731" y="989"/>
+                      </a:cubicBezTo>
+                      <a:cubicBezTo>
+                        <a:pt x="11731" y="989"/>
+                        <a:pt x="11731" y="989"/>
+                        <a:pt x="11731" y="7681"/>
+                      </a:cubicBezTo>
+                      <a:cubicBezTo>
+                        <a:pt x="11731" y="7740"/>
+                        <a:pt x="11708" y="7776"/>
+                        <a:pt x="11667" y="7800"/>
+                      </a:cubicBezTo>
+                      <a:cubicBezTo>
+                        <a:pt x="11633" y="7827"/>
+                        <a:pt x="11581" y="7843"/>
+                        <a:pt x="11494" y="7843"/>
+                      </a:cubicBezTo>
+                      <a:cubicBezTo>
+                        <a:pt x="11494" y="7843"/>
+                        <a:pt x="11494" y="7843"/>
+                        <a:pt x="10029" y="7843"/>
+                      </a:cubicBezTo>
+                      <a:cubicBezTo>
+                        <a:pt x="9943" y="7843"/>
+                        <a:pt x="9891" y="7827"/>
+                        <a:pt x="9850" y="7800"/>
+                      </a:cubicBezTo>
+                      <a:cubicBezTo>
+                        <a:pt x="9810" y="7776"/>
+                        <a:pt x="9787" y="7740"/>
+                        <a:pt x="9787" y="7681"/>
+                      </a:cubicBezTo>
+                      <a:cubicBezTo>
+                        <a:pt x="9787" y="7681"/>
+                        <a:pt x="9787" y="7681"/>
+                        <a:pt x="9787" y="989"/>
+                      </a:cubicBezTo>
+                      <a:cubicBezTo>
+                        <a:pt x="9787" y="989"/>
+                        <a:pt x="9787" y="989"/>
+                        <a:pt x="8068" y="989"/>
+                      </a:cubicBezTo>
+                      <a:cubicBezTo>
+                        <a:pt x="7981" y="989"/>
+                        <a:pt x="7929" y="973"/>
+                        <a:pt x="7889" y="945"/>
+                      </a:cubicBezTo>
+                      <a:cubicBezTo>
+                        <a:pt x="7849" y="922"/>
+                        <a:pt x="7825" y="886"/>
+                        <a:pt x="7825" y="827"/>
+                      </a:cubicBezTo>
+                      <a:cubicBezTo>
+                        <a:pt x="7825" y="827"/>
+                        <a:pt x="7825" y="827"/>
+                        <a:pt x="7825" y="162"/>
+                      </a:cubicBezTo>
+                      <a:cubicBezTo>
+                        <a:pt x="7825" y="103"/>
+                        <a:pt x="7849" y="67"/>
+                        <a:pt x="7889" y="44"/>
+                      </a:cubicBezTo>
+                      <a:cubicBezTo>
+                        <a:pt x="7929" y="16"/>
+                        <a:pt x="7981" y="0"/>
+                        <a:pt x="8068" y="0"/>
+                      </a:cubicBezTo>
+                      <a:close/>
+                      <a:moveTo>
+                        <a:pt x="1390" y="0"/>
+                      </a:moveTo>
+                      <a:cubicBezTo>
+                        <a:pt x="1390" y="0"/>
+                        <a:pt x="1390" y="0"/>
+                        <a:pt x="4257" y="0"/>
+                      </a:cubicBezTo>
+                      <a:cubicBezTo>
+                        <a:pt x="5370" y="0"/>
+                        <a:pt x="6051" y="174"/>
+                        <a:pt x="6466" y="538"/>
+                      </a:cubicBezTo>
+                      <a:cubicBezTo>
+                        <a:pt x="7072" y="1036"/>
+                        <a:pt x="7089" y="1843"/>
+                        <a:pt x="7089" y="3077"/>
+                      </a:cubicBezTo>
+                      <a:cubicBezTo>
+                        <a:pt x="7089" y="3077"/>
+                        <a:pt x="7089" y="3077"/>
+                        <a:pt x="7089" y="4766"/>
+                      </a:cubicBezTo>
+                      <a:cubicBezTo>
+                        <a:pt x="7089" y="6000"/>
+                        <a:pt x="7072" y="6807"/>
+                        <a:pt x="6466" y="7305"/>
+                      </a:cubicBezTo>
+                      <a:cubicBezTo>
+                        <a:pt x="6051" y="7669"/>
+                        <a:pt x="5370" y="7843"/>
+                        <a:pt x="4257" y="7843"/>
+                      </a:cubicBezTo>
+                      <a:cubicBezTo>
+                        <a:pt x="4257" y="7843"/>
+                        <a:pt x="4257" y="7843"/>
+                        <a:pt x="1390" y="7843"/>
+                      </a:cubicBezTo>
+                      <a:cubicBezTo>
+                        <a:pt x="1304" y="7843"/>
+                        <a:pt x="1252" y="7827"/>
+                        <a:pt x="1217" y="7800"/>
+                      </a:cubicBezTo>
+                      <a:cubicBezTo>
+                        <a:pt x="1177" y="7776"/>
+                        <a:pt x="1154" y="7740"/>
+                        <a:pt x="1154" y="7681"/>
+                      </a:cubicBezTo>
+                      <a:cubicBezTo>
+                        <a:pt x="1154" y="7681"/>
+                        <a:pt x="1154" y="7681"/>
+                        <a:pt x="1154" y="162"/>
+                      </a:cubicBezTo>
+                      <a:cubicBezTo>
+                        <a:pt x="1154" y="103"/>
+                        <a:pt x="1177" y="67"/>
+                        <a:pt x="1217" y="44"/>
+                      </a:cubicBezTo>
+                      <a:cubicBezTo>
+                        <a:pt x="1252" y="16"/>
+                        <a:pt x="1304" y="0"/>
+                        <a:pt x="1390" y="0"/>
+                      </a:cubicBezTo>
+                      <a:close/>
+                      <a:moveTo>
+                        <a:pt x="14706" y="0"/>
+                      </a:moveTo>
+                      <a:cubicBezTo>
+                        <a:pt x="14706" y="0"/>
+                        <a:pt x="14706" y="0"/>
+                        <a:pt x="16045" y="0"/>
+                      </a:cubicBezTo>
+                      <a:cubicBezTo>
+                        <a:pt x="16131" y="0"/>
+                        <a:pt x="16183" y="16"/>
+                        <a:pt x="16224" y="44"/>
+                      </a:cubicBezTo>
+                      <a:cubicBezTo>
+                        <a:pt x="16264" y="67"/>
+                        <a:pt x="16287" y="103"/>
+                        <a:pt x="16287" y="162"/>
+                      </a:cubicBezTo>
+                      <a:cubicBezTo>
+                        <a:pt x="16287" y="162"/>
+                        <a:pt x="16287" y="162"/>
+                        <a:pt x="16287" y="5712"/>
+                      </a:cubicBezTo>
+                      <a:cubicBezTo>
+                        <a:pt x="16287" y="6314"/>
+                        <a:pt x="16368" y="6646"/>
+                        <a:pt x="16627" y="6844"/>
+                      </a:cubicBezTo>
+                      <a:cubicBezTo>
+                        <a:pt x="16818" y="6990"/>
+                        <a:pt x="17072" y="7053"/>
+                        <a:pt x="17406" y="7053"/>
+                      </a:cubicBezTo>
+                      <a:cubicBezTo>
+                        <a:pt x="17776" y="7053"/>
+                        <a:pt x="18041" y="6982"/>
+                        <a:pt x="18226" y="6844"/>
+                      </a:cubicBezTo>
+                      <a:cubicBezTo>
+                        <a:pt x="18503" y="6638"/>
+                        <a:pt x="18566" y="6294"/>
+                        <a:pt x="18566" y="5712"/>
+                      </a:cubicBezTo>
+                      <a:cubicBezTo>
+                        <a:pt x="18566" y="5712"/>
+                        <a:pt x="18566" y="5712"/>
+                        <a:pt x="18566" y="162"/>
+                      </a:cubicBezTo>
+                      <a:cubicBezTo>
+                        <a:pt x="18566" y="103"/>
+                        <a:pt x="18589" y="67"/>
+                        <a:pt x="18630" y="44"/>
+                      </a:cubicBezTo>
+                      <a:cubicBezTo>
+                        <a:pt x="18664" y="16"/>
+                        <a:pt x="18722" y="0"/>
+                        <a:pt x="18803" y="0"/>
+                      </a:cubicBezTo>
+                      <a:cubicBezTo>
+                        <a:pt x="18803" y="0"/>
+                        <a:pt x="18803" y="0"/>
+                        <a:pt x="20147" y="0"/>
+                      </a:cubicBezTo>
+                      <a:cubicBezTo>
+                        <a:pt x="20234" y="0"/>
+                        <a:pt x="20286" y="16"/>
+                        <a:pt x="20320" y="44"/>
+                      </a:cubicBezTo>
+                      <a:cubicBezTo>
+                        <a:pt x="20361" y="67"/>
+                        <a:pt x="20384" y="103"/>
+                        <a:pt x="20384" y="162"/>
+                      </a:cubicBezTo>
+                      <a:cubicBezTo>
+                        <a:pt x="20384" y="162"/>
+                        <a:pt x="20384" y="162"/>
+                        <a:pt x="20384" y="5716"/>
+                      </a:cubicBezTo>
+                      <a:cubicBezTo>
+                        <a:pt x="20384" y="6464"/>
+                        <a:pt x="20257" y="6962"/>
+                        <a:pt x="19732" y="7382"/>
+                      </a:cubicBezTo>
+                      <a:cubicBezTo>
+                        <a:pt x="19287" y="7738"/>
+                        <a:pt x="18560" y="7943"/>
+                        <a:pt x="17430" y="7943"/>
+                      </a:cubicBezTo>
+                      <a:cubicBezTo>
+                        <a:pt x="16316" y="7943"/>
+                        <a:pt x="15583" y="7750"/>
+                        <a:pt x="15093" y="7382"/>
+                      </a:cubicBezTo>
+                      <a:cubicBezTo>
+                        <a:pt x="14625" y="7030"/>
+                        <a:pt x="14469" y="6523"/>
+                        <a:pt x="14469" y="5716"/>
+                      </a:cubicBezTo>
+                      <a:cubicBezTo>
+                        <a:pt x="14469" y="5716"/>
+                        <a:pt x="14469" y="5716"/>
+                        <a:pt x="14469" y="162"/>
+                      </a:cubicBezTo>
+                      <a:cubicBezTo>
+                        <a:pt x="14469" y="103"/>
+                        <a:pt x="14493" y="67"/>
+                        <a:pt x="14527" y="44"/>
+                      </a:cubicBezTo>
+                      <a:cubicBezTo>
+                        <a:pt x="14568" y="16"/>
+                        <a:pt x="14620" y="0"/>
+                        <a:pt x="14706" y="0"/>
+                      </a:cubicBezTo>
+                      <a:close/>
+                    </a:path>
+                  </a:pathLst>
+                </a:custGeom>
+                <a:solidFill>
+                  <a:schemeClr val="accent1"/>
+                </a:solidFill>
+                <a:ln w="12700" cap="flat">
+                  <a:noFill/>
+                  <a:miter lim="400000"/>
+                </a:ln>
+                <a:effectLst/>
+              </p:spPr>
+              <p:txBody>
+                <a:bodyPr wrap="square" lIns="46799" tIns="46799" rIns="46799" bIns="46799" numCol="1" anchor="t">
+                  <a:noAutofit/>
+                </a:bodyPr>
+                <a:lstStyle/>
+                <a:p>
+                  <a:pPr>
+                    <a:defRPr>
+                      <a:latin typeface="Verdana"/>
+                      <a:ea typeface="Verdana"/>
+                      <a:cs typeface="Verdana"/>
+                      <a:sym typeface="Verdana"/>
+                    </a:defRPr>
+                  </a:pPr>
+                </a:p>
+              </p:txBody>
+            </p:sp>
+            <p:pic>
+              <p:nvPicPr>
+                <p:cNvPr id="192" name="logoill.pdf" descr="logoill.pdf"/>
+                <p:cNvPicPr>
+                  <a:picLocks noChangeAspect="0"/>
+                </p:cNvPicPr>
+                <p:nvPr/>
+              </p:nvPicPr>
+              <p:blipFill>
+                <a:blip r:embed="rId4">
+                  <a:extLst/>
+                </a:blip>
+                <a:stretch>
+                  <a:fillRect/>
+                </a:stretch>
+              </p:blipFill>
+              <p:spPr>
+                <a:xfrm>
+                  <a:off x="486613" y="459579"/>
+                  <a:ext cx="164286" cy="157037"/>
+                </a:xfrm>
+                <a:prstGeom prst="rect">
+                  <a:avLst/>
+                </a:prstGeom>
+                <a:ln w="12700" cap="flat">
+                  <a:noFill/>
+                  <a:miter lim="400000"/>
+                </a:ln>
+                <a:effectLst/>
+              </p:spPr>
+            </p:pic>
+            <p:pic>
+              <p:nvPicPr>
+                <p:cNvPr id="193" name="mcstas-logo.pdf" descr="mcstas-logo.pdf"/>
+                <p:cNvPicPr>
+                  <a:picLocks noChangeAspect="0"/>
+                </p:cNvPicPr>
+                <p:nvPr/>
+              </p:nvPicPr>
+              <p:blipFill>
+                <a:blip r:embed="rId5">
+                  <a:extLst/>
+                </a:blip>
+                <a:srcRect l="0" t="0" r="0" b="0"/>
+                <a:stretch>
+                  <a:fillRect/>
+                </a:stretch>
+              </p:blipFill>
+              <p:spPr>
+                <a:xfrm>
+                  <a:off x="0" y="0"/>
+                  <a:ext cx="725762" cy="426459"/>
+                </a:xfrm>
+                <a:prstGeom prst="rect">
+                  <a:avLst/>
+                </a:prstGeom>
+                <a:ln w="12700" cap="flat">
+                  <a:noFill/>
+                  <a:miter lim="400000"/>
+                </a:ln>
+                <a:effectLst/>
+              </p:spPr>
+            </p:pic>
+            <p:pic>
+              <p:nvPicPr>
+                <p:cNvPr id="194" name="PSI-Logo_trans.png" descr="PSI-Logo_trans.png"/>
+                <p:cNvPicPr>
+                  <a:picLocks noChangeAspect="0"/>
+                </p:cNvPicPr>
+                <p:nvPr/>
+              </p:nvPicPr>
+              <p:blipFill>
+                <a:blip r:embed="rId6">
+                  <a:extLst/>
+                </a:blip>
+                <a:stretch>
+                  <a:fillRect/>
+                </a:stretch>
+              </p:blipFill>
+              <p:spPr>
+                <a:xfrm>
+                  <a:off x="270340" y="501170"/>
+                  <a:ext cx="204490" cy="74865"/>
+                </a:xfrm>
+                <a:prstGeom prst="rect">
+                  <a:avLst/>
+                </a:prstGeom>
+                <a:ln w="12700" cap="flat">
+                  <a:noFill/>
+                  <a:miter lim="400000"/>
+                </a:ln>
+                <a:effectLst/>
+              </p:spPr>
+            </p:pic>
+            <p:pic>
+              <p:nvPicPr>
+                <p:cNvPr id="195" name="ku-logo.pdf" descr="ku-logo.pdf"/>
+                <p:cNvPicPr>
+                  <a:picLocks noChangeAspect="0"/>
+                </p:cNvPicPr>
+                <p:nvPr/>
+              </p:nvPicPr>
+              <p:blipFill>
+                <a:blip r:embed="rId7">
+                  <a:extLst/>
+                </a:blip>
+                <a:stretch>
+                  <a:fillRect/>
+                </a:stretch>
+              </p:blipFill>
+              <p:spPr>
+                <a:xfrm>
+                  <a:off x="131011" y="451261"/>
+                  <a:ext cx="128373" cy="174419"/>
+                </a:xfrm>
+                <a:prstGeom prst="rect">
+                  <a:avLst/>
+                </a:prstGeom>
+                <a:ln w="12700" cap="flat">
+                  <a:noFill/>
+                  <a:miter lim="400000"/>
+                </a:ln>
+                <a:effectLst/>
+              </p:spPr>
+            </p:pic>
+            <p:pic>
+              <p:nvPicPr>
+                <p:cNvPr id="196" name="ESS_Logo_Frugal_Blue_cmyk.png" descr="ESS_Logo_Frugal_Blue_cmyk.png"/>
+                <p:cNvPicPr>
+                  <a:picLocks noChangeAspect="0"/>
+                </p:cNvPicPr>
+                <p:nvPr/>
+              </p:nvPicPr>
+              <p:blipFill>
+                <a:blip r:embed="rId8">
+                  <a:extLst/>
+                </a:blip>
+                <a:stretch>
+                  <a:fillRect/>
+                </a:stretch>
+              </p:blipFill>
+              <p:spPr>
+                <a:xfrm>
+                  <a:off x="214914" y="607364"/>
+                  <a:ext cx="279297" cy="150286"/>
+                </a:xfrm>
+                <a:prstGeom prst="rect">
+                  <a:avLst/>
+                </a:prstGeom>
+                <a:ln w="12700" cap="flat">
+                  <a:noFill/>
+                  <a:miter lim="400000"/>
+                </a:ln>
+                <a:effectLst/>
+              </p:spPr>
+            </p:pic>
+          </p:grpSp>
+        </p:grpSp>
+        <p:pic>
+          <p:nvPicPr>
+            <p:cNvPr id="199" name="Image" descr="Image"/>
+            <p:cNvPicPr>
+              <a:picLocks noChangeAspect="1"/>
+            </p:cNvPicPr>
+            <p:nvPr/>
+          </p:nvPicPr>
+          <p:blipFill>
+            <a:blip r:embed="rId9">
+              <a:extLst/>
+            </a:blip>
+            <a:srcRect l="0" t="0" r="77004" b="0"/>
+            <a:stretch>
+              <a:fillRect/>
+            </a:stretch>
+          </p:blipFill>
+          <p:spPr>
+            <a:xfrm>
+              <a:off x="44293" y="62025"/>
+              <a:ext cx="617630" cy="611845"/>
+            </a:xfrm>
+            <a:prstGeom prst="rect">
+              <a:avLst/>
+            </a:prstGeom>
+            <a:ln w="12700" cap="flat">
+              <a:noFill/>
+              <a:miter lim="400000"/>
+            </a:ln>
+            <a:effectLst/>
+          </p:spPr>
+        </p:pic>
+      </p:grpSp>
       <p:sp>
         <p:nvSpPr>
-          <p:cNvPr id="188" name="UserProfile.Offices.Workarea_{{DocumentLanguage}}text"/>
+          <p:cNvPr id="201" name="UserProfile.Offices.Workarea_{{DocumentLanguage}}text"/>
           <p:cNvSpPr txBox="1"/>
           <p:nvPr/>
         </p:nvSpPr>
@@ -11543,851 +13243,11 @@
           <a:p>
             <a:pPr/>
             <a:r>
-              <a:t>2021 ISIS McStas school</a:t>
+              <a:t>2025 ISIS McStas school</a:t>
             </a:r>
           </a:p>
         </p:txBody>
       </p:sp>
-      <p:grpSp>
-        <p:nvGrpSpPr>
-          <p:cNvPr id="201" name="Group"/>
-          <p:cNvGrpSpPr/>
-          <p:nvPr/>
-        </p:nvGrpSpPr>
-        <p:grpSpPr>
-          <a:xfrm>
-            <a:off x="17068" y="935881"/>
-            <a:ext cx="1506786" cy="5584238"/>
-            <a:chOff x="0" y="0"/>
-            <a:chExt cx="1506784" cy="5584236"/>
-          </a:xfrm>
-        </p:grpSpPr>
-        <p:pic>
-          <p:nvPicPr>
-            <p:cNvPr id="189" name="Image" descr="Image"/>
-            <p:cNvPicPr>
-              <a:picLocks noChangeAspect="1"/>
-            </p:cNvPicPr>
-            <p:nvPr/>
-          </p:nvPicPr>
-          <p:blipFill>
-            <a:blip r:embed="rId3">
-              <a:extLst/>
-            </a:blip>
-            <a:srcRect l="0" t="0" r="0" b="0"/>
-            <a:stretch>
-              <a:fillRect/>
-            </a:stretch>
-          </p:blipFill>
-          <p:spPr>
-            <a:xfrm>
-              <a:off x="0" y="0"/>
-              <a:ext cx="1506785" cy="5584237"/>
-            </a:xfrm>
-            <a:prstGeom prst="rect">
-              <a:avLst/>
-            </a:prstGeom>
-            <a:ln w="12700" cap="flat">
-              <a:noFill/>
-              <a:miter lim="400000"/>
-            </a:ln>
-            <a:effectLst/>
-          </p:spPr>
-        </p:pic>
-        <p:sp>
-          <p:nvSpPr>
-            <p:cNvPr id="190" name="Rectangle"/>
-            <p:cNvSpPr/>
-            <p:nvPr/>
-          </p:nvSpPr>
-          <p:spPr>
-            <a:xfrm>
-              <a:off x="26491" y="29555"/>
-              <a:ext cx="1453952" cy="791704"/>
-            </a:xfrm>
-            <a:prstGeom prst="rect">
-              <a:avLst/>
-            </a:prstGeom>
-            <a:solidFill>
-              <a:srgbClr val="FFFFFF"/>
-            </a:solidFill>
-            <a:ln w="12700" cap="flat">
-              <a:noFill/>
-              <a:miter lim="400000"/>
-            </a:ln>
-            <a:effectLst/>
-          </p:spPr>
-          <p:txBody>
-            <a:bodyPr wrap="square" lIns="46799" tIns="46799" rIns="46799" bIns="46799" numCol="1" anchor="ctr">
-              <a:noAutofit/>
-            </a:bodyPr>
-            <a:lstStyle/>
-            <a:p>
-              <a:pPr/>
-            </a:p>
-          </p:txBody>
-        </p:sp>
-        <p:grpSp>
-          <p:nvGrpSpPr>
-            <p:cNvPr id="199" name="Group"/>
-            <p:cNvGrpSpPr/>
-            <p:nvPr/>
-          </p:nvGrpSpPr>
-          <p:grpSpPr>
-            <a:xfrm>
-              <a:off x="161144" y="50051"/>
-              <a:ext cx="1271028" cy="5510910"/>
-              <a:chOff x="0" y="0"/>
-              <a:chExt cx="1271027" cy="5510908"/>
-            </a:xfrm>
-          </p:grpSpPr>
-          <p:sp>
-            <p:nvSpPr>
-              <p:cNvPr id="191" name="2021 Virtual ISIS McStas School"/>
-              <p:cNvSpPr txBox="1"/>
-              <p:nvPr/>
-            </p:nvSpPr>
-            <p:spPr>
-              <a:xfrm>
-                <a:off x="0" y="4478221"/>
-                <a:ext cx="1184497" cy="1032688"/>
-              </a:xfrm>
-              <a:prstGeom prst="rect">
-                <a:avLst/>
-              </a:prstGeom>
-              <a:noFill/>
-              <a:ln w="12700" cap="flat">
-                <a:noFill/>
-                <a:miter lim="400000"/>
-              </a:ln>
-              <a:effectLst/>
-              <a:extLst>
-                <a:ext uri="{C572A759-6A51-4108-AA02-DFA0A04FC94B}">
-                  <ma14:wrappingTextBoxFlag xmlns:ma14="http://schemas.microsoft.com/office/mac/drawingml/2011/main" val="1"/>
-                </a:ext>
-              </a:extLst>
-            </p:spPr>
-            <p:txBody>
-              <a:bodyPr wrap="square" lIns="0" tIns="0" rIns="0" bIns="0" numCol="1" anchor="b">
-                <a:normAutofit fontScale="100000" lnSpcReduction="0"/>
-              </a:bodyPr>
-              <a:lstStyle/>
-              <a:p>
-                <a:pPr algn="ctr" defTabSz="393192">
-                  <a:lnSpc>
-                    <a:spcPct val="110000"/>
-                  </a:lnSpc>
-                  <a:spcBef>
-                    <a:spcPts val="0"/>
-                  </a:spcBef>
-                  <a:defRPr b="1" i="1" sz="1591">
-                    <a:solidFill>
-                      <a:srgbClr val="FFFFFF"/>
-                    </a:solidFill>
-                  </a:defRPr>
-                </a:pPr>
-                <a:r>
-                  <a:t>2021 Virtual ISIS</a:t>
-                </a:r>
-                <a:br/>
-                <a:r>
-                  <a:t>McStas School</a:t>
-                </a:r>
-              </a:p>
-            </p:txBody>
-          </p:sp>
-          <p:grpSp>
-            <p:nvGrpSpPr>
-              <p:cNvPr id="198" name="Group"/>
-              <p:cNvGrpSpPr/>
-              <p:nvPr/>
-            </p:nvGrpSpPr>
-            <p:grpSpPr>
-              <a:xfrm>
-                <a:off x="545266" y="-1"/>
-                <a:ext cx="725762" cy="757651"/>
-                <a:chOff x="0" y="0"/>
-                <a:chExt cx="725761" cy="757649"/>
-              </a:xfrm>
-            </p:grpSpPr>
-            <p:sp>
-              <p:nvSpPr>
-                <p:cNvPr id="192" name="Logo color"/>
-                <p:cNvSpPr/>
-                <p:nvPr/>
-              </p:nvSpPr>
-              <p:spPr>
-                <a:xfrm>
-                  <a:off x="2507" y="452770"/>
-                  <a:ext cx="117009" cy="170656"/>
-                </a:xfrm>
-                <a:custGeom>
-                  <a:avLst/>
-                  <a:gdLst/>
-                  <a:ahLst/>
-                  <a:cxnLst>
-                    <a:cxn ang="0">
-                      <a:pos x="wd2" y="hd2"/>
-                    </a:cxn>
-                    <a:cxn ang="5400000">
-                      <a:pos x="wd2" y="hd2"/>
-                    </a:cxn>
-                    <a:cxn ang="10800000">
-                      <a:pos x="wd2" y="hd2"/>
-                    </a:cxn>
-                    <a:cxn ang="16200000">
-                      <a:pos x="wd2" y="hd2"/>
-                    </a:cxn>
-                  </a:cxnLst>
-                  <a:rect l="0" t="0" r="r" b="b"/>
-                  <a:pathLst>
-                    <a:path w="21600" h="21600" fill="norm" stroke="1" extrusionOk="0">
-                      <a:moveTo>
-                        <a:pt x="4597" y="18293"/>
-                      </a:moveTo>
-                      <a:cubicBezTo>
-                        <a:pt x="10549" y="19881"/>
-                        <a:pt x="11051" y="19881"/>
-                        <a:pt x="17003" y="18293"/>
-                      </a:cubicBezTo>
-                      <a:cubicBezTo>
-                        <a:pt x="17003" y="18293"/>
-                        <a:pt x="17003" y="18293"/>
-                        <a:pt x="21600" y="19949"/>
-                      </a:cubicBezTo>
-                      <a:cubicBezTo>
-                        <a:pt x="21600" y="19949"/>
-                        <a:pt x="21600" y="19949"/>
-                        <a:pt x="17003" y="21600"/>
-                      </a:cubicBezTo>
-                      <a:cubicBezTo>
-                        <a:pt x="11051" y="20016"/>
-                        <a:pt x="10549" y="20016"/>
-                        <a:pt x="4597" y="21600"/>
-                      </a:cubicBezTo>
-                      <a:cubicBezTo>
-                        <a:pt x="4597" y="21600"/>
-                        <a:pt x="4597" y="21600"/>
-                        <a:pt x="0" y="19949"/>
-                      </a:cubicBezTo>
-                      <a:cubicBezTo>
-                        <a:pt x="0" y="19949"/>
-                        <a:pt x="0" y="19949"/>
-                        <a:pt x="4597" y="18293"/>
-                      </a:cubicBezTo>
-                      <a:close/>
-                      <a:moveTo>
-                        <a:pt x="4597" y="14200"/>
-                      </a:moveTo>
-                      <a:cubicBezTo>
-                        <a:pt x="10549" y="15790"/>
-                        <a:pt x="11051" y="15790"/>
-                        <a:pt x="17003" y="14200"/>
-                      </a:cubicBezTo>
-                      <a:cubicBezTo>
-                        <a:pt x="17003" y="14200"/>
-                        <a:pt x="17003" y="14200"/>
-                        <a:pt x="21600" y="15858"/>
-                      </a:cubicBezTo>
-                      <a:cubicBezTo>
-                        <a:pt x="21600" y="15858"/>
-                        <a:pt x="21600" y="15858"/>
-                        <a:pt x="17003" y="17512"/>
-                      </a:cubicBezTo>
-                      <a:cubicBezTo>
-                        <a:pt x="11051" y="15925"/>
-                        <a:pt x="10549" y="15925"/>
-                        <a:pt x="4597" y="17512"/>
-                      </a:cubicBezTo>
-                      <a:cubicBezTo>
-                        <a:pt x="4597" y="17512"/>
-                        <a:pt x="4597" y="17512"/>
-                        <a:pt x="0" y="15858"/>
-                      </a:cubicBezTo>
-                      <a:cubicBezTo>
-                        <a:pt x="0" y="15858"/>
-                        <a:pt x="0" y="15858"/>
-                        <a:pt x="4597" y="14200"/>
-                      </a:cubicBezTo>
-                      <a:close/>
-                      <a:moveTo>
-                        <a:pt x="4597" y="10111"/>
-                      </a:moveTo>
-                      <a:cubicBezTo>
-                        <a:pt x="10549" y="11702"/>
-                        <a:pt x="11051" y="11702"/>
-                        <a:pt x="17003" y="10111"/>
-                      </a:cubicBezTo>
-                      <a:cubicBezTo>
-                        <a:pt x="17003" y="10111"/>
-                        <a:pt x="17003" y="10111"/>
-                        <a:pt x="21600" y="11769"/>
-                      </a:cubicBezTo>
-                      <a:cubicBezTo>
-                        <a:pt x="21600" y="11769"/>
-                        <a:pt x="21600" y="11769"/>
-                        <a:pt x="17003" y="13423"/>
-                      </a:cubicBezTo>
-                      <a:cubicBezTo>
-                        <a:pt x="11051" y="11837"/>
-                        <a:pt x="10549" y="11837"/>
-                        <a:pt x="4597" y="13423"/>
-                      </a:cubicBezTo>
-                      <a:cubicBezTo>
-                        <a:pt x="4597" y="13423"/>
-                        <a:pt x="4597" y="13423"/>
-                        <a:pt x="0" y="11769"/>
-                      </a:cubicBezTo>
-                      <a:cubicBezTo>
-                        <a:pt x="0" y="11769"/>
-                        <a:pt x="0" y="11769"/>
-                        <a:pt x="4597" y="10111"/>
-                      </a:cubicBezTo>
-                      <a:close/>
-                      <a:moveTo>
-                        <a:pt x="2971" y="918"/>
-                      </a:moveTo>
-                      <a:lnTo>
-                        <a:pt x="2971" y="6926"/>
-                      </a:lnTo>
-                      <a:cubicBezTo>
-                        <a:pt x="2971" y="6926"/>
-                        <a:pt x="2971" y="6926"/>
-                        <a:pt x="3980" y="6926"/>
-                      </a:cubicBezTo>
-                      <a:cubicBezTo>
-                        <a:pt x="4430" y="6926"/>
-                        <a:pt x="4695" y="6878"/>
-                        <a:pt x="4903" y="6708"/>
-                      </a:cubicBezTo>
-                      <a:cubicBezTo>
-                        <a:pt x="5220" y="6447"/>
-                        <a:pt x="5249" y="5917"/>
-                        <a:pt x="5249" y="4849"/>
-                      </a:cubicBezTo>
-                      <a:cubicBezTo>
-                        <a:pt x="5249" y="4849"/>
-                        <a:pt x="5249" y="4849"/>
-                        <a:pt x="5249" y="2990"/>
-                      </a:cubicBezTo>
-                      <a:cubicBezTo>
-                        <a:pt x="5249" y="1926"/>
-                        <a:pt x="5220" y="1396"/>
-                        <a:pt x="4903" y="1135"/>
-                      </a:cubicBezTo>
-                      <a:cubicBezTo>
-                        <a:pt x="4695" y="965"/>
-                        <a:pt x="4430" y="918"/>
-                        <a:pt x="3980" y="918"/>
-                      </a:cubicBezTo>
-                      <a:cubicBezTo>
-                        <a:pt x="3980" y="918"/>
-                        <a:pt x="3980" y="918"/>
-                        <a:pt x="2971" y="918"/>
-                      </a:cubicBezTo>
-                      <a:close/>
-                      <a:moveTo>
-                        <a:pt x="8068" y="0"/>
-                      </a:moveTo>
-                      <a:cubicBezTo>
-                        <a:pt x="8068" y="0"/>
-                        <a:pt x="8068" y="0"/>
-                        <a:pt x="13456" y="0"/>
-                      </a:cubicBezTo>
-                      <a:cubicBezTo>
-                        <a:pt x="13542" y="0"/>
-                        <a:pt x="13594" y="16"/>
-                        <a:pt x="13635" y="44"/>
-                      </a:cubicBezTo>
-                      <a:cubicBezTo>
-                        <a:pt x="13669" y="67"/>
-                        <a:pt x="13698" y="103"/>
-                        <a:pt x="13698" y="162"/>
-                      </a:cubicBezTo>
-                      <a:cubicBezTo>
-                        <a:pt x="13698" y="162"/>
-                        <a:pt x="13698" y="162"/>
-                        <a:pt x="13698" y="827"/>
-                      </a:cubicBezTo>
-                      <a:cubicBezTo>
-                        <a:pt x="13698" y="886"/>
-                        <a:pt x="13669" y="922"/>
-                        <a:pt x="13635" y="945"/>
-                      </a:cubicBezTo>
-                      <a:cubicBezTo>
-                        <a:pt x="13594" y="973"/>
-                        <a:pt x="13542" y="989"/>
-                        <a:pt x="13456" y="989"/>
-                      </a:cubicBezTo>
-                      <a:cubicBezTo>
-                        <a:pt x="13456" y="989"/>
-                        <a:pt x="13456" y="989"/>
-                        <a:pt x="11731" y="989"/>
-                      </a:cubicBezTo>
-                      <a:cubicBezTo>
-                        <a:pt x="11731" y="989"/>
-                        <a:pt x="11731" y="989"/>
-                        <a:pt x="11731" y="7681"/>
-                      </a:cubicBezTo>
-                      <a:cubicBezTo>
-                        <a:pt x="11731" y="7740"/>
-                        <a:pt x="11708" y="7776"/>
-                        <a:pt x="11667" y="7800"/>
-                      </a:cubicBezTo>
-                      <a:cubicBezTo>
-                        <a:pt x="11633" y="7827"/>
-                        <a:pt x="11581" y="7843"/>
-                        <a:pt x="11494" y="7843"/>
-                      </a:cubicBezTo>
-                      <a:cubicBezTo>
-                        <a:pt x="11494" y="7843"/>
-                        <a:pt x="11494" y="7843"/>
-                        <a:pt x="10029" y="7843"/>
-                      </a:cubicBezTo>
-                      <a:cubicBezTo>
-                        <a:pt x="9943" y="7843"/>
-                        <a:pt x="9891" y="7827"/>
-                        <a:pt x="9850" y="7800"/>
-                      </a:cubicBezTo>
-                      <a:cubicBezTo>
-                        <a:pt x="9810" y="7776"/>
-                        <a:pt x="9787" y="7740"/>
-                        <a:pt x="9787" y="7681"/>
-                      </a:cubicBezTo>
-                      <a:cubicBezTo>
-                        <a:pt x="9787" y="7681"/>
-                        <a:pt x="9787" y="7681"/>
-                        <a:pt x="9787" y="989"/>
-                      </a:cubicBezTo>
-                      <a:cubicBezTo>
-                        <a:pt x="9787" y="989"/>
-                        <a:pt x="9787" y="989"/>
-                        <a:pt x="8068" y="989"/>
-                      </a:cubicBezTo>
-                      <a:cubicBezTo>
-                        <a:pt x="7981" y="989"/>
-                        <a:pt x="7929" y="973"/>
-                        <a:pt x="7889" y="945"/>
-                      </a:cubicBezTo>
-                      <a:cubicBezTo>
-                        <a:pt x="7849" y="922"/>
-                        <a:pt x="7825" y="886"/>
-                        <a:pt x="7825" y="827"/>
-                      </a:cubicBezTo>
-                      <a:cubicBezTo>
-                        <a:pt x="7825" y="827"/>
-                        <a:pt x="7825" y="827"/>
-                        <a:pt x="7825" y="162"/>
-                      </a:cubicBezTo>
-                      <a:cubicBezTo>
-                        <a:pt x="7825" y="103"/>
-                        <a:pt x="7849" y="67"/>
-                        <a:pt x="7889" y="44"/>
-                      </a:cubicBezTo>
-                      <a:cubicBezTo>
-                        <a:pt x="7929" y="16"/>
-                        <a:pt x="7981" y="0"/>
-                        <a:pt x="8068" y="0"/>
-                      </a:cubicBezTo>
-                      <a:close/>
-                      <a:moveTo>
-                        <a:pt x="1390" y="0"/>
-                      </a:moveTo>
-                      <a:cubicBezTo>
-                        <a:pt x="1390" y="0"/>
-                        <a:pt x="1390" y="0"/>
-                        <a:pt x="4257" y="0"/>
-                      </a:cubicBezTo>
-                      <a:cubicBezTo>
-                        <a:pt x="5370" y="0"/>
-                        <a:pt x="6051" y="174"/>
-                        <a:pt x="6466" y="538"/>
-                      </a:cubicBezTo>
-                      <a:cubicBezTo>
-                        <a:pt x="7072" y="1036"/>
-                        <a:pt x="7089" y="1843"/>
-                        <a:pt x="7089" y="3077"/>
-                      </a:cubicBezTo>
-                      <a:cubicBezTo>
-                        <a:pt x="7089" y="3077"/>
-                        <a:pt x="7089" y="3077"/>
-                        <a:pt x="7089" y="4766"/>
-                      </a:cubicBezTo>
-                      <a:cubicBezTo>
-                        <a:pt x="7089" y="6000"/>
-                        <a:pt x="7072" y="6807"/>
-                        <a:pt x="6466" y="7305"/>
-                      </a:cubicBezTo>
-                      <a:cubicBezTo>
-                        <a:pt x="6051" y="7669"/>
-                        <a:pt x="5370" y="7843"/>
-                        <a:pt x="4257" y="7843"/>
-                      </a:cubicBezTo>
-                      <a:cubicBezTo>
-                        <a:pt x="4257" y="7843"/>
-                        <a:pt x="4257" y="7843"/>
-                        <a:pt x="1390" y="7843"/>
-                      </a:cubicBezTo>
-                      <a:cubicBezTo>
-                        <a:pt x="1304" y="7843"/>
-                        <a:pt x="1252" y="7827"/>
-                        <a:pt x="1217" y="7800"/>
-                      </a:cubicBezTo>
-                      <a:cubicBezTo>
-                        <a:pt x="1177" y="7776"/>
-                        <a:pt x="1154" y="7740"/>
-                        <a:pt x="1154" y="7681"/>
-                      </a:cubicBezTo>
-                      <a:cubicBezTo>
-                        <a:pt x="1154" y="7681"/>
-                        <a:pt x="1154" y="7681"/>
-                        <a:pt x="1154" y="162"/>
-                      </a:cubicBezTo>
-                      <a:cubicBezTo>
-                        <a:pt x="1154" y="103"/>
-                        <a:pt x="1177" y="67"/>
-                        <a:pt x="1217" y="44"/>
-                      </a:cubicBezTo>
-                      <a:cubicBezTo>
-                        <a:pt x="1252" y="16"/>
-                        <a:pt x="1304" y="0"/>
-                        <a:pt x="1390" y="0"/>
-                      </a:cubicBezTo>
-                      <a:close/>
-                      <a:moveTo>
-                        <a:pt x="14706" y="0"/>
-                      </a:moveTo>
-                      <a:cubicBezTo>
-                        <a:pt x="14706" y="0"/>
-                        <a:pt x="14706" y="0"/>
-                        <a:pt x="16045" y="0"/>
-                      </a:cubicBezTo>
-                      <a:cubicBezTo>
-                        <a:pt x="16131" y="0"/>
-                        <a:pt x="16183" y="16"/>
-                        <a:pt x="16224" y="44"/>
-                      </a:cubicBezTo>
-                      <a:cubicBezTo>
-                        <a:pt x="16264" y="67"/>
-                        <a:pt x="16287" y="103"/>
-                        <a:pt x="16287" y="162"/>
-                      </a:cubicBezTo>
-                      <a:cubicBezTo>
-                        <a:pt x="16287" y="162"/>
-                        <a:pt x="16287" y="162"/>
-                        <a:pt x="16287" y="5712"/>
-                      </a:cubicBezTo>
-                      <a:cubicBezTo>
-                        <a:pt x="16287" y="6314"/>
-                        <a:pt x="16368" y="6646"/>
-                        <a:pt x="16627" y="6844"/>
-                      </a:cubicBezTo>
-                      <a:cubicBezTo>
-                        <a:pt x="16818" y="6990"/>
-                        <a:pt x="17072" y="7053"/>
-                        <a:pt x="17406" y="7053"/>
-                      </a:cubicBezTo>
-                      <a:cubicBezTo>
-                        <a:pt x="17776" y="7053"/>
-                        <a:pt x="18041" y="6982"/>
-                        <a:pt x="18226" y="6844"/>
-                      </a:cubicBezTo>
-                      <a:cubicBezTo>
-                        <a:pt x="18503" y="6638"/>
-                        <a:pt x="18566" y="6294"/>
-                        <a:pt x="18566" y="5712"/>
-                      </a:cubicBezTo>
-                      <a:cubicBezTo>
-                        <a:pt x="18566" y="5712"/>
-                        <a:pt x="18566" y="5712"/>
-                        <a:pt x="18566" y="162"/>
-                      </a:cubicBezTo>
-                      <a:cubicBezTo>
-                        <a:pt x="18566" y="103"/>
-                        <a:pt x="18589" y="67"/>
-                        <a:pt x="18630" y="44"/>
-                      </a:cubicBezTo>
-                      <a:cubicBezTo>
-                        <a:pt x="18664" y="16"/>
-                        <a:pt x="18722" y="0"/>
-                        <a:pt x="18803" y="0"/>
-                      </a:cubicBezTo>
-                      <a:cubicBezTo>
-                        <a:pt x="18803" y="0"/>
-                        <a:pt x="18803" y="0"/>
-                        <a:pt x="20147" y="0"/>
-                      </a:cubicBezTo>
-                      <a:cubicBezTo>
-                        <a:pt x="20234" y="0"/>
-                        <a:pt x="20286" y="16"/>
-                        <a:pt x="20320" y="44"/>
-                      </a:cubicBezTo>
-                      <a:cubicBezTo>
-                        <a:pt x="20361" y="67"/>
-                        <a:pt x="20384" y="103"/>
-                        <a:pt x="20384" y="162"/>
-                      </a:cubicBezTo>
-                      <a:cubicBezTo>
-                        <a:pt x="20384" y="162"/>
-                        <a:pt x="20384" y="162"/>
-                        <a:pt x="20384" y="5716"/>
-                      </a:cubicBezTo>
-                      <a:cubicBezTo>
-                        <a:pt x="20384" y="6464"/>
-                        <a:pt x="20257" y="6962"/>
-                        <a:pt x="19732" y="7382"/>
-                      </a:cubicBezTo>
-                      <a:cubicBezTo>
-                        <a:pt x="19287" y="7738"/>
-                        <a:pt x="18560" y="7943"/>
-                        <a:pt x="17430" y="7943"/>
-                      </a:cubicBezTo>
-                      <a:cubicBezTo>
-                        <a:pt x="16316" y="7943"/>
-                        <a:pt x="15583" y="7750"/>
-                        <a:pt x="15093" y="7382"/>
-                      </a:cubicBezTo>
-                      <a:cubicBezTo>
-                        <a:pt x="14625" y="7030"/>
-                        <a:pt x="14469" y="6523"/>
-                        <a:pt x="14469" y="5716"/>
-                      </a:cubicBezTo>
-                      <a:cubicBezTo>
-                        <a:pt x="14469" y="5716"/>
-                        <a:pt x="14469" y="5716"/>
-                        <a:pt x="14469" y="162"/>
-                      </a:cubicBezTo>
-                      <a:cubicBezTo>
-                        <a:pt x="14469" y="103"/>
-                        <a:pt x="14493" y="67"/>
-                        <a:pt x="14527" y="44"/>
-                      </a:cubicBezTo>
-                      <a:cubicBezTo>
-                        <a:pt x="14568" y="16"/>
-                        <a:pt x="14620" y="0"/>
-                        <a:pt x="14706" y="0"/>
-                      </a:cubicBezTo>
-                      <a:close/>
-                    </a:path>
-                  </a:pathLst>
-                </a:custGeom>
-                <a:solidFill>
-                  <a:schemeClr val="accent1"/>
-                </a:solidFill>
-                <a:ln w="12700" cap="flat">
-                  <a:noFill/>
-                  <a:miter lim="400000"/>
-                </a:ln>
-                <a:effectLst/>
-              </p:spPr>
-              <p:txBody>
-                <a:bodyPr wrap="square" lIns="46799" tIns="46799" rIns="46799" bIns="46799" numCol="1" anchor="t">
-                  <a:noAutofit/>
-                </a:bodyPr>
-                <a:lstStyle/>
-                <a:p>
-                  <a:pPr>
-                    <a:defRPr>
-                      <a:latin typeface="Verdana"/>
-                      <a:ea typeface="Verdana"/>
-                      <a:cs typeface="Verdana"/>
-                      <a:sym typeface="Verdana"/>
-                    </a:defRPr>
-                  </a:pPr>
-                </a:p>
-              </p:txBody>
-            </p:sp>
-            <p:pic>
-              <p:nvPicPr>
-                <p:cNvPr id="193" name="logoill.pdf" descr="logoill.pdf"/>
-                <p:cNvPicPr>
-                  <a:picLocks noChangeAspect="0"/>
-                </p:cNvPicPr>
-                <p:nvPr/>
-              </p:nvPicPr>
-              <p:blipFill>
-                <a:blip r:embed="rId4">
-                  <a:extLst/>
-                </a:blip>
-                <a:stretch>
-                  <a:fillRect/>
-                </a:stretch>
-              </p:blipFill>
-              <p:spPr>
-                <a:xfrm>
-                  <a:off x="486613" y="459579"/>
-                  <a:ext cx="164286" cy="157037"/>
-                </a:xfrm>
-                <a:prstGeom prst="rect">
-                  <a:avLst/>
-                </a:prstGeom>
-                <a:ln w="12700" cap="flat">
-                  <a:noFill/>
-                  <a:miter lim="400000"/>
-                </a:ln>
-                <a:effectLst/>
-              </p:spPr>
-            </p:pic>
-            <p:pic>
-              <p:nvPicPr>
-                <p:cNvPr id="194" name="mcstas-logo.pdf" descr="mcstas-logo.pdf"/>
-                <p:cNvPicPr>
-                  <a:picLocks noChangeAspect="0"/>
-                </p:cNvPicPr>
-                <p:nvPr/>
-              </p:nvPicPr>
-              <p:blipFill>
-                <a:blip r:embed="rId5">
-                  <a:extLst/>
-                </a:blip>
-                <a:srcRect l="0" t="0" r="0" b="0"/>
-                <a:stretch>
-                  <a:fillRect/>
-                </a:stretch>
-              </p:blipFill>
-              <p:spPr>
-                <a:xfrm>
-                  <a:off x="0" y="0"/>
-                  <a:ext cx="725762" cy="426459"/>
-                </a:xfrm>
-                <a:prstGeom prst="rect">
-                  <a:avLst/>
-                </a:prstGeom>
-                <a:ln w="12700" cap="flat">
-                  <a:noFill/>
-                  <a:miter lim="400000"/>
-                </a:ln>
-                <a:effectLst/>
-              </p:spPr>
-            </p:pic>
-            <p:pic>
-              <p:nvPicPr>
-                <p:cNvPr id="195" name="PSI-Logo_trans.png" descr="PSI-Logo_trans.png"/>
-                <p:cNvPicPr>
-                  <a:picLocks noChangeAspect="0"/>
-                </p:cNvPicPr>
-                <p:nvPr/>
-              </p:nvPicPr>
-              <p:blipFill>
-                <a:blip r:embed="rId6">
-                  <a:extLst/>
-                </a:blip>
-                <a:stretch>
-                  <a:fillRect/>
-                </a:stretch>
-              </p:blipFill>
-              <p:spPr>
-                <a:xfrm>
-                  <a:off x="270340" y="501170"/>
-                  <a:ext cx="204490" cy="74865"/>
-                </a:xfrm>
-                <a:prstGeom prst="rect">
-                  <a:avLst/>
-                </a:prstGeom>
-                <a:ln w="12700" cap="flat">
-                  <a:noFill/>
-                  <a:miter lim="400000"/>
-                </a:ln>
-                <a:effectLst/>
-              </p:spPr>
-            </p:pic>
-            <p:pic>
-              <p:nvPicPr>
-                <p:cNvPr id="196" name="ku-logo.pdf" descr="ku-logo.pdf"/>
-                <p:cNvPicPr>
-                  <a:picLocks noChangeAspect="0"/>
-                </p:cNvPicPr>
-                <p:nvPr/>
-              </p:nvPicPr>
-              <p:blipFill>
-                <a:blip r:embed="rId7">
-                  <a:extLst/>
-                </a:blip>
-                <a:stretch>
-                  <a:fillRect/>
-                </a:stretch>
-              </p:blipFill>
-              <p:spPr>
-                <a:xfrm>
-                  <a:off x="131011" y="451261"/>
-                  <a:ext cx="128373" cy="174419"/>
-                </a:xfrm>
-                <a:prstGeom prst="rect">
-                  <a:avLst/>
-                </a:prstGeom>
-                <a:ln w="12700" cap="flat">
-                  <a:noFill/>
-                  <a:miter lim="400000"/>
-                </a:ln>
-                <a:effectLst/>
-              </p:spPr>
-            </p:pic>
-            <p:pic>
-              <p:nvPicPr>
-                <p:cNvPr id="197" name="ESS_Logo_Frugal_Blue_cmyk.png" descr="ESS_Logo_Frugal_Blue_cmyk.png"/>
-                <p:cNvPicPr>
-                  <a:picLocks noChangeAspect="0"/>
-                </p:cNvPicPr>
-                <p:nvPr/>
-              </p:nvPicPr>
-              <p:blipFill>
-                <a:blip r:embed="rId8">
-                  <a:extLst/>
-                </a:blip>
-                <a:stretch>
-                  <a:fillRect/>
-                </a:stretch>
-              </p:blipFill>
-              <p:spPr>
-                <a:xfrm>
-                  <a:off x="214914" y="607364"/>
-                  <a:ext cx="279297" cy="150286"/>
-                </a:xfrm>
-                <a:prstGeom prst="rect">
-                  <a:avLst/>
-                </a:prstGeom>
-                <a:ln w="12700" cap="flat">
-                  <a:noFill/>
-                  <a:miter lim="400000"/>
-                </a:ln>
-                <a:effectLst/>
-              </p:spPr>
-            </p:pic>
-          </p:grpSp>
-        </p:grpSp>
-        <p:pic>
-          <p:nvPicPr>
-            <p:cNvPr id="200" name="Image" descr="Image"/>
-            <p:cNvPicPr>
-              <a:picLocks noChangeAspect="1"/>
-            </p:cNvPicPr>
-            <p:nvPr/>
-          </p:nvPicPr>
-          <p:blipFill>
-            <a:blip r:embed="rId9">
-              <a:extLst/>
-            </a:blip>
-            <a:srcRect l="0" t="0" r="77004" b="0"/>
-            <a:stretch>
-              <a:fillRect/>
-            </a:stretch>
-          </p:blipFill>
-          <p:spPr>
-            <a:xfrm>
-              <a:off x="44293" y="62025"/>
-              <a:ext cx="617630" cy="611845"/>
-            </a:xfrm>
-            <a:prstGeom prst="rect">
-              <a:avLst/>
-            </a:prstGeom>
-            <a:ln w="12700" cap="flat">
-              <a:noFill/>
-              <a:miter lim="400000"/>
-            </a:ln>
-            <a:effectLst/>
-          </p:spPr>
-        </p:pic>
-      </p:grpSp>
     </p:spTree>
   </p:cSld>
   <p:clrMapOvr>
@@ -14424,56 +15284,9 @@
           </p:spPr>
         </p:pic>
       </p:grpSp>
-      <p:sp>
-        <p:nvSpPr>
-          <p:cNvPr id="233" name="UserProfile.Offices.Workarea_{{DocumentLanguage}}text"/>
-          <p:cNvSpPr txBox="1"/>
-          <p:nvPr/>
-        </p:nvSpPr>
-        <p:spPr>
-          <a:xfrm>
-            <a:off x="1774725" y="6636099"/>
-            <a:ext cx="3397072" cy="127001"/>
-          </a:xfrm>
-          <a:prstGeom prst="rect">
-            <a:avLst/>
-          </a:prstGeom>
-          <a:ln w="12700">
-            <a:miter lim="400000"/>
-          </a:ln>
-          <a:extLst>
-            <a:ext uri="{C572A759-6A51-4108-AA02-DFA0A04FC94B}">
-              <ma14:wrappingTextBoxFlag xmlns:ma14="http://schemas.microsoft.com/office/mac/drawingml/2011/main" val="1"/>
-            </a:ext>
-          </a:extLst>
-        </p:spPr>
-        <p:txBody>
-          <a:bodyPr lIns="0" tIns="0" rIns="0" bIns="0" anchor="ctr">
-            <a:spAutoFit/>
-          </a:bodyPr>
-          <a:lstStyle>
-            <a:lvl1pPr>
-              <a:spcBef>
-                <a:spcPts val="0"/>
-              </a:spcBef>
-              <a:defRPr b="1" sz="700">
-                <a:solidFill>
-                  <a:srgbClr val="FFFFFF"/>
-                </a:solidFill>
-              </a:defRPr>
-            </a:lvl1pPr>
-          </a:lstStyle>
-          <a:p>
-            <a:pPr/>
-            <a:r>
-              <a:t>2021 ISIS McStas school</a:t>
-            </a:r>
-          </a:p>
-        </p:txBody>
-      </p:sp>
       <p:pic>
         <p:nvPicPr>
-          <p:cNvPr id="234" name="Image" descr="Image"/>
+          <p:cNvPr id="233" name="Image" descr="Image"/>
           <p:cNvPicPr>
             <a:picLocks noChangeAspect="1"/>
           </p:cNvPicPr>
@@ -14503,7 +15316,7 @@
       </p:pic>
       <p:sp>
         <p:nvSpPr>
-          <p:cNvPr id="235" name="Rectangle"/>
+          <p:cNvPr id="234" name="Rectangle"/>
           <p:cNvSpPr/>
           <p:nvPr/>
         </p:nvSpPr>
@@ -14532,7 +15345,7 @@
       </p:sp>
       <p:grpSp>
         <p:nvGrpSpPr>
-          <p:cNvPr id="244" name="Group"/>
+          <p:cNvPr id="243" name="Group"/>
           <p:cNvGrpSpPr/>
           <p:nvPr/>
         </p:nvGrpSpPr>
@@ -14546,7 +15359,7 @@
         </p:grpSpPr>
         <p:sp>
           <p:nvSpPr>
-            <p:cNvPr id="236" name="2021 Virtual ISIS McStas School"/>
+            <p:cNvPr id="235" name="2025 ISIS McStas School"/>
             <p:cNvSpPr txBox="1"/>
             <p:nvPr/>
           </p:nvSpPr>
@@ -14576,21 +15389,21 @@
             </a:bodyPr>
             <a:lstStyle/>
             <a:p>
-              <a:pPr algn="ctr" defTabSz="402336">
+              <a:pPr algn="ctr" defTabSz="539495">
                 <a:lnSpc>
                   <a:spcPct val="110000"/>
                 </a:lnSpc>
                 <a:spcBef>
                   <a:spcPts val="0"/>
                 </a:spcBef>
-                <a:defRPr b="1" i="1" sz="1628">
+                <a:defRPr b="1" i="1" sz="2183">
                   <a:solidFill>
                     <a:srgbClr val="FFFFFF"/>
                   </a:solidFill>
                 </a:defRPr>
               </a:pPr>
               <a:r>
-                <a:t>2021 Virtual ISIS</a:t>
+                <a:t>2025 ISIS</a:t>
               </a:r>
               <a:br/>
               <a:r>
@@ -14601,7 +15414,7 @@
         </p:sp>
         <p:grpSp>
           <p:nvGrpSpPr>
-            <p:cNvPr id="243" name="Group"/>
+            <p:cNvPr id="242" name="Group"/>
             <p:cNvGrpSpPr/>
             <p:nvPr/>
           </p:nvGrpSpPr>
@@ -14615,7 +15428,7 @@
           </p:grpSpPr>
           <p:sp>
             <p:nvSpPr>
-              <p:cNvPr id="237" name="Logo color"/>
+              <p:cNvPr id="236" name="Logo color"/>
               <p:cNvSpPr/>
               <p:nvPr/>
             </p:nvSpPr>
@@ -15102,7 +15915,7 @@
           </p:sp>
           <p:pic>
             <p:nvPicPr>
-              <p:cNvPr id="238" name="logoill.pdf" descr="logoill.pdf"/>
+              <p:cNvPr id="237" name="logoill.pdf" descr="logoill.pdf"/>
               <p:cNvPicPr>
                 <a:picLocks noChangeAspect="0"/>
               </p:cNvPicPr>
@@ -15133,7 +15946,7 @@
           </p:pic>
           <p:pic>
             <p:nvPicPr>
-              <p:cNvPr id="239" name="mcstas-logo.pdf" descr="mcstas-logo.pdf"/>
+              <p:cNvPr id="238" name="mcstas-logo.pdf" descr="mcstas-logo.pdf"/>
               <p:cNvPicPr>
                 <a:picLocks noChangeAspect="0"/>
               </p:cNvPicPr>
@@ -15165,7 +15978,7 @@
           </p:pic>
           <p:pic>
             <p:nvPicPr>
-              <p:cNvPr id="240" name="PSI-Logo_trans.png" descr="PSI-Logo_trans.png"/>
+              <p:cNvPr id="239" name="PSI-Logo_trans.png" descr="PSI-Logo_trans.png"/>
               <p:cNvPicPr>
                 <a:picLocks noChangeAspect="0"/>
               </p:cNvPicPr>
@@ -15196,7 +16009,7 @@
           </p:pic>
           <p:pic>
             <p:nvPicPr>
-              <p:cNvPr id="241" name="ku-logo.pdf" descr="ku-logo.pdf"/>
+              <p:cNvPr id="240" name="ku-logo.pdf" descr="ku-logo.pdf"/>
               <p:cNvPicPr>
                 <a:picLocks noChangeAspect="0"/>
               </p:cNvPicPr>
@@ -15227,7 +16040,7 @@
           </p:pic>
           <p:pic>
             <p:nvPicPr>
-              <p:cNvPr id="242" name="ESS_Logo_Frugal_Blue_cmyk.png" descr="ESS_Logo_Frugal_Blue_cmyk.png"/>
+              <p:cNvPr id="241" name="ESS_Logo_Frugal_Blue_cmyk.png" descr="ESS_Logo_Frugal_Blue_cmyk.png"/>
               <p:cNvPicPr>
                 <a:picLocks noChangeAspect="0"/>
               </p:cNvPicPr>
@@ -15260,7 +16073,7 @@
       </p:grpSp>
       <p:pic>
         <p:nvPicPr>
-          <p:cNvPr id="245" name="Image" descr="Image"/>
+          <p:cNvPr id="244" name="Image" descr="Image"/>
           <p:cNvPicPr>
             <a:picLocks noChangeAspect="1"/>
           </p:cNvPicPr>
@@ -15288,6 +16101,53 @@
           </a:ln>
         </p:spPr>
       </p:pic>
+      <p:sp>
+        <p:nvSpPr>
+          <p:cNvPr id="245" name="UserProfile.Offices.Workarea_{{DocumentLanguage}}text"/>
+          <p:cNvSpPr txBox="1"/>
+          <p:nvPr/>
+        </p:nvSpPr>
+        <p:spPr>
+          <a:xfrm>
+            <a:off x="1774725" y="6636099"/>
+            <a:ext cx="3397072" cy="127001"/>
+          </a:xfrm>
+          <a:prstGeom prst="rect">
+            <a:avLst/>
+          </a:prstGeom>
+          <a:ln w="12700">
+            <a:miter lim="400000"/>
+          </a:ln>
+          <a:extLst>
+            <a:ext uri="{C572A759-6A51-4108-AA02-DFA0A04FC94B}">
+              <ma14:wrappingTextBoxFlag xmlns:ma14="http://schemas.microsoft.com/office/mac/drawingml/2011/main" val="1"/>
+            </a:ext>
+          </a:extLst>
+        </p:spPr>
+        <p:txBody>
+          <a:bodyPr lIns="0" tIns="0" rIns="0" bIns="0" anchor="ctr">
+            <a:spAutoFit/>
+          </a:bodyPr>
+          <a:lstStyle>
+            <a:lvl1pPr>
+              <a:spcBef>
+                <a:spcPts val="0"/>
+              </a:spcBef>
+              <a:defRPr b="1" sz="700">
+                <a:solidFill>
+                  <a:srgbClr val="FFFFFF"/>
+                </a:solidFill>
+              </a:defRPr>
+            </a:lvl1pPr>
+          </a:lstStyle>
+          <a:p>
+            <a:pPr/>
+            <a:r>
+              <a:t>2025 ISIS McStas school</a:t>
+            </a:r>
+          </a:p>
+        </p:txBody>
+      </p:sp>
     </p:spTree>
   </p:cSld>
   <p:clrMapOvr>
@@ -15884,7 +16744,7 @@
           <a:p>
             <a:pPr/>
             <a:r>
-              <a:t>2021 ISIS McStas school</a:t>
+              <a:t>2025 ISIS McStas school</a:t>
             </a:r>
           </a:p>
         </p:txBody>
@@ -16093,7 +16953,7 @@
           </p:grpSpPr>
           <p:sp>
             <p:nvSpPr>
-              <p:cNvPr id="10" name="2021 Virtual ISIS McStas School"/>
+              <p:cNvPr id="10" name="2025 ISIS McStas School"/>
               <p:cNvSpPr txBox="1"/>
               <p:nvPr/>
             </p:nvSpPr>
@@ -16123,21 +16983,21 @@
               </a:bodyPr>
               <a:lstStyle/>
               <a:p>
-                <a:pPr algn="ctr" defTabSz="393192">
+                <a:pPr algn="ctr" defTabSz="521208">
                   <a:lnSpc>
                     <a:spcPct val="110000"/>
                   </a:lnSpc>
                   <a:spcBef>
                     <a:spcPts val="0"/>
                   </a:spcBef>
-                  <a:defRPr b="1" i="1" sz="1591">
+                  <a:defRPr b="1" i="1" sz="2109">
                     <a:solidFill>
                       <a:srgbClr val="FFFFFF"/>
                     </a:solidFill>
                   </a:defRPr>
                 </a:pPr>
                 <a:r>
-                  <a:t>2021 Virtual ISIS</a:t>
+                  <a:t>2025 ISIS</a:t>
                 </a:r>
                 <a:br/>
                 <a:r>
@@ -16949,6 +17809,7 @@
     <p:sldLayoutId id="2147483657" r:id="rId18"/>
     <p:sldLayoutId id="2147483658" r:id="rId19"/>
     <p:sldLayoutId id="2147483659" r:id="rId20"/>
+    <p:sldLayoutId id="2147483660" r:id="rId21"/>
   </p:sldLayoutIdLst>
   <p:transition xmlns:p14="http://schemas.microsoft.com/office/powerpoint/2010/main" spd="med" advClick="1"/>
   <p:txStyles>
@@ -17683,493 +18544,6 @@
       </p:grpSpPr>
       <p:sp>
         <p:nvSpPr>
-          <p:cNvPr id="300" name="Topic - this is the front page"/>
-          <p:cNvSpPr txBox="1"/>
-          <p:nvPr>
-            <p:ph type="title"/>
-          </p:nvPr>
-        </p:nvSpPr>
-        <p:spPr>
-          <a:prstGeom prst="rect">
-            <a:avLst/>
-          </a:prstGeom>
-        </p:spPr>
-        <p:txBody>
-          <a:bodyPr/>
-          <a:lstStyle/>
-          <a:p>
-            <a:pPr/>
-            <a:r>
-              <a:t>Topic - this is the front page</a:t>
-            </a:r>
-          </a:p>
-        </p:txBody>
-      </p:sp>
-      <p:sp>
-        <p:nvSpPr>
-          <p:cNvPr id="301" name="Author"/>
-          <p:cNvSpPr txBox="1"/>
-          <p:nvPr>
-            <p:ph type="body" sz="half" idx="1"/>
-          </p:nvPr>
-        </p:nvSpPr>
-        <p:spPr>
-          <a:prstGeom prst="rect">
-            <a:avLst/>
-          </a:prstGeom>
-        </p:spPr>
-        <p:txBody>
-          <a:bodyPr/>
-          <a:lstStyle/>
-          <a:p>
-            <a:pPr/>
-            <a:r>
-              <a:t>Author</a:t>
-            </a:r>
-          </a:p>
-        </p:txBody>
-      </p:sp>
-      <p:sp>
-        <p:nvSpPr>
-          <p:cNvPr id="302" name="Slide Number"/>
-          <p:cNvSpPr txBox="1"/>
-          <p:nvPr>
-            <p:ph type="sldNum" sz="quarter" idx="2"/>
-          </p:nvPr>
-        </p:nvSpPr>
-        <p:spPr>
-          <a:prstGeom prst="rect">
-            <a:avLst/>
-          </a:prstGeom>
-          <a:extLst>
-            <a:ext uri="{C572A759-6A51-4108-AA02-DFA0A04FC94B}">
-              <ma14:wrappingTextBoxFlag xmlns:ma14="http://schemas.microsoft.com/office/mac/drawingml/2011/main" val="1"/>
-            </a:ext>
-          </a:extLst>
-        </p:spPr>
-        <p:txBody>
-          <a:bodyPr/>
-          <a:lstStyle/>
-          <a:p>
-            <a:pPr/>
-            <a:fld id="{86CB4B4D-7CA3-9044-876B-883B54F8677D}" type="slidenum"/>
-          </a:p>
-        </p:txBody>
-      </p:sp>
-    </p:spTree>
-  </p:cSld>
-  <p:clrMapOvr>
-    <a:masterClrMapping/>
-  </p:clrMapOvr>
-  <p:transition xmlns:p14="http://schemas.microsoft.com/office/powerpoint/2010/main" spd="med" advClick="1"/>
-</p:sld>
-</file>
-
-<file path=ppt/slides/slide10.xml><?xml version="1.0" encoding="utf-8"?>
-<p:sld xmlns:a="http://schemas.openxmlformats.org/drawingml/2006/main" xmlns:r="http://schemas.openxmlformats.org/officeDocument/2006/relationships" xmlns:p="http://schemas.openxmlformats.org/presentationml/2006/main" xmlns:m="http://schemas.openxmlformats.org/officeDocument/2006/math" xmlns:a14="http://schemas.microsoft.com/office/drawing/2010/main" showMasterSp="1" showMasterPhAnim="1">
-  <p:cSld>
-    <p:spTree>
-      <p:nvGrpSpPr>
-        <p:cNvPr id="1" name=""/>
-        <p:cNvGrpSpPr/>
-        <p:nvPr/>
-      </p:nvGrpSpPr>
-      <p:grpSpPr>
-        <a:xfrm>
-          <a:off x="0" y="0"/>
-          <a:ext cx="0" cy="0"/>
-          <a:chOff x="0" y="0"/>
-          <a:chExt cx="0" cy="0"/>
-        </a:xfrm>
-      </p:grpSpPr>
-      <p:sp>
-        <p:nvSpPr>
-          <p:cNvPr id="340" name="Slide Number"/>
-          <p:cNvSpPr txBox="1"/>
-          <p:nvPr>
-            <p:ph type="sldNum" sz="quarter" idx="2"/>
-          </p:nvPr>
-        </p:nvSpPr>
-        <p:spPr>
-          <a:prstGeom prst="rect">
-            <a:avLst/>
-          </a:prstGeom>
-          <a:extLst>
-            <a:ext uri="{C572A759-6A51-4108-AA02-DFA0A04FC94B}">
-              <ma14:wrappingTextBoxFlag xmlns:ma14="http://schemas.microsoft.com/office/mac/drawingml/2011/main" val="1"/>
-            </a:ext>
-          </a:extLst>
-        </p:spPr>
-        <p:txBody>
-          <a:bodyPr/>
-          <a:lstStyle/>
-          <a:p>
-            <a:pPr/>
-            <a:fld id="{86CB4B4D-7CA3-9044-876B-883B54F8677D}" type="slidenum"/>
-          </a:p>
-        </p:txBody>
-      </p:sp>
-    </p:spTree>
-  </p:cSld>
-  <p:clrMapOvr>
-    <a:masterClrMapping/>
-  </p:clrMapOvr>
-  <p:transition xmlns:p14="http://schemas.microsoft.com/office/powerpoint/2010/main" spd="med" advClick="1"/>
-</p:sld>
-</file>
-
-<file path=ppt/slides/slide2.xml><?xml version="1.0" encoding="utf-8"?>
-<p:sld xmlns:a="http://schemas.openxmlformats.org/drawingml/2006/main" xmlns:r="http://schemas.openxmlformats.org/officeDocument/2006/relationships" xmlns:p="http://schemas.openxmlformats.org/presentationml/2006/main" xmlns:m="http://schemas.openxmlformats.org/officeDocument/2006/math" xmlns:a14="http://schemas.microsoft.com/office/drawing/2010/main" showMasterSp="1" showMasterPhAnim="1">
-  <p:cSld>
-    <p:spTree>
-      <p:nvGrpSpPr>
-        <p:cNvPr id="1" name=""/>
-        <p:cNvGrpSpPr/>
-        <p:nvPr/>
-      </p:nvGrpSpPr>
-      <p:grpSpPr>
-        <a:xfrm>
-          <a:off x="0" y="0"/>
-          <a:ext cx="0" cy="0"/>
-          <a:chOff x="0" y="0"/>
-          <a:chExt cx="0" cy="0"/>
-        </a:xfrm>
-      </p:grpSpPr>
-      <p:sp>
-        <p:nvSpPr>
-          <p:cNvPr id="304" name="Double-click to edit"/>
-          <p:cNvSpPr txBox="1"/>
-          <p:nvPr>
-            <p:ph type="title"/>
-          </p:nvPr>
-        </p:nvSpPr>
-        <p:spPr>
-          <a:prstGeom prst="rect">
-            <a:avLst/>
-          </a:prstGeom>
-        </p:spPr>
-        <p:txBody>
-          <a:bodyPr/>
-          <a:lstStyle/>
-          <a:p>
-            <a:pPr/>
-          </a:p>
-        </p:txBody>
-      </p:sp>
-      <p:sp>
-        <p:nvSpPr>
-          <p:cNvPr id="305" name="Double-click to edit"/>
-          <p:cNvSpPr txBox="1"/>
-          <p:nvPr>
-            <p:ph type="body" idx="1"/>
-          </p:nvPr>
-        </p:nvSpPr>
-        <p:spPr>
-          <a:prstGeom prst="rect">
-            <a:avLst/>
-          </a:prstGeom>
-        </p:spPr>
-        <p:txBody>
-          <a:bodyPr/>
-          <a:lstStyle/>
-          <a:p>
-            <a:pPr/>
-          </a:p>
-        </p:txBody>
-      </p:sp>
-      <p:sp>
-        <p:nvSpPr>
-          <p:cNvPr id="306" name="Slide Number"/>
-          <p:cNvSpPr txBox="1"/>
-          <p:nvPr>
-            <p:ph type="sldNum" sz="quarter" idx="2"/>
-          </p:nvPr>
-        </p:nvSpPr>
-        <p:spPr>
-          <a:prstGeom prst="rect">
-            <a:avLst/>
-          </a:prstGeom>
-          <a:extLst>
-            <a:ext uri="{C572A759-6A51-4108-AA02-DFA0A04FC94B}">
-              <ma14:wrappingTextBoxFlag xmlns:ma14="http://schemas.microsoft.com/office/mac/drawingml/2011/main" val="1"/>
-            </a:ext>
-          </a:extLst>
-        </p:spPr>
-        <p:txBody>
-          <a:bodyPr/>
-          <a:lstStyle/>
-          <a:p>
-            <a:pPr/>
-            <a:fld id="{86CB4B4D-7CA3-9044-876B-883B54F8677D}" type="slidenum"/>
-          </a:p>
-        </p:txBody>
-      </p:sp>
-    </p:spTree>
-  </p:cSld>
-  <p:clrMapOvr>
-    <a:masterClrMapping/>
-  </p:clrMapOvr>
-  <p:transition xmlns:p14="http://schemas.microsoft.com/office/powerpoint/2010/main" spd="med" advClick="1"/>
-</p:sld>
-</file>
-
-<file path=ppt/slides/slide3.xml><?xml version="1.0" encoding="utf-8"?>
-<p:sld xmlns:a="http://schemas.openxmlformats.org/drawingml/2006/main" xmlns:r="http://schemas.openxmlformats.org/officeDocument/2006/relationships" xmlns:p="http://schemas.openxmlformats.org/presentationml/2006/main" xmlns:m="http://schemas.openxmlformats.org/officeDocument/2006/math" xmlns:a14="http://schemas.microsoft.com/office/drawing/2010/main" showMasterSp="1" showMasterPhAnim="1">
-  <p:cSld>
-    <p:spTree>
-      <p:nvGrpSpPr>
-        <p:cNvPr id="1" name=""/>
-        <p:cNvGrpSpPr/>
-        <p:nvPr/>
-      </p:nvGrpSpPr>
-      <p:grpSpPr>
-        <a:xfrm>
-          <a:off x="0" y="0"/>
-          <a:ext cx="0" cy="0"/>
-          <a:chOff x="0" y="0"/>
-          <a:chExt cx="0" cy="0"/>
-        </a:xfrm>
-      </p:grpSpPr>
-      <p:sp>
-        <p:nvSpPr>
-          <p:cNvPr id="308" name="Double-click to edit"/>
-          <p:cNvSpPr txBox="1"/>
-          <p:nvPr>
-            <p:ph type="title"/>
-          </p:nvPr>
-        </p:nvSpPr>
-        <p:spPr>
-          <a:prstGeom prst="rect">
-            <a:avLst/>
-          </a:prstGeom>
-        </p:spPr>
-        <p:txBody>
-          <a:bodyPr/>
-          <a:lstStyle/>
-          <a:p>
-            <a:pPr/>
-          </a:p>
-        </p:txBody>
-      </p:sp>
-      <p:sp>
-        <p:nvSpPr>
-          <p:cNvPr id="309" name="Double-click to edit"/>
-          <p:cNvSpPr txBox="1"/>
-          <p:nvPr>
-            <p:ph type="body" sz="half" idx="1"/>
-          </p:nvPr>
-        </p:nvSpPr>
-        <p:spPr>
-          <a:prstGeom prst="rect">
-            <a:avLst/>
-          </a:prstGeom>
-        </p:spPr>
-        <p:txBody>
-          <a:bodyPr/>
-          <a:lstStyle/>
-          <a:p>
-            <a:pPr/>
-          </a:p>
-        </p:txBody>
-      </p:sp>
-      <p:sp>
-        <p:nvSpPr>
-          <p:cNvPr id="310" name="Slide Number"/>
-          <p:cNvSpPr txBox="1"/>
-          <p:nvPr>
-            <p:ph type="sldNum" sz="quarter" idx="2"/>
-          </p:nvPr>
-        </p:nvSpPr>
-        <p:spPr>
-          <a:prstGeom prst="rect">
-            <a:avLst/>
-          </a:prstGeom>
-          <a:extLst>
-            <a:ext uri="{C572A759-6A51-4108-AA02-DFA0A04FC94B}">
-              <ma14:wrappingTextBoxFlag xmlns:ma14="http://schemas.microsoft.com/office/mac/drawingml/2011/main" val="1"/>
-            </a:ext>
-          </a:extLst>
-        </p:spPr>
-        <p:txBody>
-          <a:bodyPr/>
-          <a:lstStyle/>
-          <a:p>
-            <a:pPr/>
-            <a:fld id="{86CB4B4D-7CA3-9044-876B-883B54F8677D}" type="slidenum"/>
-          </a:p>
-        </p:txBody>
-      </p:sp>
-    </p:spTree>
-  </p:cSld>
-  <p:clrMapOvr>
-    <a:masterClrMapping/>
-  </p:clrMapOvr>
-  <p:transition xmlns:p14="http://schemas.microsoft.com/office/powerpoint/2010/main" spd="med" advClick="1"/>
-</p:sld>
-</file>
-
-<file path=ppt/slides/slide4.xml><?xml version="1.0" encoding="utf-8"?>
-<p:sld xmlns:a="http://schemas.openxmlformats.org/drawingml/2006/main" xmlns:r="http://schemas.openxmlformats.org/officeDocument/2006/relationships" xmlns:p="http://schemas.openxmlformats.org/presentationml/2006/main" xmlns:m="http://schemas.openxmlformats.org/officeDocument/2006/math" xmlns:a14="http://schemas.microsoft.com/office/drawing/2010/main" showMasterSp="1" showMasterPhAnim="1">
-  <p:cSld>
-    <p:spTree>
-      <p:nvGrpSpPr>
-        <p:cNvPr id="1" name=""/>
-        <p:cNvGrpSpPr/>
-        <p:nvPr/>
-      </p:nvGrpSpPr>
-      <p:grpSpPr>
-        <a:xfrm>
-          <a:off x="0" y="0"/>
-          <a:ext cx="0" cy="0"/>
-          <a:chOff x="0" y="0"/>
-          <a:chExt cx="0" cy="0"/>
-        </a:xfrm>
-      </p:grpSpPr>
-      <p:sp>
-        <p:nvSpPr>
-          <p:cNvPr id="312" name="Double-click to edit"/>
-          <p:cNvSpPr txBox="1"/>
-          <p:nvPr>
-            <p:ph type="title"/>
-          </p:nvPr>
-        </p:nvSpPr>
-        <p:spPr>
-          <a:prstGeom prst="rect">
-            <a:avLst/>
-          </a:prstGeom>
-        </p:spPr>
-        <p:txBody>
-          <a:bodyPr/>
-          <a:lstStyle/>
-          <a:p>
-            <a:pPr/>
-          </a:p>
-        </p:txBody>
-      </p:sp>
-      <p:sp>
-        <p:nvSpPr>
-          <p:cNvPr id="313" name="Double-click to edit"/>
-          <p:cNvSpPr txBox="1"/>
-          <p:nvPr>
-            <p:ph type="body" sz="half" idx="1"/>
-          </p:nvPr>
-        </p:nvSpPr>
-        <p:spPr>
-          <a:prstGeom prst="rect">
-            <a:avLst/>
-          </a:prstGeom>
-        </p:spPr>
-        <p:txBody>
-          <a:bodyPr/>
-          <a:lstStyle/>
-          <a:p>
-            <a:pPr/>
-          </a:p>
-        </p:txBody>
-      </p:sp>
-      <p:pic>
-        <p:nvPicPr>
-          <p:cNvPr id="314" name="Picture Placeholder 9" descr="Picture Placeholder 9"/>
-          <p:cNvPicPr>
-            <a:picLocks noChangeAspect="1"/>
-          </p:cNvPicPr>
-          <p:nvPr>
-            <p:ph type="pic" idx="21"/>
-          </p:nvPr>
-        </p:nvPicPr>
-        <p:blipFill>
-          <a:blip r:embed="rId2">
-            <a:extLst/>
-          </a:blip>
-          <a:stretch>
-            <a:fillRect/>
-          </a:stretch>
-        </p:blipFill>
-        <p:spPr>
-          <a:prstGeom prst="rect">
-            <a:avLst/>
-          </a:prstGeom>
-        </p:spPr>
-      </p:pic>
-      <p:pic>
-        <p:nvPicPr>
-          <p:cNvPr id="315" name="Picture Placeholder 11" descr="Picture Placeholder 11"/>
-          <p:cNvPicPr>
-            <a:picLocks noChangeAspect="1"/>
-          </p:cNvPicPr>
-          <p:nvPr>
-            <p:ph type="pic" idx="22"/>
-          </p:nvPr>
-        </p:nvPicPr>
-        <p:blipFill>
-          <a:blip r:embed="rId2">
-            <a:extLst/>
-          </a:blip>
-          <a:stretch>
-            <a:fillRect/>
-          </a:stretch>
-        </p:blipFill>
-        <p:spPr>
-          <a:prstGeom prst="rect">
-            <a:avLst/>
-          </a:prstGeom>
-        </p:spPr>
-      </p:pic>
-      <p:sp>
-        <p:nvSpPr>
-          <p:cNvPr id="316" name="Slide Number"/>
-          <p:cNvSpPr txBox="1"/>
-          <p:nvPr>
-            <p:ph type="sldNum" sz="quarter" idx="2"/>
-          </p:nvPr>
-        </p:nvSpPr>
-        <p:spPr>
-          <a:prstGeom prst="rect">
-            <a:avLst/>
-          </a:prstGeom>
-          <a:extLst>
-            <a:ext uri="{C572A759-6A51-4108-AA02-DFA0A04FC94B}">
-              <ma14:wrappingTextBoxFlag xmlns:ma14="http://schemas.microsoft.com/office/mac/drawingml/2011/main" val="1"/>
-            </a:ext>
-          </a:extLst>
-        </p:spPr>
-        <p:txBody>
-          <a:bodyPr/>
-          <a:lstStyle/>
-          <a:p>
-            <a:pPr/>
-            <a:fld id="{86CB4B4D-7CA3-9044-876B-883B54F8677D}" type="slidenum"/>
-          </a:p>
-        </p:txBody>
-      </p:sp>
-    </p:spTree>
-  </p:cSld>
-  <p:clrMapOvr>
-    <a:masterClrMapping/>
-  </p:clrMapOvr>
-  <p:transition xmlns:p14="http://schemas.microsoft.com/office/powerpoint/2010/main" spd="med" advClick="1"/>
-</p:sld>
-</file>
-
-<file path=ppt/slides/slide5.xml><?xml version="1.0" encoding="utf-8"?>
-<p:sld xmlns:a="http://schemas.openxmlformats.org/drawingml/2006/main" xmlns:r="http://schemas.openxmlformats.org/officeDocument/2006/relationships" xmlns:p="http://schemas.openxmlformats.org/presentationml/2006/main" xmlns:m="http://schemas.openxmlformats.org/officeDocument/2006/math" xmlns:a14="http://schemas.microsoft.com/office/drawing/2010/main" showMasterSp="1" showMasterPhAnim="1">
-  <p:cSld>
-    <p:spTree>
-      <p:nvGrpSpPr>
-        <p:cNvPr id="1" name=""/>
-        <p:cNvGrpSpPr/>
-        <p:nvPr/>
-      </p:nvGrpSpPr>
-      <p:grpSpPr>
-        <a:xfrm>
-          <a:off x="0" y="0"/>
-          <a:ext cx="0" cy="0"/>
-          <a:chOff x="0" y="0"/>
-          <a:chExt cx="0" cy="0"/>
-        </a:xfrm>
-      </p:grpSpPr>
-      <p:sp>
-        <p:nvSpPr>
           <p:cNvPr id="318" name="Double-click to edit"/>
           <p:cNvSpPr txBox="1"/>
           <p:nvPr>
@@ -18210,472 +18584,15 @@
           </a:p>
         </p:txBody>
       </p:sp>
-      <p:pic>
-        <p:nvPicPr>
-          <p:cNvPr id="320" name="Picture Placeholder 9" descr="Picture Placeholder 9"/>
-          <p:cNvPicPr>
-            <a:picLocks noChangeAspect="1"/>
-          </p:cNvPicPr>
-          <p:nvPr>
-            <p:ph type="pic" idx="21"/>
-          </p:nvPr>
-        </p:nvPicPr>
-        <p:blipFill>
-          <a:blip r:embed="rId2">
-            <a:extLst/>
-          </a:blip>
-          <a:srcRect l="0" t="0" r="0" b="0"/>
-          <a:stretch>
-            <a:fillRect/>
-          </a:stretch>
-        </p:blipFill>
-        <p:spPr>
-          <a:prstGeom prst="rect">
-            <a:avLst/>
-          </a:prstGeom>
-        </p:spPr>
-      </p:pic>
-      <p:pic>
-        <p:nvPicPr>
-          <p:cNvPr id="321" name="Picture Placeholder 11" descr="Picture Placeholder 11"/>
-          <p:cNvPicPr>
-            <a:picLocks noChangeAspect="1"/>
-          </p:cNvPicPr>
-          <p:nvPr>
-            <p:ph type="pic" idx="22"/>
-          </p:nvPr>
-        </p:nvPicPr>
-        <p:blipFill>
-          <a:blip r:embed="rId2">
-            <a:extLst/>
-          </a:blip>
-          <a:srcRect l="0" t="0" r="0" b="0"/>
-          <a:stretch>
-            <a:fillRect/>
-          </a:stretch>
-        </p:blipFill>
-        <p:spPr>
-          <a:prstGeom prst="rect">
-            <a:avLst/>
-          </a:prstGeom>
-        </p:spPr>
-      </p:pic>
       <p:sp>
         <p:nvSpPr>
-          <p:cNvPr id="322" name="Slide Number"/>
+          <p:cNvPr id="320" name="Slide Number"/>
           <p:cNvSpPr txBox="1"/>
           <p:nvPr>
             <p:ph type="sldNum" sz="quarter" idx="2"/>
           </p:nvPr>
         </p:nvSpPr>
         <p:spPr>
-          <a:prstGeom prst="rect">
-            <a:avLst/>
-          </a:prstGeom>
-          <a:extLst>
-            <a:ext uri="{C572A759-6A51-4108-AA02-DFA0A04FC94B}">
-              <ma14:wrappingTextBoxFlag xmlns:ma14="http://schemas.microsoft.com/office/mac/drawingml/2011/main" val="1"/>
-            </a:ext>
-          </a:extLst>
-        </p:spPr>
-        <p:txBody>
-          <a:bodyPr/>
-          <a:lstStyle/>
-          <a:p>
-            <a:pPr/>
-            <a:fld id="{86CB4B4D-7CA3-9044-876B-883B54F8677D}" type="slidenum"/>
-          </a:p>
-        </p:txBody>
-      </p:sp>
-    </p:spTree>
-  </p:cSld>
-  <p:clrMapOvr>
-    <a:masterClrMapping/>
-  </p:clrMapOvr>
-  <p:transition xmlns:p14="http://schemas.microsoft.com/office/powerpoint/2010/main" spd="med" advClick="1"/>
-</p:sld>
-</file>
-
-<file path=ppt/slides/slide6.xml><?xml version="1.0" encoding="utf-8"?>
-<p:sld xmlns:a="http://schemas.openxmlformats.org/drawingml/2006/main" xmlns:r="http://schemas.openxmlformats.org/officeDocument/2006/relationships" xmlns:p="http://schemas.openxmlformats.org/presentationml/2006/main" xmlns:m="http://schemas.openxmlformats.org/officeDocument/2006/math" xmlns:a14="http://schemas.microsoft.com/office/drawing/2010/main" showMasterSp="1" showMasterPhAnim="1">
-  <p:cSld>
-    <p:spTree>
-      <p:nvGrpSpPr>
-        <p:cNvPr id="1" name=""/>
-        <p:cNvGrpSpPr/>
-        <p:nvPr/>
-      </p:nvGrpSpPr>
-      <p:grpSpPr>
-        <a:xfrm>
-          <a:off x="0" y="0"/>
-          <a:ext cx="0" cy="0"/>
-          <a:chOff x="0" y="0"/>
-          <a:chExt cx="0" cy="0"/>
-        </a:xfrm>
-      </p:grpSpPr>
-      <p:sp>
-        <p:nvSpPr>
-          <p:cNvPr id="324" name="Double-click to edit"/>
-          <p:cNvSpPr txBox="1"/>
-          <p:nvPr>
-            <p:ph type="title"/>
-          </p:nvPr>
-        </p:nvSpPr>
-        <p:spPr>
-          <a:prstGeom prst="rect">
-            <a:avLst/>
-          </a:prstGeom>
-        </p:spPr>
-        <p:txBody>
-          <a:bodyPr/>
-          <a:lstStyle/>
-          <a:p>
-            <a:pPr/>
-          </a:p>
-        </p:txBody>
-      </p:sp>
-      <p:sp>
-        <p:nvSpPr>
-          <p:cNvPr id="325" name="Double-click to edit"/>
-          <p:cNvSpPr txBox="1"/>
-          <p:nvPr>
-            <p:ph type="body" sz="quarter" idx="1"/>
-          </p:nvPr>
-        </p:nvSpPr>
-        <p:spPr>
-          <a:prstGeom prst="rect">
-            <a:avLst/>
-          </a:prstGeom>
-        </p:spPr>
-        <p:txBody>
-          <a:bodyPr/>
-          <a:lstStyle/>
-          <a:p>
-            <a:pPr/>
-          </a:p>
-        </p:txBody>
-      </p:sp>
-      <p:sp>
-        <p:nvSpPr>
-          <p:cNvPr id="326" name="Text Placeholder 18"/>
-          <p:cNvSpPr/>
-          <p:nvPr>
-            <p:ph type="body" idx="21"/>
-          </p:nvPr>
-        </p:nvSpPr>
-        <p:spPr>
-          <a:prstGeom prst="rect">
-            <a:avLst/>
-          </a:prstGeom>
-        </p:spPr>
-        <p:txBody>
-          <a:bodyPr/>
-          <a:lstStyle/>
-          <a:p>
-            <a:pPr marL="0" indent="0">
-              <a:spcBef>
-                <a:spcPts val="500"/>
-              </a:spcBef>
-              <a:buSzTx/>
-              <a:buNone/>
-              <a:defRPr b="1" sz="2400"/>
-            </a:pPr>
-          </a:p>
-        </p:txBody>
-      </p:sp>
-      <p:sp>
-        <p:nvSpPr>
-          <p:cNvPr id="327" name="Text Placeholder 22"/>
-          <p:cNvSpPr/>
-          <p:nvPr>
-            <p:ph type="body" idx="22"/>
-          </p:nvPr>
-        </p:nvSpPr>
-        <p:spPr>
-          <a:prstGeom prst="rect">
-            <a:avLst/>
-          </a:prstGeom>
-        </p:spPr>
-        <p:txBody>
-          <a:bodyPr/>
-          <a:lstStyle/>
-          <a:p>
-            <a:pPr marL="0" indent="0">
-              <a:spcBef>
-                <a:spcPts val="500"/>
-              </a:spcBef>
-              <a:buSzTx/>
-              <a:buNone/>
-              <a:defRPr b="1" sz="2400"/>
-            </a:pPr>
-          </a:p>
-        </p:txBody>
-      </p:sp>
-      <p:pic>
-        <p:nvPicPr>
-          <p:cNvPr id="328" name="Picture Placeholder 8" descr="Picture Placeholder 8"/>
-          <p:cNvPicPr>
-            <a:picLocks noChangeAspect="1"/>
-          </p:cNvPicPr>
-          <p:nvPr>
-            <p:ph type="pic" idx="23"/>
-          </p:nvPr>
-        </p:nvPicPr>
-        <p:blipFill>
-          <a:blip r:embed="rId2">
-            <a:extLst/>
-          </a:blip>
-          <a:stretch>
-            <a:fillRect/>
-          </a:stretch>
-        </p:blipFill>
-        <p:spPr>
-          <a:prstGeom prst="rect">
-            <a:avLst/>
-          </a:prstGeom>
-        </p:spPr>
-      </p:pic>
-      <p:pic>
-        <p:nvPicPr>
-          <p:cNvPr id="329" name="Picture Placeholder 8" descr="Picture Placeholder 8"/>
-          <p:cNvPicPr>
-            <a:picLocks noChangeAspect="1"/>
-          </p:cNvPicPr>
-          <p:nvPr>
-            <p:ph type="pic" idx="24"/>
-          </p:nvPr>
-        </p:nvPicPr>
-        <p:blipFill>
-          <a:blip r:embed="rId2">
-            <a:extLst/>
-          </a:blip>
-          <a:stretch>
-            <a:fillRect/>
-          </a:stretch>
-        </p:blipFill>
-        <p:spPr>
-          <a:prstGeom prst="rect">
-            <a:avLst/>
-          </a:prstGeom>
-        </p:spPr>
-      </p:pic>
-      <p:pic>
-        <p:nvPicPr>
-          <p:cNvPr id="330" name="Picture Placeholder 8" descr="Picture Placeholder 8"/>
-          <p:cNvPicPr>
-            <a:picLocks noChangeAspect="1"/>
-          </p:cNvPicPr>
-          <p:nvPr>
-            <p:ph type="pic" idx="25"/>
-          </p:nvPr>
-        </p:nvPicPr>
-        <p:blipFill>
-          <a:blip r:embed="rId2">
-            <a:extLst/>
-          </a:blip>
-          <a:stretch>
-            <a:fillRect/>
-          </a:stretch>
-        </p:blipFill>
-        <p:spPr>
-          <a:prstGeom prst="rect">
-            <a:avLst/>
-          </a:prstGeom>
-        </p:spPr>
-      </p:pic>
-      <p:sp>
-        <p:nvSpPr>
-          <p:cNvPr id="331" name="Slide Number"/>
-          <p:cNvSpPr txBox="1"/>
-          <p:nvPr>
-            <p:ph type="sldNum" sz="quarter" idx="2"/>
-          </p:nvPr>
-        </p:nvSpPr>
-        <p:spPr>
-          <a:prstGeom prst="rect">
-            <a:avLst/>
-          </a:prstGeom>
-          <a:extLst>
-            <a:ext uri="{C572A759-6A51-4108-AA02-DFA0A04FC94B}">
-              <ma14:wrappingTextBoxFlag xmlns:ma14="http://schemas.microsoft.com/office/mac/drawingml/2011/main" val="1"/>
-            </a:ext>
-          </a:extLst>
-        </p:spPr>
-        <p:txBody>
-          <a:bodyPr/>
-          <a:lstStyle/>
-          <a:p>
-            <a:pPr/>
-            <a:fld id="{86CB4B4D-7CA3-9044-876B-883B54F8677D}" type="slidenum"/>
-          </a:p>
-        </p:txBody>
-      </p:sp>
-    </p:spTree>
-  </p:cSld>
-  <p:clrMapOvr>
-    <a:masterClrMapping/>
-  </p:clrMapOvr>
-  <p:transition xmlns:p14="http://schemas.microsoft.com/office/powerpoint/2010/main" spd="med" advClick="1"/>
-</p:sld>
-</file>
-
-<file path=ppt/slides/slide7.xml><?xml version="1.0" encoding="utf-8"?>
-<p:sld xmlns:a="http://schemas.openxmlformats.org/drawingml/2006/main" xmlns:r="http://schemas.openxmlformats.org/officeDocument/2006/relationships" xmlns:p="http://schemas.openxmlformats.org/presentationml/2006/main" xmlns:m="http://schemas.openxmlformats.org/officeDocument/2006/math" xmlns:a14="http://schemas.microsoft.com/office/drawing/2010/main" showMasterSp="1" showMasterPhAnim="1">
-  <p:cSld>
-    <p:spTree>
-      <p:nvGrpSpPr>
-        <p:cNvPr id="1" name=""/>
-        <p:cNvGrpSpPr/>
-        <p:nvPr/>
-      </p:nvGrpSpPr>
-      <p:grpSpPr>
-        <a:xfrm>
-          <a:off x="0" y="0"/>
-          <a:ext cx="0" cy="0"/>
-          <a:chOff x="0" y="0"/>
-          <a:chExt cx="0" cy="0"/>
-        </a:xfrm>
-      </p:grpSpPr>
-      <p:sp>
-        <p:nvSpPr>
-          <p:cNvPr id="333" name="Double-click to edit"/>
-          <p:cNvSpPr txBox="1"/>
-          <p:nvPr>
-            <p:ph type="title"/>
-          </p:nvPr>
-        </p:nvSpPr>
-        <p:spPr>
-          <a:prstGeom prst="rect">
-            <a:avLst/>
-          </a:prstGeom>
-        </p:spPr>
-        <p:txBody>
-          <a:bodyPr/>
-          <a:lstStyle/>
-          <a:p>
-            <a:pPr/>
-          </a:p>
-        </p:txBody>
-      </p:sp>
-      <p:sp>
-        <p:nvSpPr>
-          <p:cNvPr id="334" name="Slide Number"/>
-          <p:cNvSpPr txBox="1"/>
-          <p:nvPr>
-            <p:ph type="sldNum" sz="quarter" idx="2"/>
-          </p:nvPr>
-        </p:nvSpPr>
-        <p:spPr>
-          <a:prstGeom prst="rect">
-            <a:avLst/>
-          </a:prstGeom>
-          <a:extLst>
-            <a:ext uri="{C572A759-6A51-4108-AA02-DFA0A04FC94B}">
-              <ma14:wrappingTextBoxFlag xmlns:ma14="http://schemas.microsoft.com/office/mac/drawingml/2011/main" val="1"/>
-            </a:ext>
-          </a:extLst>
-        </p:spPr>
-        <p:txBody>
-          <a:bodyPr/>
-          <a:lstStyle/>
-          <a:p>
-            <a:pPr/>
-            <a:fld id="{86CB4B4D-7CA3-9044-876B-883B54F8677D}" type="slidenum"/>
-          </a:p>
-        </p:txBody>
-      </p:sp>
-    </p:spTree>
-  </p:cSld>
-  <p:clrMapOvr>
-    <a:masterClrMapping/>
-  </p:clrMapOvr>
-  <p:transition xmlns:p14="http://schemas.microsoft.com/office/powerpoint/2010/main" spd="med" advClick="1"/>
-</p:sld>
-</file>
-
-<file path=ppt/slides/slide8.xml><?xml version="1.0" encoding="utf-8"?>
-<p:sld xmlns:a="http://schemas.openxmlformats.org/drawingml/2006/main" xmlns:r="http://schemas.openxmlformats.org/officeDocument/2006/relationships" xmlns:p="http://schemas.openxmlformats.org/presentationml/2006/main" xmlns:m="http://schemas.openxmlformats.org/officeDocument/2006/math" xmlns:a14="http://schemas.microsoft.com/office/drawing/2010/main" showMasterSp="1" showMasterPhAnim="1">
-  <p:cSld>
-    <p:spTree>
-      <p:nvGrpSpPr>
-        <p:cNvPr id="1" name=""/>
-        <p:cNvGrpSpPr/>
-        <p:nvPr/>
-      </p:nvGrpSpPr>
-      <p:grpSpPr>
-        <a:xfrm>
-          <a:off x="0" y="0"/>
-          <a:ext cx="0" cy="0"/>
-          <a:chOff x="0" y="0"/>
-          <a:chExt cx="0" cy="0"/>
-        </a:xfrm>
-      </p:grpSpPr>
-      <p:sp>
-        <p:nvSpPr>
-          <p:cNvPr id="336" name="Slide Number"/>
-          <p:cNvSpPr txBox="1"/>
-          <p:nvPr>
-            <p:ph type="sldNum" sz="quarter" idx="2"/>
-          </p:nvPr>
-        </p:nvSpPr>
-        <p:spPr>
-          <a:prstGeom prst="rect">
-            <a:avLst/>
-          </a:prstGeom>
-          <a:extLst>
-            <a:ext uri="{C572A759-6A51-4108-AA02-DFA0A04FC94B}">
-              <ma14:wrappingTextBoxFlag xmlns:ma14="http://schemas.microsoft.com/office/mac/drawingml/2011/main" val="1"/>
-            </a:ext>
-          </a:extLst>
-        </p:spPr>
-        <p:txBody>
-          <a:bodyPr/>
-          <a:lstStyle/>
-          <a:p>
-            <a:pPr/>
-            <a:fld id="{86CB4B4D-7CA3-9044-876B-883B54F8677D}" type="slidenum"/>
-          </a:p>
-        </p:txBody>
-      </p:sp>
-    </p:spTree>
-  </p:cSld>
-  <p:clrMapOvr>
-    <a:masterClrMapping/>
-  </p:clrMapOvr>
-  <p:transition xmlns:p14="http://schemas.microsoft.com/office/powerpoint/2010/main" spd="med" advClick="1"/>
-</p:sld>
-</file>
-
-<file path=ppt/slides/slide9.xml><?xml version="1.0" encoding="utf-8"?>
-<p:sld xmlns:a="http://schemas.openxmlformats.org/drawingml/2006/main" xmlns:r="http://schemas.openxmlformats.org/officeDocument/2006/relationships" xmlns:p="http://schemas.openxmlformats.org/presentationml/2006/main" xmlns:m="http://schemas.openxmlformats.org/officeDocument/2006/math" xmlns:a14="http://schemas.microsoft.com/office/drawing/2010/main" showMasterSp="1" showMasterPhAnim="1">
-  <p:cSld>
-    <p:spTree>
-      <p:nvGrpSpPr>
-        <p:cNvPr id="1" name=""/>
-        <p:cNvGrpSpPr/>
-        <p:nvPr/>
-      </p:nvGrpSpPr>
-      <p:grpSpPr>
-        <a:xfrm>
-          <a:off x="0" y="0"/>
-          <a:ext cx="0" cy="0"/>
-          <a:chOff x="0" y="0"/>
-          <a:chExt cx="0" cy="0"/>
-        </a:xfrm>
-      </p:grpSpPr>
-      <p:sp>
-        <p:nvSpPr>
-          <p:cNvPr id="338" name="Slide Number"/>
-          <p:cNvSpPr txBox="1"/>
-          <p:nvPr>
-            <p:ph type="sldNum" sz="quarter" idx="2"/>
-          </p:nvPr>
-        </p:nvSpPr>
-        <p:spPr>
-          <a:xfrm flipH="1" rot="10800000">
-            <a:off x="0" y="6849134"/>
-            <a:ext cx="127000" cy="127001"/>
-          </a:xfrm>
           <a:prstGeom prst="rect">
             <a:avLst/>
           </a:prstGeom>
